--- a/slides/Roshni-AICON26-Demo.pptx
+++ b/slides/Roshni-AICON26-Demo.pptx
@@ -4,9 +4,6 @@
   <p:sldMasterIdLst>
     <p:sldMasterId id="2147483648" r:id="rId1"/>
   </p:sldMasterIdLst>
-  <p:notesMasterIdLst>
-    <p:notesMasterId r:id="rId9"/>
-  </p:notesMasterIdLst>
   <p:sldIdLst>
     <p:sldId id="256" r:id="rId2"/>
     <p:sldId id="257" r:id="rId3"/>
@@ -15,7 +12,11 @@
     <p:sldId id="260" r:id="rId6"/>
     <p:sldId id="261" r:id="rId7"/>
     <p:sldId id="262" r:id="rId8"/>
+    <p:sldId id="263" r:id="rId9"/>
   </p:sldIdLst>
+  <p:notesMasterIdLst>
+    <p:notesMasterId r:id="rId10"/>
+  </p:notesMasterIdLst>
   <p:sldSz cx="12192000" cy="6858000"/>
   <p:notesSz cx="6858000" cy="12192000"/>
   <p:defaultTextStyle>
@@ -110,11 +111,6 @@
       </a:defRPr>
     </a:lvl9pPr>
   </p:defaultTextStyle>
-  <p:extLst>
-    <p:ext uri="{EFAFB233-063F-42B5-8137-9DF3F51BA10A}">
-      <p15:sldGuideLst xmlns:p15="http://schemas.microsoft.com/office/powerpoint/2012/main"/>
-    </p:ext>
-  </p:extLst>
 </p:presentation>
 </file>
 
@@ -140,10 +136,234 @@
           <a:chExt cx="0" cy="0"/>
         </a:xfrm>
       </p:grpSpPr>
+      <p:sp>
+        <p:nvSpPr>
+          <p:cNvPr id="2" name="Header Placeholder 1"/>
+          <p:cNvSpPr>
+            <a:spLocks noGrp="1"/>
+          </p:cNvSpPr>
+          <p:nvPr>
+            <p:ph type="hdr" sz="quarter"/>
+          </p:nvPr>
+        </p:nvSpPr>
+        <p:spPr>
+          <a:xfrm>
+            <a:off x="0" y="0"/>
+            <a:ext cx="2971800" cy="458788"/>
+          </a:xfrm>
+          <a:prstGeom prst="rect">
+            <a:avLst/>
+          </a:prstGeom>
+        </p:spPr>
+        <p:txBody>
+          <a:bodyPr vert="horz" lIns="91440" tIns="45720" rIns="91440" bIns="45720" rtlCol="0"/>
+          <a:lstStyle>
+            <a:lvl1pPr algn="l">
+              <a:defRPr sz="1200"/>
+            </a:lvl1pPr>
+          </a:lstStyle>
+          <a:p>
+            <a:endParaRPr lang="en-US"/>
+          </a:p>
+        </p:txBody>
+      </p:sp>
+      <p:sp>
+        <p:nvSpPr>
+          <p:cNvPr id="3" name="Date Placeholder 2"/>
+          <p:cNvSpPr>
+            <a:spLocks noGrp="1"/>
+          </p:cNvSpPr>
+          <p:nvPr>
+            <p:ph type="dt" idx="1"/>
+          </p:nvPr>
+        </p:nvSpPr>
+        <p:spPr>
+          <a:xfrm>
+            <a:off x="3884613" y="0"/>
+            <a:ext cx="2971800" cy="458788"/>
+          </a:xfrm>
+          <a:prstGeom prst="rect">
+            <a:avLst/>
+          </a:prstGeom>
+        </p:spPr>
+        <p:txBody>
+          <a:bodyPr vert="horz" lIns="91440" tIns="45720" rIns="91440" bIns="45720" rtlCol="0"/>
+          <a:lstStyle>
+            <a:lvl1pPr algn="r">
+              <a:defRPr sz="1200"/>
+            </a:lvl1pPr>
+          </a:lstStyle>
+          <a:p>
+            <a:fld id="{5282F153-3F37-0F45-9E97-73ACFA13230C}" type="datetimeFigureOut">
+              <a:rPr lang="en-US"/>
+              <a:t>7/23/19</a:t>
+            </a:fld>
+            <a:endParaRPr lang="en-US"/>
+          </a:p>
+        </p:txBody>
+      </p:sp>
+      <p:sp>
+        <p:nvSpPr>
+          <p:cNvPr id="4" name="Slide Image Placeholder 3"/>
+          <p:cNvSpPr>
+            <a:spLocks noGrp="1" noRot="1" noChangeAspect="1"/>
+          </p:cNvSpPr>
+          <p:nvPr>
+            <p:ph type="sldImg" idx="2"/>
+          </p:nvPr>
+        </p:nvSpPr>
+        <p:spPr>
+          <a:xfrm>
+            <a:off x="685800" y="1143000"/>
+            <a:ext cx="5486400" cy="3086100"/>
+          </a:xfrm>
+          <a:prstGeom prst="rect">
+            <a:avLst/>
+          </a:prstGeom>
+          <a:noFill/>
+          <a:ln w="12700">
+            <a:solidFill>
+              <a:prstClr val="black"/>
+            </a:solidFill>
+          </a:ln>
+        </p:spPr>
+        <p:txBody>
+          <a:bodyPr vert="horz" lIns="91440" tIns="45720" rIns="91440" bIns="45720" rtlCol="0" anchor="ctr"/>
+          <a:lstStyle/>
+          <a:p>
+            <a:endParaRPr lang="en-US"/>
+          </a:p>
+        </p:txBody>
+      </p:sp>
+      <p:sp>
+        <p:nvSpPr>
+          <p:cNvPr id="5" name="Notes Placeholder 4"/>
+          <p:cNvSpPr>
+            <a:spLocks noGrp="1"/>
+          </p:cNvSpPr>
+          <p:nvPr>
+            <p:ph type="body" sz="quarter" idx="3"/>
+          </p:nvPr>
+        </p:nvSpPr>
+        <p:spPr>
+          <a:xfrm>
+            <a:off x="685800" y="4400550"/>
+            <a:ext cx="5486400" cy="3600450"/>
+          </a:xfrm>
+          <a:prstGeom prst="rect">
+            <a:avLst/>
+          </a:prstGeom>
+        </p:spPr>
+        <p:txBody>
+          <a:bodyPr vert="horz" lIns="91440" tIns="45720" rIns="91440" bIns="45720" rtlCol="0"/>
+          <a:lstStyle/>
+          <a:p>
+            <a:pPr lvl="0"/>
+            <a:r>
+              <a:rPr lang="en-US"/>
+              <a:t>Click to edit Master text styles</a:t>
+            </a:r>
+          </a:p>
+          <a:p>
+            <a:pPr lvl="1"/>
+            <a:r>
+              <a:rPr lang="en-US"/>
+              <a:t>Second level</a:t>
+            </a:r>
+          </a:p>
+          <a:p>
+            <a:pPr lvl="2"/>
+            <a:r>
+              <a:rPr lang="en-US"/>
+              <a:t>Third level</a:t>
+            </a:r>
+          </a:p>
+          <a:p>
+            <a:pPr lvl="3"/>
+            <a:r>
+              <a:rPr lang="en-US"/>
+              <a:t>Fourth level</a:t>
+            </a:r>
+          </a:p>
+          <a:p>
+            <a:pPr lvl="4"/>
+            <a:r>
+              <a:rPr lang="en-US"/>
+              <a:t>Fifth level</a:t>
+            </a:r>
+          </a:p>
+        </p:txBody>
+      </p:sp>
+      <p:sp>
+        <p:nvSpPr>
+          <p:cNvPr id="6" name="Footer Placeholder 5"/>
+          <p:cNvSpPr>
+            <a:spLocks noGrp="1"/>
+          </p:cNvSpPr>
+          <p:nvPr>
+            <p:ph type="ftr" sz="quarter" idx="4"/>
+          </p:nvPr>
+        </p:nvSpPr>
+        <p:spPr>
+          <a:xfrm>
+            <a:off x="0" y="8685213"/>
+            <a:ext cx="2971800" cy="458787"/>
+          </a:xfrm>
+          <a:prstGeom prst="rect">
+            <a:avLst/>
+          </a:prstGeom>
+        </p:spPr>
+        <p:txBody>
+          <a:bodyPr vert="horz" lIns="91440" tIns="45720" rIns="91440" bIns="45720" rtlCol="0" anchor="b"/>
+          <a:lstStyle>
+            <a:lvl1pPr algn="l">
+              <a:defRPr sz="1200"/>
+            </a:lvl1pPr>
+          </a:lstStyle>
+          <a:p>
+            <a:endParaRPr lang="en-US"/>
+          </a:p>
+        </p:txBody>
+      </p:sp>
+      <p:sp>
+        <p:nvSpPr>
+          <p:cNvPr id="7" name="Slide Number Placeholder 6"/>
+          <p:cNvSpPr>
+            <a:spLocks noGrp="1"/>
+          </p:cNvSpPr>
+          <p:nvPr>
+            <p:ph type="sldNum" sz="quarter" idx="5"/>
+          </p:nvPr>
+        </p:nvSpPr>
+        <p:spPr>
+          <a:xfrm>
+            <a:off x="3884613" y="8685213"/>
+            <a:ext cx="2971800" cy="458787"/>
+          </a:xfrm>
+          <a:prstGeom prst="rect">
+            <a:avLst/>
+          </a:prstGeom>
+        </p:spPr>
+        <p:txBody>
+          <a:bodyPr vert="horz" lIns="91440" tIns="45720" rIns="91440" bIns="45720" rtlCol="0" anchor="b"/>
+          <a:lstStyle>
+            <a:lvl1pPr algn="r">
+              <a:defRPr sz="1200"/>
+            </a:lvl1pPr>
+          </a:lstStyle>
+          <a:p>
+            <a:fld id="{CE5E9CC1-C706-0F49-92D6-E571CC5EEA8F}" type="slidenum">
+              <a:rPr lang="en-US"/>
+              <a:t>‹#›</a:t>
+            </a:fld>
+            <a:endParaRPr lang="en-US"/>
+          </a:p>
+        </p:txBody>
+      </p:sp>
     </p:spTree>
     <p:extLst>
       <p:ext uri="{BB962C8B-B14F-4D97-AF65-F5344CB8AC3E}">
-        <p14:creationId xmlns:p14="http://schemas.microsoft.com/office/powerpoint/2010/main" val="890311138"/>
+        <p14:creationId xmlns:p14="http://schemas.microsoft.com/office/powerpoint/2010/main" val="1024086991"/>
       </p:ext>
     </p:extLst>
   </p:cSld>
@@ -289,8 +509,11 @@
           <a:p>
             <a:r>
               <a:rPr lang="en-US" dirty="0"/>
-              <a:t>[0:00–0:20] Hi, we are 404 Team Not Found. This is Roshni, which means light. One page, every learner: we turn a photo of any textbook page into a lesson that blind, dyslexic and deaf students can use, and a second AI proves no fact was lost.</a:t>
+              <a:t>SPEAKER A · 0:00–0:15
+Assalam-o-Alaikum. We are 404 Team Not Found, and this is Roshni, which means light. One page, every learner: any page, lecture or video becomes a lesson that every student can use, and a second AI proves no fact was lost.
+► CLICK: after “…no fact was lost.”</a:t>
             </a:r>
+            <a:endParaRPr lang="en-US" dirty="0"/>
           </a:p>
         </p:txBody>
       </p:sp>
@@ -376,8 +599,11 @@
           <a:p>
             <a:r>
               <a:rPr lang="en-US" dirty="0"/>
-              <a:t>[0:20–0:50] Three students, one class, one printed page. Bilal is blind, Sara is dyslexic, Hamza is deaf. The page works for none of them, and their teacher has no time to adapt every page three ways. About 1 in 6 people live with a significant disability, so this happens in every school.</a:t>
+              <a:t>SPEAKER A · 0:15–0:40
+Three students, one class, one printed page. Bilal is blind, Sara is dyslexic, Hamza is deaf. The page works for none of them, and their teacher has no time to adapt every page three ways. About 1 in 6 people live with a significant disability, so this happens in every school.
+► CLICK: after “…happens in every school.”</a:t>
             </a:r>
+            <a:endParaRPr lang="en-US" dirty="0"/>
           </a:p>
         </p:txBody>
       </p:sp>
@@ -463,8 +689,11 @@
           <a:p>
             <a:r>
               <a:rPr lang="en-US" dirty="0"/>
-              <a:t>[0:50–1:30] Our solution: one photo in, three ways to learn out. AI is the pipeline, not a chat box. Gemini reads the page and describes every figure. Qwen rewrites it at an easier level with Urdu help. Fact Guard, a different AI family, checks every fact. Whisper captions the lecture. Bilal gets Listen, Sara gets Read Easy, Hamza gets Captions.</a:t>
+              <a:t>SPEAKER A · 0:40–1:15
+Our solution: one page in, five ways to learn out. AI is the pipeline, not a chat box. Gemini reads the page and describes every figure. Qwen rewrites it simply, with hard words explained in Urdu or Pashto. Fact Guard, a different AI family, checks every fact. Whisper hears lectures and spoken answers. Bilal gets Listen, Sara gets Read Easy, Hamza gets Captions, and everyone gets video notes and Practice. Now [Speaker B] will show you.
+► CLICK: after “…will show you.” Hand over to Speaker B.</a:t>
             </a:r>
+            <a:endParaRPr lang="en-US" dirty="0"/>
           </a:p>
         </p:txBody>
       </p:sp>
@@ -550,8 +779,16 @@
           <a:p>
             <a:r>
               <a:rPr lang="en-US" dirty="0"/>
-              <a:t>[1:30–3:30] SWITCH TO THE APP. 1) Photograph the printed page and upload it (about 5 s). 2) Read Easy: press Read aloud, tap an underlined word for the Urdu explanation and audio, point at the Fact Guard badge. 3) Press Plant 3 errors: the cards flip to Caught, then the rewrite is repaired back to green. 4) Listen tab: Alt+N jumps sections, show a figure description. Captions tab: click a line to jump the audio. If anything is slow, open the cached physics sample instead.</a:t>
+              <a:t>SPEAKER B (talks) + SLIDE CONTROLLER (drives the app) · 1:15–2:55
+CONTROLLER: Alt+Tab to the app (Home already open; demo profile set up the night before).
+1) [15 s] Home: point at “For you”, open the Photosynthesis sample; it opens with the “because you said…” line. B: “Roshni remembers how this learner reads.”
+2) [30 s] Read Easy: press Read aloud (sentences highlight); tap an underlined word for the Urdu/Pashto explanation and press the speaker. B: “Hard words, in their own language.”
+3) [25 s] Fact Guard card → Plant 3 errors: the cards flip to Caught, then the rewrite is repaired. B: “We break our own rewrite on purpose, and Fact Guard catches it.”
+4) [30 s] Practice tab → Voice quiz → after the beep, B says “B”. Show the results: weak areas and the study plan; click Open on a step. B: “It tells each learner exactly what to revise.”
+If anything is slow, keep talking and move to the next step; the samples are cached.
+► CLICK: CONTROLLER: Alt+Tab back to the slides and click when B says “…exactly what to revise.”</a:t>
             </a:r>
+            <a:endParaRPr lang="en-US" dirty="0"/>
           </a:p>
         </p:txBody>
       </p:sp>
@@ -637,8 +874,11 @@
           <a:p>
             <a:r>
               <a:rPr lang="en-US" dirty="0"/>
-              <a:t>[3:30–4:00] Simplifying text can quietly drop a fact or change a number, so we built Fact Guard. A different AI family checks the rewrite, every kept fact must be quoted, numbers are checked by plain code, and anything missing is repaired. You just saw it live. In testing it caught all planted errors with zero false alarms.</a:t>
+              <a:t>SPEAKER B · 2:55–3:20
+You just saw Fact Guard live. Simplifying can quietly drop a fact or change a number, so a different AI family checks the rewrite, every kept fact must be quoted, numbers are checked by plain code, and gaps are repaired. In testing it caught 28 of 28 planted errors with zero false alarms.
+► CLICK: after “…zero false alarms.” Hand over to Speaker A.</a:t>
             </a:r>
+            <a:endParaRPr lang="en-US" dirty="0"/>
           </a:p>
         </p:txBody>
       </p:sp>
@@ -724,8 +964,11 @@
           <a:p>
             <a:r>
               <a:rPr lang="en-US" dirty="0"/>
-              <a:t>[4:00–4:35] Everything here is measured on real OpenStax textbook pages by scripts in our repo. Fact Guard caught every planted error with no false alarms. 99% of facts are verifiably kept. Reading level drops from grade 11 to about 6. It reads even this blurry, tilted photo almost perfectly, and a lesson takes under half a minute on free tiers.</a:t>
+              <a:t>SPEAKER A · 3:20–3:50
+Every learner gets Roshni set up for them: two questions, no account, no name or gender. Lessons open the way you need and say why. After a quiz, Roshni finds your weak areas and builds a study plan from the lesson itself, down to the exact section, word or video minute. Your profile is an anonymous code you can delete any time.
+► CLICK: after “…delete any time.” Hand over to Speaker B.</a:t>
             </a:r>
+            <a:endParaRPr lang="en-US" dirty="0"/>
           </a:p>
         </p:txBody>
       </p:sp>
@@ -811,8 +1054,11 @@
           <a:p>
             <a:r>
               <a:rPr lang="en-US" dirty="0"/>
-              <a:t>[4:35–5:00] Who adopts it: special-education schools and NGOs, textbook boards, school chains with Urdu-medium students, and employers making training accessible. It costs nothing to run today and serves SDG 4.5. Everything you saw was built during AICON’26, with an AI coding assistant as the rules allow; our commit history shows it. Next is a pilot with a special-education school. Thank you!</a:t>
+              <a:t>SPEAKER B · 3:50–4:20
+Everything here is measured on real OpenStax textbook pages by scripts in our repo. 28 of 28 planted errors caught, no false alarms, 99% of facts verifiably kept. Reading level drops from grade 11 to about 6. It reads even this blurry, tilted photo almost perfectly, and a lesson takes under half a minute on free tiers.
+► CLICK: after “…on free tiers.” Hand over to Speaker A.</a:t>
             </a:r>
+            <a:endParaRPr lang="en-US" dirty="0"/>
           </a:p>
         </p:txBody>
       </p:sp>
@@ -834,6 +1080,96 @@
             <a:fld id="{F7021451-1387-4CA6-816F-3879F97B5CBC}" type="slidenum">
               <a:rPr lang="en-US"/>
               <a:t>7</a:t>
+            </a:fld>
+            <a:endParaRPr lang="en-US"/>
+          </a:p>
+        </p:txBody>
+      </p:sp>
+    </p:spTree>
+    <p:extLst>
+      <p:ext uri="{BB962C8B-B14F-4D97-AF65-F5344CB8AC3E}">
+        <p14:creationId xmlns:p14="http://schemas.microsoft.com/office/powerpoint/2010/main" val="1024086991"/>
+      </p:ext>
+    </p:extLst>
+  </p:cSld>
+  <p:clrMapOvr>
+    <a:masterClrMapping/>
+  </p:clrMapOvr>
+</p:notes>
+</file>
+
+<file path=ppt/notesSlides/notesSlide8.xml><?xml version="1.0" encoding="utf-8"?>
+<p:notes xmlns:a="http://schemas.openxmlformats.org/drawingml/2006/main" xmlns:r="http://schemas.openxmlformats.org/officeDocument/2006/relationships" xmlns:p="http://schemas.openxmlformats.org/presentationml/2006/main">
+  <p:cSld>
+    <p:spTree>
+      <p:nvGrpSpPr>
+        <p:cNvPr id="1" name=""/>
+        <p:cNvGrpSpPr/>
+        <p:nvPr/>
+      </p:nvGrpSpPr>
+      <p:grpSpPr>
+        <a:xfrm>
+          <a:off x="0" y="0"/>
+          <a:ext cx="0" cy="0"/>
+          <a:chOff x="0" y="0"/>
+          <a:chExt cx="0" cy="0"/>
+        </a:xfrm>
+      </p:grpSpPr>
+      <p:sp>
+        <p:nvSpPr>
+          <p:cNvPr id="2" name="Slide Image Placeholder 1"/>
+          <p:cNvSpPr>
+            <a:spLocks noGrp="1" noRot="1" noChangeAspect="1"/>
+          </p:cNvSpPr>
+          <p:nvPr>
+            <p:ph type="sldImg"/>
+          </p:nvPr>
+        </p:nvSpPr>
+        <p:spPr/>
+      </p:sp>
+      <p:sp>
+        <p:nvSpPr>
+          <p:cNvPr id="3" name="Notes Placeholder 2"/>
+          <p:cNvSpPr>
+            <a:spLocks noGrp="1"/>
+          </p:cNvSpPr>
+          <p:nvPr>
+            <p:ph type="body" idx="1"/>
+          </p:nvPr>
+        </p:nvSpPr>
+        <p:spPr/>
+        <p:txBody>
+          <a:bodyPr/>
+          <a:lstStyle/>
+          <a:p>
+            <a:r>
+              <a:rPr lang="en-US" dirty="0"/>
+              <a:t>SPEAKER A · 4:20–4:50
+Who adopts it: special-education schools and NGOs, textbook boards, school chains with Urdu- and Pashto-medium students, and employers making training manuals accessible. It costs nothing to run today and serves SDG 4.5. Everything you saw was built during AICON’26, with an AI coding assistant as the rules allow, and our commit history shows it. Next is a pilot with a special-education school. Thank you!
+► CLICK: none: stay on this slide for the judges’ questions.</a:t>
+            </a:r>
+            <a:endParaRPr lang="en-US" dirty="0"/>
+          </a:p>
+        </p:txBody>
+      </p:sp>
+      <p:sp>
+        <p:nvSpPr>
+          <p:cNvPr id="4" name="Slide Number Placeholder 3"/>
+          <p:cNvSpPr>
+            <a:spLocks noGrp="1"/>
+          </p:cNvSpPr>
+          <p:nvPr>
+            <p:ph type="sldNum" sz="quarter" idx="10"/>
+          </p:nvPr>
+        </p:nvSpPr>
+        <p:spPr/>
+        <p:txBody>
+          <a:bodyPr/>
+          <a:lstStyle/>
+          <a:p>
+            <a:fld id="{F7021451-1387-4CA6-816F-3879F97B5CBC}" type="slidenum">
+              <a:rPr lang="en-US"/>
+              <a:t>8</a:t>
             </a:fld>
             <a:endParaRPr lang="en-US"/>
           </a:p>
@@ -885,11 +1221,6 @@
 <file path=ppt/slideMasters/slideMaster1.xml><?xml version="1.0" encoding="utf-8"?>
 <p:sldMaster xmlns:a="http://schemas.openxmlformats.org/drawingml/2006/main" xmlns:r="http://schemas.openxmlformats.org/officeDocument/2006/relationships" xmlns:p="http://schemas.openxmlformats.org/presentationml/2006/main">
   <p:cSld>
-    <p:bg>
-      <p:bgRef idx="1001">
-        <a:schemeClr val="bg1"/>
-      </p:bgRef>
-    </p:bg>
     <p:spTree>
       <p:nvGrpSpPr>
         <p:cNvPr id="1" name=""/>
@@ -1172,7 +1503,6 @@
         <a:solidFill>
           <a:srgbClr val="0D1B3E"/>
         </a:solidFill>
-        <a:effectLst/>
       </p:bgPr>
     </p:bg>
     <p:spTree>
@@ -1573,11 +1903,11 @@
           <a:bodyPr wrap="square" lIns="0" tIns="0" rIns="0" bIns="0" rtlCol="0" anchor="ctr"/>
           <a:lstStyle/>
           <a:p>
-            <a:pPr marL="0" indent="0">
+            <a:pPr indent="0" marL="0">
               <a:buNone/>
             </a:pPr>
             <a:r>
-              <a:rPr lang="en-US" sz="1300" b="1" kern="0" spc="300" dirty="0">
+              <a:rPr lang="en-US" sz="1300" b="1" spc="300" kern="0" dirty="0">
                 <a:solidFill>
                   <a:srgbClr val="F2A40E"/>
                 </a:solidFill>
@@ -1612,7 +1942,7 @@
           <a:bodyPr wrap="square" lIns="0" tIns="0" rIns="0" bIns="0" rtlCol="0" anchor="t"/>
           <a:lstStyle/>
           <a:p>
-            <a:pPr marL="0" indent="0">
+            <a:pPr indent="0" marL="0">
               <a:buNone/>
             </a:pPr>
             <a:r>
@@ -1651,7 +1981,7 @@
           <a:bodyPr wrap="square" lIns="0" tIns="0" rIns="0" bIns="0" rtlCol="0" anchor="ctr"/>
           <a:lstStyle/>
           <a:p>
-            <a:pPr marL="0" indent="0" rtl="1">
+            <a:pPr rtl="1" indent="0" marL="0">
               <a:buNone/>
             </a:pPr>
             <a:r>
@@ -1690,7 +2020,7 @@
           <a:bodyPr wrap="square" lIns="0" tIns="0" rIns="0" bIns="0" rtlCol="0" anchor="ctr"/>
           <a:lstStyle/>
           <a:p>
-            <a:pPr marL="0" indent="0">
+            <a:pPr indent="0" marL="0">
               <a:buNone/>
             </a:pPr>
             <a:r>
@@ -1717,7 +2047,7 @@
         <p:spPr>
           <a:xfrm>
             <a:off x="731520" y="4617720"/>
-            <a:ext cx="6583680" cy="868680"/>
+            <a:ext cx="6766560" cy="914400"/>
           </a:xfrm>
           <a:prstGeom prst="rect">
             <a:avLst/>
@@ -1729,7 +2059,7 @@
           <a:bodyPr wrap="square" lIns="0" tIns="0" rIns="0" bIns="0" rtlCol="0" anchor="ctr"/>
           <a:lstStyle/>
           <a:p>
-            <a:pPr marL="0" indent="0">
+            <a:pPr indent="0" marL="0">
               <a:buNone/>
             </a:pPr>
             <a:r>
@@ -1741,7 +2071,7 @@
                 <a:ea typeface="Calibri" pitchFamily="34" charset="-122"/>
                 <a:cs typeface="Calibri" pitchFamily="34" charset="-120"/>
               </a:rPr>
-              <a:t>A photo of a textbook page becomes a lesson that blind, dyslexic and deaf students can use, and a second AI proves no fact was lost.</a:t>
+              <a:t>A photo of any page, a lecture or a YouTube video becomes a lesson for blind, dyslexic, deaf and Urdu/Pashto-medium learners, and a second AI proves no fact was lost.</a:t>
             </a:r>
             <a:endParaRPr lang="en-US" sz="1700" dirty="0"/>
           </a:p>
@@ -1768,7 +2098,7 @@
           <a:bodyPr wrap="square" lIns="0" tIns="0" rIns="0" bIns="0" rtlCol="0" anchor="ctr"/>
           <a:lstStyle/>
           <a:p>
-            <a:pPr marL="0" indent="0">
+            <a:pPr indent="0" marL="0">
               <a:buNone/>
             </a:pPr>
             <a:r>
@@ -1794,7 +2124,7 @@
         </p:nvSpPr>
         <p:spPr>
           <a:xfrm>
-            <a:off x="10241280" y="6400800"/>
+            <a:off x="10012680" y="6400800"/>
             <a:ext cx="155448" cy="155448"/>
           </a:xfrm>
           <a:prstGeom prst="ellipse">
@@ -1819,7 +2149,7 @@
         </p:nvSpPr>
         <p:spPr>
           <a:xfrm>
-            <a:off x="10479024" y="6400800"/>
+            <a:off x="10250424" y="6400800"/>
             <a:ext cx="100584" cy="100584"/>
           </a:xfrm>
           <a:prstGeom prst="ellipse">
@@ -1844,7 +2174,7 @@
         </p:nvSpPr>
         <p:spPr>
           <a:xfrm>
-            <a:off x="10716768" y="6400800"/>
+            <a:off x="10488168" y="6400800"/>
             <a:ext cx="100584" cy="100584"/>
           </a:xfrm>
           <a:prstGeom prst="ellipse">
@@ -1869,7 +2199,7 @@
         </p:nvSpPr>
         <p:spPr>
           <a:xfrm>
-            <a:off x="10954512" y="6400800"/>
+            <a:off x="10725912" y="6400800"/>
             <a:ext cx="100584" cy="100584"/>
           </a:xfrm>
           <a:prstGeom prst="ellipse">
@@ -1894,7 +2224,7 @@
         </p:nvSpPr>
         <p:spPr>
           <a:xfrm>
-            <a:off x="11192256" y="6400800"/>
+            <a:off x="10963656" y="6400800"/>
             <a:ext cx="100584" cy="100584"/>
           </a:xfrm>
           <a:prstGeom prst="ellipse">
@@ -1919,7 +2249,7 @@
         </p:nvSpPr>
         <p:spPr>
           <a:xfrm>
-            <a:off x="11430000" y="6400800"/>
+            <a:off x="11201400" y="6400800"/>
             <a:ext cx="100584" cy="100584"/>
           </a:xfrm>
           <a:prstGeom prst="ellipse">
@@ -1944,7 +2274,32 @@
         </p:nvSpPr>
         <p:spPr>
           <a:xfrm>
-            <a:off x="11667744" y="6400800"/>
+            <a:off x="11439144" y="6400800"/>
+            <a:ext cx="100584" cy="100584"/>
+          </a:xfrm>
+          <a:prstGeom prst="ellipse">
+            <a:avLst/>
+          </a:prstGeom>
+          <a:solidFill>
+            <a:srgbClr val="3A4A7A"/>
+          </a:solidFill>
+          <a:ln w="12700">
+            <a:solidFill>
+              <a:srgbClr val="3A4A7A"/>
+            </a:solidFill>
+            <a:prstDash val="solid"/>
+          </a:ln>
+        </p:spPr>
+      </p:sp>
+      <p:sp>
+        <p:nvSpPr>
+          <p:cNvPr id="30" name="!!dot-7"/>
+          <p:cNvSpPr/>
+          <p:nvPr/>
+        </p:nvSpPr>
+        <p:spPr>
+          <a:xfrm>
+            <a:off x="11676888" y="6400800"/>
             <a:ext cx="100584" cy="100584"/>
           </a:xfrm>
           <a:prstGeom prst="ellipse">
@@ -1980,7 +2335,6 @@
         <a:solidFill>
           <a:srgbClr val="F2F5F3"/>
         </a:solidFill>
-        <a:effectLst/>
       </p:bgPr>
     </p:bg>
     <p:spTree>
@@ -2383,11 +2737,11 @@
           <a:bodyPr wrap="square" lIns="0" tIns="0" rIns="0" bIns="0" rtlCol="0" anchor="ctr"/>
           <a:lstStyle/>
           <a:p>
-            <a:pPr marL="0" indent="0">
+            <a:pPr indent="0" marL="0">
               <a:buNone/>
             </a:pPr>
             <a:r>
-              <a:rPr lang="en-US" sz="1300" b="1" kern="0" spc="300" dirty="0">
+              <a:rPr lang="en-US" sz="1300" b="1" spc="300" kern="0" dirty="0">
                 <a:solidFill>
                   <a:srgbClr val="F2A40E"/>
                 </a:solidFill>
@@ -2422,7 +2776,7 @@
           <a:bodyPr wrap="square" lIns="0" tIns="0" rIns="0" bIns="0" rtlCol="0" anchor="t"/>
           <a:lstStyle/>
           <a:p>
-            <a:pPr marL="0" indent="0">
+            <a:pPr indent="0" marL="0">
               <a:buNone/>
             </a:pPr>
             <a:r>
@@ -2461,7 +2815,7 @@
           <a:bodyPr wrap="square" lIns="0" tIns="0" rIns="0" bIns="0" rtlCol="0" anchor="t"/>
           <a:lstStyle/>
           <a:p>
-            <a:pPr marL="0" indent="0">
+            <a:pPr indent="0" marL="0">
               <a:buNone/>
             </a:pPr>
             <a:r>
@@ -2475,6 +2829,9 @@
               </a:rPr>
               <a:t>Why it matters: </a:t>
             </a:r>
+            <a:pPr indent="0" marL="0">
+              <a:buNone/>
+            </a:pPr>
             <a:r>
               <a:rPr lang="en-US" sz="1500" dirty="0">
                 <a:solidFill>
@@ -2516,7 +2873,7 @@
             <a:prstDash val="solid"/>
           </a:ln>
           <a:effectLst>
-            <a:outerShdw blurRad="152400" dist="38100" dir="5400000" algn="bl" rotWithShape="0">
+            <a:outerShdw sx="100000" sy="100000" kx="0" ky="0" algn="bl" rotWithShape="0" blurRad="152400" dist="38100" dir="5400000">
               <a:srgbClr val="0D1B3E">
                 <a:alpha val="13000"/>
               </a:srgbClr>
@@ -2532,7 +2889,7 @@
         </p:nvSpPr>
         <p:spPr>
           <a:xfrm>
-            <a:off x="5257800" y="937260"/>
+            <a:off x="5212080" y="937260"/>
             <a:ext cx="822960" cy="822960"/>
           </a:xfrm>
           <a:prstGeom prst="ellipse">
@@ -2551,21 +2908,21 @@
       </p:sp>
       <p:pic>
         <p:nvPicPr>
-          <p:cNvPr id="22" name="!!cicon-0" descr="preencoded.png"/>
+          <p:cNvPr id="22" name="!!cicon-0" descr="preencoded.png">    </p:cNvPr>
           <p:cNvPicPr>
             <a:picLocks noChangeAspect="1"/>
           </p:cNvPicPr>
           <p:nvPr/>
         </p:nvPicPr>
         <p:blipFill>
-          <a:blip r:embed="rId3"/>
+          <a:blip r:embed="rId1"/>
           <a:stretch>
             <a:fillRect/>
           </a:stretch>
         </p:blipFill>
         <p:spPr>
           <a:xfrm>
-            <a:off x="5455310" y="1134770"/>
+            <a:off x="5409590" y="1134770"/>
             <a:ext cx="427939" cy="427939"/>
           </a:xfrm>
           <a:prstGeom prst="rect">
@@ -2594,7 +2951,7 @@
           <a:bodyPr wrap="square" lIns="0" tIns="0" rIns="0" bIns="0" rtlCol="0" anchor="ctr"/>
           <a:lstStyle/>
           <a:p>
-            <a:pPr marL="0" indent="0">
+            <a:pPr indent="0" marL="0">
               <a:buNone/>
             </a:pPr>
             <a:r>
@@ -2633,7 +2990,7 @@
           <a:bodyPr wrap="square" lIns="0" tIns="0" rIns="0" bIns="0" rtlCol="0" anchor="t"/>
           <a:lstStyle/>
           <a:p>
-            <a:pPr marL="0" indent="0">
+            <a:pPr indent="0" marL="0">
               <a:buNone/>
             </a:pPr>
             <a:r>
@@ -2677,7 +3034,7 @@
             <a:prstDash val="solid"/>
           </a:ln>
           <a:effectLst>
-            <a:outerShdw blurRad="152400" dist="38100" dir="5400000" algn="bl" rotWithShape="0">
+            <a:outerShdw sx="100000" sy="100000" kx="0" ky="0" algn="bl" rotWithShape="0" blurRad="152400" dist="38100" dir="5400000">
               <a:srgbClr val="0D1B3E">
                 <a:alpha val="13000"/>
               </a:srgbClr>
@@ -2693,7 +3050,7 @@
         </p:nvSpPr>
         <p:spPr>
           <a:xfrm>
-            <a:off x="5257800" y="2747772"/>
+            <a:off x="5212080" y="2747772"/>
             <a:ext cx="822960" cy="822960"/>
           </a:xfrm>
           <a:prstGeom prst="ellipse">
@@ -2712,21 +3069,21 @@
       </p:sp>
       <p:pic>
         <p:nvPicPr>
-          <p:cNvPr id="27" name="!!cicon-1" descr="preencoded.png"/>
+          <p:cNvPr id="27" name="!!cicon-1" descr="preencoded.png">    </p:cNvPr>
           <p:cNvPicPr>
             <a:picLocks noChangeAspect="1"/>
           </p:cNvPicPr>
           <p:nvPr/>
         </p:nvPicPr>
         <p:blipFill>
-          <a:blip r:embed="rId4"/>
+          <a:blip r:embed="rId2"/>
           <a:stretch>
             <a:fillRect/>
           </a:stretch>
         </p:blipFill>
         <p:spPr>
           <a:xfrm>
-            <a:off x="5455310" y="2945282"/>
+            <a:off x="5409590" y="2945282"/>
             <a:ext cx="427939" cy="427939"/>
           </a:xfrm>
           <a:prstGeom prst="rect">
@@ -2755,7 +3112,7 @@
           <a:bodyPr wrap="square" lIns="0" tIns="0" rIns="0" bIns="0" rtlCol="0" anchor="ctr"/>
           <a:lstStyle/>
           <a:p>
-            <a:pPr marL="0" indent="0">
+            <a:pPr indent="0" marL="0">
               <a:buNone/>
             </a:pPr>
             <a:r>
@@ -2794,7 +3151,7 @@
           <a:bodyPr wrap="square" lIns="0" tIns="0" rIns="0" bIns="0" rtlCol="0" anchor="t"/>
           <a:lstStyle/>
           <a:p>
-            <a:pPr marL="0" indent="0">
+            <a:pPr indent="0" marL="0">
               <a:buNone/>
             </a:pPr>
             <a:r>
@@ -2806,7 +3163,7 @@
                 <a:ea typeface="Calibri" pitchFamily="34" charset="-122"/>
                 <a:cs typeface="Calibri" pitchFamily="34" charset="-120"/>
               </a:rPr>
-              <a:t>Long sentences and hard words lose her, and Urdu-medium students hit the same wall in English.</a:t>
+              <a:t>Long sentences and hard words lose her, and Urdu- and Pashto-medium students hit the same wall in English.</a:t>
             </a:r>
             <a:endParaRPr lang="en-US" sz="1500" dirty="0"/>
           </a:p>
@@ -2838,7 +3195,7 @@
             <a:prstDash val="solid"/>
           </a:ln>
           <a:effectLst>
-            <a:outerShdw blurRad="152400" dist="38100" dir="5400000" algn="bl" rotWithShape="0">
+            <a:outerShdw sx="100000" sy="100000" kx="0" ky="0" algn="bl" rotWithShape="0" blurRad="152400" dist="38100" dir="5400000">
               <a:srgbClr val="0D1B3E">
                 <a:alpha val="13000"/>
               </a:srgbClr>
@@ -2854,7 +3211,7 @@
         </p:nvSpPr>
         <p:spPr>
           <a:xfrm>
-            <a:off x="5257800" y="4558284"/>
+            <a:off x="5212080" y="4558284"/>
             <a:ext cx="822960" cy="822960"/>
           </a:xfrm>
           <a:prstGeom prst="ellipse">
@@ -2873,21 +3230,21 @@
       </p:sp>
       <p:pic>
         <p:nvPicPr>
-          <p:cNvPr id="32" name="!!cicon-2" descr="preencoded.png"/>
+          <p:cNvPr id="32" name="!!cicon-2" descr="preencoded.png">    </p:cNvPr>
           <p:cNvPicPr>
             <a:picLocks noChangeAspect="1"/>
           </p:cNvPicPr>
           <p:nvPr/>
         </p:nvPicPr>
         <p:blipFill>
-          <a:blip r:embed="rId5"/>
+          <a:blip r:embed="rId3"/>
           <a:stretch>
             <a:fillRect/>
           </a:stretch>
         </p:blipFill>
         <p:spPr>
           <a:xfrm>
-            <a:off x="5455310" y="4755794"/>
+            <a:off x="5409590" y="4755794"/>
             <a:ext cx="427939" cy="427939"/>
           </a:xfrm>
           <a:prstGeom prst="rect">
@@ -2916,7 +3273,7 @@
           <a:bodyPr wrap="square" lIns="0" tIns="0" rIns="0" bIns="0" rtlCol="0" anchor="ctr"/>
           <a:lstStyle/>
           <a:p>
-            <a:pPr marL="0" indent="0">
+            <a:pPr indent="0" marL="0">
               <a:buNone/>
             </a:pPr>
             <a:r>
@@ -2955,7 +3312,7 @@
           <a:bodyPr wrap="square" lIns="0" tIns="0" rIns="0" bIns="0" rtlCol="0" anchor="t"/>
           <a:lstStyle/>
           <a:p>
-            <a:pPr marL="0" indent="0">
+            <a:pPr indent="0" marL="0">
               <a:buNone/>
             </a:pPr>
             <a:r>
@@ -2981,7 +3338,7 @@
         </p:nvSpPr>
         <p:spPr>
           <a:xfrm>
-            <a:off x="10241280" y="6400800"/>
+            <a:off x="10012680" y="6400800"/>
             <a:ext cx="100584" cy="100584"/>
           </a:xfrm>
           <a:prstGeom prst="ellipse">
@@ -3006,7 +3363,7 @@
         </p:nvSpPr>
         <p:spPr>
           <a:xfrm>
-            <a:off x="10479024" y="6400800"/>
+            <a:off x="10250424" y="6400800"/>
             <a:ext cx="155448" cy="155448"/>
           </a:xfrm>
           <a:prstGeom prst="ellipse">
@@ -3031,7 +3388,7 @@
         </p:nvSpPr>
         <p:spPr>
           <a:xfrm>
-            <a:off x="10716768" y="6400800"/>
+            <a:off x="10488168" y="6400800"/>
             <a:ext cx="100584" cy="100584"/>
           </a:xfrm>
           <a:prstGeom prst="ellipse">
@@ -3056,7 +3413,7 @@
         </p:nvSpPr>
         <p:spPr>
           <a:xfrm>
-            <a:off x="10954512" y="6400800"/>
+            <a:off x="10725912" y="6400800"/>
             <a:ext cx="100584" cy="100584"/>
           </a:xfrm>
           <a:prstGeom prst="ellipse">
@@ -3081,7 +3438,7 @@
         </p:nvSpPr>
         <p:spPr>
           <a:xfrm>
-            <a:off x="11192256" y="6400800"/>
+            <a:off x="10963656" y="6400800"/>
             <a:ext cx="100584" cy="100584"/>
           </a:xfrm>
           <a:prstGeom prst="ellipse">
@@ -3106,7 +3463,7 @@
         </p:nvSpPr>
         <p:spPr>
           <a:xfrm>
-            <a:off x="11430000" y="6400800"/>
+            <a:off x="11201400" y="6400800"/>
             <a:ext cx="100584" cy="100584"/>
           </a:xfrm>
           <a:prstGeom prst="ellipse">
@@ -3131,7 +3488,32 @@
         </p:nvSpPr>
         <p:spPr>
           <a:xfrm>
-            <a:off x="11667744" y="6400800"/>
+            <a:off x="11439144" y="6400800"/>
+            <a:ext cx="100584" cy="100584"/>
+          </a:xfrm>
+          <a:prstGeom prst="ellipse">
+            <a:avLst/>
+          </a:prstGeom>
+          <a:solidFill>
+            <a:srgbClr val="C3CDDD"/>
+          </a:solidFill>
+          <a:ln w="12700">
+            <a:solidFill>
+              <a:srgbClr val="C3CDDD"/>
+            </a:solidFill>
+            <a:prstDash val="solid"/>
+          </a:ln>
+        </p:spPr>
+      </p:sp>
+      <p:sp>
+        <p:nvSpPr>
+          <p:cNvPr id="42" name="!!dot-7"/>
+          <p:cNvSpPr/>
+          <p:nvPr/>
+        </p:nvSpPr>
+        <p:spPr>
+          <a:xfrm>
+            <a:off x="11676888" y="6400800"/>
             <a:ext cx="100584" cy="100584"/>
           </a:xfrm>
           <a:prstGeom prst="ellipse">
@@ -3176,7 +3558,6 @@
         <a:solidFill>
           <a:srgbClr val="F2F5F3"/>
         </a:solidFill>
-        <a:effectLst/>
       </p:bgPr>
     </p:bg>
     <p:spTree>
@@ -3577,11 +3958,11 @@
           <a:bodyPr wrap="square" lIns="0" tIns="0" rIns="0" bIns="0" rtlCol="0" anchor="ctr"/>
           <a:lstStyle/>
           <a:p>
-            <a:pPr marL="0" indent="0">
+            <a:pPr indent="0" marL="0">
               <a:buNone/>
             </a:pPr>
             <a:r>
-              <a:rPr lang="en-US" sz="1300" b="1" kern="0" spc="300" dirty="0">
+              <a:rPr lang="en-US" sz="1300" b="1" spc="300" kern="0" dirty="0">
                 <a:solidFill>
                   <a:srgbClr val="F2A40E"/>
                 </a:solidFill>
@@ -3616,7 +3997,7 @@
           <a:bodyPr wrap="square" lIns="0" tIns="0" rIns="0" bIns="0" rtlCol="0" anchor="t"/>
           <a:lstStyle/>
           <a:p>
-            <a:pPr marL="0" indent="0">
+            <a:pPr indent="0" marL="0">
               <a:buNone/>
             </a:pPr>
             <a:r>
@@ -3628,7 +4009,7 @@
                 <a:ea typeface="Century Gothic" pitchFamily="34" charset="-122"/>
                 <a:cs typeface="Century Gothic" pitchFamily="34" charset="-120"/>
               </a:rPr>
-              <a:t>One photo in. Three ways to learn out.</a:t>
+              <a:t>One page in. Five ways to learn out.</a:t>
             </a:r>
             <a:endParaRPr lang="en-US" sz="3400" dirty="0"/>
           </a:p>
@@ -3688,14 +4069,14 @@
       </p:sp>
       <p:pic>
         <p:nvPicPr>
-          <p:cNvPr id="21" name="step-icon-0" descr="preencoded.png"/>
+          <p:cNvPr id="21" name="step-icon-0" descr="preencoded.png">    </p:cNvPr>
           <p:cNvPicPr>
             <a:picLocks noChangeAspect="1"/>
           </p:cNvPicPr>
           <p:nvPr/>
         </p:nvPicPr>
         <p:blipFill>
-          <a:blip r:embed="rId3"/>
+          <a:blip r:embed="rId1"/>
           <a:stretch>
             <a:fillRect/>
           </a:stretch>
@@ -3731,7 +4112,7 @@
           <a:bodyPr wrap="square" lIns="0" tIns="0" rIns="0" bIns="0" rtlCol="0" anchor="ctr"/>
           <a:lstStyle/>
           <a:p>
-            <a:pPr marL="0" indent="0">
+            <a:pPr indent="0" marL="0">
               <a:buNone/>
             </a:pPr>
             <a:r>
@@ -3770,11 +4151,11 @@
           <a:bodyPr wrap="square" lIns="0" tIns="0" rIns="0" bIns="0" rtlCol="0" anchor="t"/>
           <a:lstStyle/>
           <a:p>
-            <a:pPr marL="0" indent="0">
+            <a:pPr indent="0" marL="0">
               <a:buNone/>
             </a:pPr>
             <a:r>
-              <a:rPr lang="en-US" sz="1200" dirty="0">
+              <a:rPr lang="en-US" sz="1150" dirty="0">
                 <a:solidFill>
                   <a:srgbClr val="4A5875"/>
                 </a:solidFill>
@@ -3782,9 +4163,9 @@
                 <a:ea typeface="Calibri" pitchFamily="34" charset="-122"/>
                 <a:cs typeface="Calibri" pitchFamily="34" charset="-120"/>
               </a:rPr>
-              <a:t>Gemini reads the photo and describes every figure</a:t>
+              <a:t>Gemini reads the photo, describes every figure, even watches videos</a:t>
             </a:r>
-            <a:endParaRPr lang="en-US" sz="1200" dirty="0"/>
+            <a:endParaRPr lang="en-US" sz="1150" dirty="0"/>
           </a:p>
         </p:txBody>
       </p:sp>
@@ -3811,7 +4192,7 @@
           <a:bodyPr wrap="square" lIns="0" tIns="0" rIns="0" bIns="0" rtlCol="0" anchor="ctr"/>
           <a:lstStyle/>
           <a:p>
-            <a:pPr marL="0" indent="0" algn="ctr">
+            <a:pPr algn="ctr" indent="0" marL="0">
               <a:buNone/>
             </a:pPr>
             <a:r>
@@ -3883,14 +4264,14 @@
       </p:sp>
       <p:pic>
         <p:nvPicPr>
-          <p:cNvPr id="27" name="step-icon-1" descr="preencoded.png"/>
+          <p:cNvPr id="27" name="step-icon-1" descr="preencoded.png">    </p:cNvPr>
           <p:cNvPicPr>
             <a:picLocks noChangeAspect="1"/>
           </p:cNvPicPr>
           <p:nvPr/>
         </p:nvPicPr>
         <p:blipFill>
-          <a:blip r:embed="rId4"/>
+          <a:blip r:embed="rId2"/>
           <a:stretch>
             <a:fillRect/>
           </a:stretch>
@@ -3926,7 +4307,7 @@
           <a:bodyPr wrap="square" lIns="0" tIns="0" rIns="0" bIns="0" rtlCol="0" anchor="ctr"/>
           <a:lstStyle/>
           <a:p>
-            <a:pPr marL="0" indent="0">
+            <a:pPr indent="0" marL="0">
               <a:buNone/>
             </a:pPr>
             <a:r>
@@ -3965,11 +4346,11 @@
           <a:bodyPr wrap="square" lIns="0" tIns="0" rIns="0" bIns="0" rtlCol="0" anchor="t"/>
           <a:lstStyle/>
           <a:p>
-            <a:pPr marL="0" indent="0">
+            <a:pPr indent="0" marL="0">
               <a:buNone/>
             </a:pPr>
             <a:r>
-              <a:rPr lang="en-US" sz="1200" dirty="0">
+              <a:rPr lang="en-US" sz="1150" dirty="0">
                 <a:solidFill>
                   <a:srgbClr val="4A5875"/>
                 </a:solidFill>
@@ -3977,9 +4358,9 @@
                 <a:ea typeface="Calibri" pitchFamily="34" charset="-122"/>
                 <a:cs typeface="Calibri" pitchFamily="34" charset="-120"/>
               </a:rPr>
-              <a:t>Qwen rewrites it simply and explains hard words in Urdu</a:t>
+              <a:t>Qwen simplifies; hard words explained in Urdu or Pashto</a:t>
             </a:r>
-            <a:endParaRPr lang="en-US" sz="1200" dirty="0"/>
+            <a:endParaRPr lang="en-US" sz="1150" dirty="0"/>
           </a:p>
         </p:txBody>
       </p:sp>
@@ -4006,7 +4387,7 @@
           <a:bodyPr wrap="square" lIns="0" tIns="0" rIns="0" bIns="0" rtlCol="0" anchor="ctr"/>
           <a:lstStyle/>
           <a:p>
-            <a:pPr marL="0" indent="0" algn="ctr">
+            <a:pPr algn="ctr" indent="0" marL="0">
               <a:buNone/>
             </a:pPr>
             <a:r>
@@ -4078,14 +4459,14 @@
       </p:sp>
       <p:pic>
         <p:nvPicPr>
-          <p:cNvPr id="33" name="step-icon-2" descr="preencoded.png"/>
+          <p:cNvPr id="33" name="step-icon-2" descr="preencoded.png">    </p:cNvPr>
           <p:cNvPicPr>
             <a:picLocks noChangeAspect="1"/>
           </p:cNvPicPr>
           <p:nvPr/>
         </p:nvPicPr>
         <p:blipFill>
-          <a:blip r:embed="rId5"/>
+          <a:blip r:embed="rId3"/>
           <a:stretch>
             <a:fillRect/>
           </a:stretch>
@@ -4121,7 +4502,7 @@
           <a:bodyPr wrap="square" lIns="0" tIns="0" rIns="0" bIns="0" rtlCol="0" anchor="ctr"/>
           <a:lstStyle/>
           <a:p>
-            <a:pPr marL="0" indent="0">
+            <a:pPr indent="0" marL="0">
               <a:buNone/>
             </a:pPr>
             <a:r>
@@ -4160,11 +4541,11 @@
           <a:bodyPr wrap="square" lIns="0" tIns="0" rIns="0" bIns="0" rtlCol="0" anchor="t"/>
           <a:lstStyle/>
           <a:p>
-            <a:pPr marL="0" indent="0">
+            <a:pPr indent="0" marL="0">
               <a:buNone/>
             </a:pPr>
             <a:r>
-              <a:rPr lang="en-US" sz="1200" dirty="0">
+              <a:rPr lang="en-US" sz="1150" dirty="0">
                 <a:solidFill>
                   <a:srgbClr val="4A5875"/>
                 </a:solidFill>
@@ -4174,7 +4555,7 @@
               </a:rPr>
               <a:t>Fact Guard, a different AI, verifies every fact</a:t>
             </a:r>
-            <a:endParaRPr lang="en-US" sz="1200" dirty="0"/>
+            <a:endParaRPr lang="en-US" sz="1150" dirty="0"/>
           </a:p>
         </p:txBody>
       </p:sp>
@@ -4201,7 +4582,7 @@
           <a:bodyPr wrap="square" lIns="0" tIns="0" rIns="0" bIns="0" rtlCol="0" anchor="ctr"/>
           <a:lstStyle/>
           <a:p>
-            <a:pPr marL="0" indent="0" algn="ctr">
+            <a:pPr algn="ctr" indent="0" marL="0">
               <a:buNone/>
             </a:pPr>
             <a:r>
@@ -4273,14 +4654,14 @@
       </p:sp>
       <p:pic>
         <p:nvPicPr>
-          <p:cNvPr id="39" name="step-icon-3" descr="preencoded.png"/>
+          <p:cNvPr id="39" name="step-icon-3" descr="preencoded.png">    </p:cNvPr>
           <p:cNvPicPr>
             <a:picLocks noChangeAspect="1"/>
           </p:cNvPicPr>
           <p:nvPr/>
         </p:nvPicPr>
         <p:blipFill>
-          <a:blip r:embed="rId6"/>
+          <a:blip r:embed="rId4"/>
           <a:stretch>
             <a:fillRect/>
           </a:stretch>
@@ -4316,7 +4697,7 @@
           <a:bodyPr wrap="square" lIns="0" tIns="0" rIns="0" bIns="0" rtlCol="0" anchor="ctr"/>
           <a:lstStyle/>
           <a:p>
-            <a:pPr marL="0" indent="0">
+            <a:pPr indent="0" marL="0">
               <a:buNone/>
             </a:pPr>
             <a:r>
@@ -4328,7 +4709,7 @@
                 <a:ea typeface="Century Gothic" pitchFamily="34" charset="-122"/>
                 <a:cs typeface="Century Gothic" pitchFamily="34" charset="-120"/>
               </a:rPr>
-              <a:t>Transcribe</a:t>
+              <a:t>Listen</a:t>
             </a:r>
             <a:endParaRPr lang="en-US" sz="1600" dirty="0"/>
           </a:p>
@@ -4355,11 +4736,11 @@
           <a:bodyPr wrap="square" lIns="0" tIns="0" rIns="0" bIns="0" rtlCol="0" anchor="t"/>
           <a:lstStyle/>
           <a:p>
-            <a:pPr marL="0" indent="0">
+            <a:pPr indent="0" marL="0">
               <a:buNone/>
             </a:pPr>
             <a:r>
-              <a:rPr lang="en-US" sz="1200" dirty="0">
+              <a:rPr lang="en-US" sz="1150" dirty="0">
                 <a:solidFill>
                   <a:srgbClr val="4A5875"/>
                 </a:solidFill>
@@ -4367,9 +4748,9 @@
                 <a:ea typeface="Calibri" pitchFamily="34" charset="-122"/>
                 <a:cs typeface="Calibri" pitchFamily="34" charset="-120"/>
               </a:rPr>
-              <a:t>Whisper transcribes the lecture; voices read it all aloud</a:t>
+              <a:t>Whisper hears lectures and spoken quiz answers</a:t>
             </a:r>
-            <a:endParaRPr lang="en-US" sz="1200" dirty="0"/>
+            <a:endParaRPr lang="en-US" sz="1150" dirty="0"/>
           </a:p>
         </p:txBody>
       </p:sp>
@@ -4396,7 +4777,7 @@
           <a:bodyPr wrap="square" lIns="0" tIns="0" rIns="0" bIns="0" rtlCol="0" anchor="ctr"/>
           <a:lstStyle/>
           <a:p>
-            <a:pPr marL="0" indent="0" algn="ctr">
+            <a:pPr algn="ctr" indent="0" marL="0">
               <a:buNone/>
             </a:pPr>
             <a:r>
@@ -4423,11 +4804,11 @@
         <p:spPr>
           <a:xfrm>
             <a:off x="731520" y="3840480"/>
-            <a:ext cx="3520440" cy="2331720"/>
+            <a:ext cx="2057400" cy="2331720"/>
           </a:xfrm>
           <a:prstGeom prst="roundRect">
             <a:avLst>
-              <a:gd name="adj" fmla="val 7843"/>
+              <a:gd name="adj" fmla="val 8889"/>
             </a:avLst>
           </a:prstGeom>
           <a:solidFill>
@@ -4440,7 +4821,7 @@
             <a:prstDash val="solid"/>
           </a:ln>
           <a:effectLst>
-            <a:outerShdw blurRad="152400" dist="38100" dir="5400000" algn="bl" rotWithShape="0">
+            <a:outerShdw sx="100000" sy="100000" kx="0" ky="0" algn="bl" rotWithShape="0" blurRad="152400" dist="38100" dir="5400000">
               <a:srgbClr val="0D1B3E">
                 <a:alpha val="13000"/>
               </a:srgbClr>
@@ -4456,8 +4837,8 @@
         </p:nvSpPr>
         <p:spPr>
           <a:xfrm>
-            <a:off x="1051560" y="4133088"/>
-            <a:ext cx="731520" cy="731520"/>
+            <a:off x="1005840" y="4114800"/>
+            <a:ext cx="566928" cy="566928"/>
           </a:xfrm>
           <a:prstGeom prst="ellipse">
             <a:avLst/>
@@ -4475,22 +4856,22 @@
       </p:sp>
       <p:pic>
         <p:nvPicPr>
-          <p:cNvPr id="45" name="!!cicon-0" descr="preencoded.png"/>
+          <p:cNvPr id="45" name="!!cicon-0" descr="preencoded.png">    </p:cNvPr>
           <p:cNvPicPr>
             <a:picLocks noChangeAspect="1"/>
           </p:cNvPicPr>
           <p:nvPr/>
         </p:nvPicPr>
         <p:blipFill>
-          <a:blip r:embed="rId7"/>
+          <a:blip r:embed="rId5"/>
           <a:stretch>
             <a:fillRect/>
           </a:stretch>
         </p:blipFill>
         <p:spPr>
           <a:xfrm>
-            <a:off x="1227125" y="4308653"/>
-            <a:ext cx="380390" cy="380390"/>
+            <a:off x="1141903" y="4250863"/>
+            <a:ext cx="294803" cy="294803"/>
           </a:xfrm>
           <a:prstGeom prst="rect">
             <a:avLst/>
@@ -4505,8 +4886,8 @@
         </p:nvSpPr>
         <p:spPr>
           <a:xfrm>
-            <a:off x="1920240" y="4224528"/>
-            <a:ext cx="2194560" cy="457200"/>
+            <a:off x="1005840" y="4645152"/>
+            <a:ext cx="1691640" cy="457200"/>
           </a:xfrm>
           <a:prstGeom prst="rect">
             <a:avLst/>
@@ -4518,11 +4899,11 @@
           <a:bodyPr wrap="square" lIns="0" tIns="0" rIns="0" bIns="0" rtlCol="0" anchor="ctr"/>
           <a:lstStyle/>
           <a:p>
-            <a:pPr marL="0" indent="0">
+            <a:pPr indent="0" marL="0">
               <a:buNone/>
             </a:pPr>
             <a:r>
-              <a:rPr lang="en-US" sz="2000" b="1" dirty="0">
+              <a:rPr lang="en-US" sz="1700" b="1" dirty="0">
                 <a:solidFill>
                   <a:srgbClr val="0D1B3E"/>
                 </a:solidFill>
@@ -4532,7 +4913,7 @@
               </a:rPr>
               <a:t>Listen</a:t>
             </a:r>
-            <a:endParaRPr lang="en-US" sz="2000" dirty="0"/>
+            <a:endParaRPr lang="en-US" sz="1700" dirty="0"/>
           </a:p>
         </p:txBody>
       </p:sp>
@@ -4544,8 +4925,8 @@
         </p:nvSpPr>
         <p:spPr>
           <a:xfrm>
-            <a:off x="1051560" y="4892040"/>
-            <a:ext cx="2926080" cy="1188720"/>
+            <a:off x="1005840" y="5074920"/>
+            <a:ext cx="1645920" cy="1005840"/>
           </a:xfrm>
           <a:prstGeom prst="rect">
             <a:avLst/>
@@ -4557,11 +4938,11 @@
           <a:bodyPr wrap="square" lIns="0" tIns="0" rIns="0" bIns="0" rtlCol="0" anchor="t"/>
           <a:lstStyle/>
           <a:p>
-            <a:pPr marL="0" indent="0">
+            <a:pPr indent="0" marL="0">
               <a:buNone/>
             </a:pPr>
             <a:r>
-              <a:rPr lang="en-US" sz="1400" dirty="0">
+              <a:rPr lang="en-US" sz="1250" dirty="0">
                 <a:solidFill>
                   <a:srgbClr val="4A5875"/>
                 </a:solidFill>
@@ -4569,9 +4950,9 @@
                 <a:ea typeface="Calibri" pitchFamily="34" charset="-122"/>
                 <a:cs typeface="Calibri" pitchFamily="34" charset="-120"/>
               </a:rPr>
-              <a:t>For Bilal: the page read aloud section by section, every figure described in words, full keyboard control.</a:t>
+              <a:t>For Bilal: read aloud, every figure described, full keyboard control.</a:t>
             </a:r>
-            <a:endParaRPr lang="en-US" sz="1400" dirty="0"/>
+            <a:endParaRPr lang="en-US" sz="1250" dirty="0"/>
           </a:p>
         </p:txBody>
       </p:sp>
@@ -4583,12 +4964,12 @@
         </p:nvSpPr>
         <p:spPr>
           <a:xfrm>
-            <a:off x="4480560" y="3840480"/>
-            <a:ext cx="3520440" cy="2331720"/>
+            <a:off x="2898648" y="3840480"/>
+            <a:ext cx="2057400" cy="2331720"/>
           </a:xfrm>
           <a:prstGeom prst="roundRect">
             <a:avLst>
-              <a:gd name="adj" fmla="val 7843"/>
+              <a:gd name="adj" fmla="val 8889"/>
             </a:avLst>
           </a:prstGeom>
           <a:solidFill>
@@ -4601,7 +4982,7 @@
             <a:prstDash val="solid"/>
           </a:ln>
           <a:effectLst>
-            <a:outerShdw blurRad="152400" dist="38100" dir="5400000" algn="bl" rotWithShape="0">
+            <a:outerShdw sx="100000" sy="100000" kx="0" ky="0" algn="bl" rotWithShape="0" blurRad="152400" dist="38100" dir="5400000">
               <a:srgbClr val="0D1B3E">
                 <a:alpha val="13000"/>
               </a:srgbClr>
@@ -4617,8 +4998,8 @@
         </p:nvSpPr>
         <p:spPr>
           <a:xfrm>
-            <a:off x="4800600" y="4133088"/>
-            <a:ext cx="731520" cy="731520"/>
+            <a:off x="3172968" y="4114800"/>
+            <a:ext cx="566928" cy="566928"/>
           </a:xfrm>
           <a:prstGeom prst="ellipse">
             <a:avLst/>
@@ -4636,22 +5017,22 @@
       </p:sp>
       <p:pic>
         <p:nvPicPr>
-          <p:cNvPr id="50" name="!!cicon-1" descr="preencoded.png"/>
+          <p:cNvPr id="50" name="!!cicon-1" descr="preencoded.png">    </p:cNvPr>
           <p:cNvPicPr>
             <a:picLocks noChangeAspect="1"/>
           </p:cNvPicPr>
           <p:nvPr/>
         </p:nvPicPr>
         <p:blipFill>
-          <a:blip r:embed="rId8"/>
+          <a:blip r:embed="rId6"/>
           <a:stretch>
             <a:fillRect/>
           </a:stretch>
         </p:blipFill>
         <p:spPr>
           <a:xfrm>
-            <a:off x="4976165" y="4308653"/>
-            <a:ext cx="380390" cy="380390"/>
+            <a:off x="3309031" y="4250863"/>
+            <a:ext cx="294803" cy="294803"/>
           </a:xfrm>
           <a:prstGeom prst="rect">
             <a:avLst/>
@@ -4666,8 +5047,8 @@
         </p:nvSpPr>
         <p:spPr>
           <a:xfrm>
-            <a:off x="5669280" y="4224528"/>
-            <a:ext cx="2194560" cy="457200"/>
+            <a:off x="3172968" y="4645152"/>
+            <a:ext cx="1691640" cy="457200"/>
           </a:xfrm>
           <a:prstGeom prst="rect">
             <a:avLst/>
@@ -4679,11 +5060,11 @@
           <a:bodyPr wrap="square" lIns="0" tIns="0" rIns="0" bIns="0" rtlCol="0" anchor="ctr"/>
           <a:lstStyle/>
           <a:p>
-            <a:pPr marL="0" indent="0">
+            <a:pPr indent="0" marL="0">
               <a:buNone/>
             </a:pPr>
             <a:r>
-              <a:rPr lang="en-US" sz="2000" b="1" dirty="0">
+              <a:rPr lang="en-US" sz="1700" b="1" dirty="0">
                 <a:solidFill>
                   <a:srgbClr val="0D1B3E"/>
                 </a:solidFill>
@@ -4693,7 +5074,7 @@
               </a:rPr>
               <a:t>Read Easy</a:t>
             </a:r>
-            <a:endParaRPr lang="en-US" sz="2000" dirty="0"/>
+            <a:endParaRPr lang="en-US" sz="1700" dirty="0"/>
           </a:p>
         </p:txBody>
       </p:sp>
@@ -4705,8 +5086,8 @@
         </p:nvSpPr>
         <p:spPr>
           <a:xfrm>
-            <a:off x="4800600" y="4892040"/>
-            <a:ext cx="2926080" cy="1188720"/>
+            <a:off x="3172968" y="5074920"/>
+            <a:ext cx="1645920" cy="1005840"/>
           </a:xfrm>
           <a:prstGeom prst="rect">
             <a:avLst/>
@@ -4718,11 +5099,11 @@
           <a:bodyPr wrap="square" lIns="0" tIns="0" rIns="0" bIns="0" rtlCol="0" anchor="t"/>
           <a:lstStyle/>
           <a:p>
-            <a:pPr marL="0" indent="0">
+            <a:pPr indent="0" marL="0">
               <a:buNone/>
             </a:pPr>
             <a:r>
-              <a:rPr lang="en-US" sz="1400" dirty="0">
+              <a:rPr lang="en-US" sz="1250" dirty="0">
                 <a:solidFill>
                   <a:srgbClr val="4A5875"/>
                 </a:solidFill>
@@ -4730,9 +5111,9 @@
                 <a:ea typeface="Calibri" pitchFamily="34" charset="-122"/>
                 <a:cs typeface="Calibri" pitchFamily="34" charset="-120"/>
               </a:rPr>
-              <a:t>For Sara: simpler text beside the original, Urdu help for hard words, read-aloud that highlights each sentence.</a:t>
+              <a:t>For Sara: simpler text beside the original, word help, read-aloud.</a:t>
             </a:r>
-            <a:endParaRPr lang="en-US" sz="1400" dirty="0"/>
+            <a:endParaRPr lang="en-US" sz="1250" dirty="0"/>
           </a:p>
         </p:txBody>
       </p:sp>
@@ -4744,12 +5125,12 @@
         </p:nvSpPr>
         <p:spPr>
           <a:xfrm>
-            <a:off x="8229600" y="3840480"/>
-            <a:ext cx="3520440" cy="2331720"/>
+            <a:off x="5065776" y="3840480"/>
+            <a:ext cx="2057400" cy="2331720"/>
           </a:xfrm>
           <a:prstGeom prst="roundRect">
             <a:avLst>
-              <a:gd name="adj" fmla="val 7843"/>
+              <a:gd name="adj" fmla="val 8889"/>
             </a:avLst>
           </a:prstGeom>
           <a:solidFill>
@@ -4762,7 +5143,7 @@
             <a:prstDash val="solid"/>
           </a:ln>
           <a:effectLst>
-            <a:outerShdw blurRad="152400" dist="38100" dir="5400000" algn="bl" rotWithShape="0">
+            <a:outerShdw sx="100000" sy="100000" kx="0" ky="0" algn="bl" rotWithShape="0" blurRad="152400" dist="38100" dir="5400000">
               <a:srgbClr val="0D1B3E">
                 <a:alpha val="13000"/>
               </a:srgbClr>
@@ -4778,8 +5159,8 @@
         </p:nvSpPr>
         <p:spPr>
           <a:xfrm>
-            <a:off x="8549640" y="4133088"/>
-            <a:ext cx="731520" cy="731520"/>
+            <a:off x="5340096" y="4114800"/>
+            <a:ext cx="566928" cy="566928"/>
           </a:xfrm>
           <a:prstGeom prst="ellipse">
             <a:avLst/>
@@ -4797,22 +5178,22 @@
       </p:sp>
       <p:pic>
         <p:nvPicPr>
-          <p:cNvPr id="55" name="!!cicon-2" descr="preencoded.png"/>
+          <p:cNvPr id="55" name="!!cicon-2" descr="preencoded.png">    </p:cNvPr>
           <p:cNvPicPr>
             <a:picLocks noChangeAspect="1"/>
           </p:cNvPicPr>
           <p:nvPr/>
         </p:nvPicPr>
         <p:blipFill>
-          <a:blip r:embed="rId9"/>
+          <a:blip r:embed="rId7"/>
           <a:stretch>
             <a:fillRect/>
           </a:stretch>
         </p:blipFill>
         <p:spPr>
           <a:xfrm>
-            <a:off x="8725205" y="4308653"/>
-            <a:ext cx="380390" cy="380390"/>
+            <a:off x="5476159" y="4250863"/>
+            <a:ext cx="294803" cy="294803"/>
           </a:xfrm>
           <a:prstGeom prst="rect">
             <a:avLst/>
@@ -4827,8 +5208,8 @@
         </p:nvSpPr>
         <p:spPr>
           <a:xfrm>
-            <a:off x="9418320" y="4224528"/>
-            <a:ext cx="2194560" cy="457200"/>
+            <a:off x="5340096" y="4645152"/>
+            <a:ext cx="1691640" cy="457200"/>
           </a:xfrm>
           <a:prstGeom prst="rect">
             <a:avLst/>
@@ -4840,11 +5221,11 @@
           <a:bodyPr wrap="square" lIns="0" tIns="0" rIns="0" bIns="0" rtlCol="0" anchor="ctr"/>
           <a:lstStyle/>
           <a:p>
-            <a:pPr marL="0" indent="0">
+            <a:pPr indent="0" marL="0">
               <a:buNone/>
             </a:pPr>
             <a:r>
-              <a:rPr lang="en-US" sz="2000" b="1" dirty="0">
+              <a:rPr lang="en-US" sz="1700" b="1" dirty="0">
                 <a:solidFill>
                   <a:srgbClr val="0D1B3E"/>
                 </a:solidFill>
@@ -4854,7 +5235,7 @@
               </a:rPr>
               <a:t>Captions</a:t>
             </a:r>
-            <a:endParaRPr lang="en-US" sz="2000" dirty="0"/>
+            <a:endParaRPr lang="en-US" sz="1700" dirty="0"/>
           </a:p>
         </p:txBody>
       </p:sp>
@@ -4866,8 +5247,8 @@
         </p:nvSpPr>
         <p:spPr>
           <a:xfrm>
-            <a:off x="8549640" y="4892040"/>
-            <a:ext cx="2926080" cy="1188720"/>
+            <a:off x="5340096" y="5074920"/>
+            <a:ext cx="1645920" cy="1005840"/>
           </a:xfrm>
           <a:prstGeom prst="rect">
             <a:avLst/>
@@ -4879,11 +5260,11 @@
           <a:bodyPr wrap="square" lIns="0" tIns="0" rIns="0" bIns="0" rtlCol="0" anchor="t"/>
           <a:lstStyle/>
           <a:p>
-            <a:pPr marL="0" indent="0">
+            <a:pPr indent="0" marL="0">
               <a:buNone/>
             </a:pPr>
             <a:r>
-              <a:rPr lang="en-US" sz="1400" dirty="0">
+              <a:rPr lang="en-US" sz="1250" dirty="0">
                 <a:solidFill>
                   <a:srgbClr val="4A5875"/>
                 </a:solidFill>
@@ -4891,21 +5272,343 @@
                 <a:ea typeface="Calibri" pitchFamily="34" charset="-122"/>
                 <a:cs typeface="Calibri" pitchFamily="34" charset="-120"/>
               </a:rPr>
-              <a:t>For Hamza: the lecture as a transcript synced to the audio, plus a summary checked against what was said.</a:t>
+              <a:t>For Hamza: lecture transcript plus a checked summary.</a:t>
             </a:r>
-            <a:endParaRPr lang="en-US" sz="1400" dirty="0"/>
-          </a:p>
-        </p:txBody>
-      </p:sp>
-      <p:sp>
-        <p:nvSpPr>
-          <p:cNvPr id="58" name="!!dot-0"/>
-          <p:cNvSpPr/>
-          <p:nvPr/>
-        </p:nvSpPr>
-        <p:spPr>
-          <a:xfrm>
-            <a:off x="10241280" y="6400800"/>
+            <a:endParaRPr lang="en-US" sz="1250" dirty="0"/>
+          </a:p>
+        </p:txBody>
+      </p:sp>
+      <p:sp>
+        <p:nvSpPr>
+          <p:cNvPr id="58" name="!!card-3"/>
+          <p:cNvSpPr/>
+          <p:nvPr/>
+        </p:nvSpPr>
+        <p:spPr>
+          <a:xfrm>
+            <a:off x="7232904" y="3840480"/>
+            <a:ext cx="2057400" cy="2331720"/>
+          </a:xfrm>
+          <a:prstGeom prst="roundRect">
+            <a:avLst>
+              <a:gd name="adj" fmla="val 8889"/>
+            </a:avLst>
+          </a:prstGeom>
+          <a:solidFill>
+            <a:srgbClr val="FFFFFF"/>
+          </a:solidFill>
+          <a:ln w="12700">
+            <a:solidFill>
+              <a:srgbClr val="D3DEDC"/>
+            </a:solidFill>
+            <a:prstDash val="solid"/>
+          </a:ln>
+          <a:effectLst>
+            <a:outerShdw sx="100000" sy="100000" kx="0" ky="0" algn="bl" rotWithShape="0" blurRad="152400" dist="38100" dir="5400000">
+              <a:srgbClr val="0D1B3E">
+                <a:alpha val="13000"/>
+              </a:srgbClr>
+            </a:outerShdw>
+          </a:effectLst>
+        </p:spPr>
+      </p:sp>
+      <p:sp>
+        <p:nvSpPr>
+          <p:cNvPr id="59" name="!!cdot-3"/>
+          <p:cNvSpPr/>
+          <p:nvPr/>
+        </p:nvSpPr>
+        <p:spPr>
+          <a:xfrm>
+            <a:off x="7507224" y="4114800"/>
+            <a:ext cx="566928" cy="566928"/>
+          </a:xfrm>
+          <a:prstGeom prst="ellipse">
+            <a:avLst/>
+          </a:prstGeom>
+          <a:solidFill>
+            <a:srgbClr val="D8F1EF"/>
+          </a:solidFill>
+          <a:ln w="12700">
+            <a:solidFill>
+              <a:srgbClr val="D8F1EF"/>
+            </a:solidFill>
+            <a:prstDash val="solid"/>
+          </a:ln>
+        </p:spPr>
+      </p:sp>
+      <p:pic>
+        <p:nvPicPr>
+          <p:cNvPr id="60" name="!!cicon-3" descr="preencoded.png">    </p:cNvPr>
+          <p:cNvPicPr>
+            <a:picLocks noChangeAspect="1"/>
+          </p:cNvPicPr>
+          <p:nvPr/>
+        </p:nvPicPr>
+        <p:blipFill>
+          <a:blip r:embed="rId8"/>
+          <a:stretch>
+            <a:fillRect/>
+          </a:stretch>
+        </p:blipFill>
+        <p:spPr>
+          <a:xfrm>
+            <a:off x="7643287" y="4250863"/>
+            <a:ext cx="294803" cy="294803"/>
+          </a:xfrm>
+          <a:prstGeom prst="rect">
+            <a:avLst/>
+          </a:prstGeom>
+        </p:spPr>
+      </p:pic>
+      <p:sp>
+        <p:nvSpPr>
+          <p:cNvPr id="61" name="!!ctitle-3"/>
+          <p:cNvSpPr txBox="1"/>
+          <p:nvPr/>
+        </p:nvSpPr>
+        <p:spPr>
+          <a:xfrm>
+            <a:off x="7507224" y="4645152"/>
+            <a:ext cx="1691640" cy="457200"/>
+          </a:xfrm>
+          <a:prstGeom prst="rect">
+            <a:avLst/>
+          </a:prstGeom>
+          <a:noFill/>
+          <a:ln/>
+        </p:spPr>
+        <p:txBody>
+          <a:bodyPr wrap="square" lIns="0" tIns="0" rIns="0" bIns="0" rtlCol="0" anchor="ctr"/>
+          <a:lstStyle/>
+          <a:p>
+            <a:pPr indent="0" marL="0">
+              <a:buNone/>
+            </a:pPr>
+            <a:r>
+              <a:rPr lang="en-US" sz="1700" b="1" dirty="0">
+                <a:solidFill>
+                  <a:srgbClr val="0D1B3E"/>
+                </a:solidFill>
+                <a:latin typeface="Century Gothic" pitchFamily="34" charset="0"/>
+                <a:ea typeface="Century Gothic" pitchFamily="34" charset="-122"/>
+                <a:cs typeface="Century Gothic" pitchFamily="34" charset="-120"/>
+              </a:rPr>
+              <a:t>Videos</a:t>
+            </a:r>
+            <a:endParaRPr lang="en-US" sz="1700" dirty="0"/>
+          </a:p>
+        </p:txBody>
+      </p:sp>
+      <p:sp>
+        <p:nvSpPr>
+          <p:cNvPr id="62" name="!!cdesc-3"/>
+          <p:cNvSpPr txBox="1"/>
+          <p:nvPr/>
+        </p:nvSpPr>
+        <p:spPr>
+          <a:xfrm>
+            <a:off x="7507224" y="5074920"/>
+            <a:ext cx="1645920" cy="1005840"/>
+          </a:xfrm>
+          <a:prstGeom prst="rect">
+            <a:avLst/>
+          </a:prstGeom>
+          <a:noFill/>
+          <a:ln/>
+        </p:spPr>
+        <p:txBody>
+          <a:bodyPr wrap="square" lIns="0" tIns="0" rIns="0" bIns="0" rtlCol="0" anchor="t"/>
+          <a:lstStyle/>
+          <a:p>
+            <a:pPr indent="0" marL="0">
+              <a:buNone/>
+            </a:pPr>
+            <a:r>
+              <a:rPr lang="en-US" sz="1250" dirty="0">
+                <a:solidFill>
+                  <a:srgbClr val="4A5875"/>
+                </a:solidFill>
+                <a:latin typeface="Calibri" pitchFamily="34" charset="0"/>
+                <a:ea typeface="Calibri" pitchFamily="34" charset="-122"/>
+                <a:cs typeface="Calibri" pitchFamily="34" charset="-120"/>
+              </a:rPr>
+              <a:t>Any YouTube video becomes timestamped, checked notes.</a:t>
+            </a:r>
+            <a:endParaRPr lang="en-US" sz="1250" dirty="0"/>
+          </a:p>
+        </p:txBody>
+      </p:sp>
+      <p:sp>
+        <p:nvSpPr>
+          <p:cNvPr id="63" name="!!card-4"/>
+          <p:cNvSpPr/>
+          <p:nvPr/>
+        </p:nvSpPr>
+        <p:spPr>
+          <a:xfrm>
+            <a:off x="9400032" y="3840480"/>
+            <a:ext cx="2057400" cy="2331720"/>
+          </a:xfrm>
+          <a:prstGeom prst="roundRect">
+            <a:avLst>
+              <a:gd name="adj" fmla="val 8889"/>
+            </a:avLst>
+          </a:prstGeom>
+          <a:solidFill>
+            <a:srgbClr val="FFFFFF"/>
+          </a:solidFill>
+          <a:ln w="12700">
+            <a:solidFill>
+              <a:srgbClr val="D3DEDC"/>
+            </a:solidFill>
+            <a:prstDash val="solid"/>
+          </a:ln>
+          <a:effectLst>
+            <a:outerShdw sx="100000" sy="100000" kx="0" ky="0" algn="bl" rotWithShape="0" blurRad="152400" dist="38100" dir="5400000">
+              <a:srgbClr val="0D1B3E">
+                <a:alpha val="13000"/>
+              </a:srgbClr>
+            </a:outerShdw>
+          </a:effectLst>
+        </p:spPr>
+      </p:sp>
+      <p:sp>
+        <p:nvSpPr>
+          <p:cNvPr id="64" name="!!cdot-4"/>
+          <p:cNvSpPr/>
+          <p:nvPr/>
+        </p:nvSpPr>
+        <p:spPr>
+          <a:xfrm>
+            <a:off x="9674352" y="4114800"/>
+            <a:ext cx="566928" cy="566928"/>
+          </a:xfrm>
+          <a:prstGeom prst="ellipse">
+            <a:avLst/>
+          </a:prstGeom>
+          <a:solidFill>
+            <a:srgbClr val="FFF0CC"/>
+          </a:solidFill>
+          <a:ln w="12700">
+            <a:solidFill>
+              <a:srgbClr val="FFF0CC"/>
+            </a:solidFill>
+            <a:prstDash val="solid"/>
+          </a:ln>
+        </p:spPr>
+      </p:sp>
+      <p:pic>
+        <p:nvPicPr>
+          <p:cNvPr id="65" name="!!cicon-4" descr="preencoded.png">    </p:cNvPr>
+          <p:cNvPicPr>
+            <a:picLocks noChangeAspect="1"/>
+          </p:cNvPicPr>
+          <p:nvPr/>
+        </p:nvPicPr>
+        <p:blipFill>
+          <a:blip r:embed="rId9"/>
+          <a:stretch>
+            <a:fillRect/>
+          </a:stretch>
+        </p:blipFill>
+        <p:spPr>
+          <a:xfrm>
+            <a:off x="9810415" y="4250863"/>
+            <a:ext cx="294803" cy="294803"/>
+          </a:xfrm>
+          <a:prstGeom prst="rect">
+            <a:avLst/>
+          </a:prstGeom>
+        </p:spPr>
+      </p:pic>
+      <p:sp>
+        <p:nvSpPr>
+          <p:cNvPr id="66" name="!!ctitle-4"/>
+          <p:cNvSpPr txBox="1"/>
+          <p:nvPr/>
+        </p:nvSpPr>
+        <p:spPr>
+          <a:xfrm>
+            <a:off x="9674352" y="4645152"/>
+            <a:ext cx="1691640" cy="457200"/>
+          </a:xfrm>
+          <a:prstGeom prst="rect">
+            <a:avLst/>
+          </a:prstGeom>
+          <a:noFill/>
+          <a:ln/>
+        </p:spPr>
+        <p:txBody>
+          <a:bodyPr wrap="square" lIns="0" tIns="0" rIns="0" bIns="0" rtlCol="0" anchor="ctr"/>
+          <a:lstStyle/>
+          <a:p>
+            <a:pPr indent="0" marL="0">
+              <a:buNone/>
+            </a:pPr>
+            <a:r>
+              <a:rPr lang="en-US" sz="1700" b="1" dirty="0">
+                <a:solidFill>
+                  <a:srgbClr val="0D1B3E"/>
+                </a:solidFill>
+                <a:latin typeface="Century Gothic" pitchFamily="34" charset="0"/>
+                <a:ea typeface="Century Gothic" pitchFamily="34" charset="-122"/>
+                <a:cs typeface="Century Gothic" pitchFamily="34" charset="-120"/>
+              </a:rPr>
+              <a:t>Practice</a:t>
+            </a:r>
+            <a:endParaRPr lang="en-US" sz="1700" dirty="0"/>
+          </a:p>
+        </p:txBody>
+      </p:sp>
+      <p:sp>
+        <p:nvSpPr>
+          <p:cNvPr id="67" name="!!cdesc-4"/>
+          <p:cNvSpPr txBox="1"/>
+          <p:nvPr/>
+        </p:nvSpPr>
+        <p:spPr>
+          <a:xfrm>
+            <a:off x="9674352" y="5074920"/>
+            <a:ext cx="1645920" cy="1005840"/>
+          </a:xfrm>
+          <a:prstGeom prst="rect">
+            <a:avLst/>
+          </a:prstGeom>
+          <a:noFill/>
+          <a:ln/>
+        </p:spPr>
+        <p:txBody>
+          <a:bodyPr wrap="square" lIns="0" tIns="0" rIns="0" bIns="0" rtlCol="0" anchor="t"/>
+          <a:lstStyle/>
+          <a:p>
+            <a:pPr indent="0" marL="0">
+              <a:buNone/>
+            </a:pPr>
+            <a:r>
+              <a:rPr lang="en-US" sz="1250" dirty="0">
+                <a:solidFill>
+                  <a:srgbClr val="4A5875"/>
+                </a:solidFill>
+                <a:latin typeface="Calibri" pitchFamily="34" charset="0"/>
+                <a:ea typeface="Calibri" pitchFamily="34" charset="-122"/>
+                <a:cs typeface="Calibri" pitchFamily="34" charset="-120"/>
+              </a:rPr>
+              <a:t>Quiz by tap or voice, weak areas and a study plan.</a:t>
+            </a:r>
+            <a:endParaRPr lang="en-US" sz="1250" dirty="0"/>
+          </a:p>
+        </p:txBody>
+      </p:sp>
+      <p:sp>
+        <p:nvSpPr>
+          <p:cNvPr id="68" name="!!dot-0"/>
+          <p:cNvSpPr/>
+          <p:nvPr/>
+        </p:nvSpPr>
+        <p:spPr>
+          <a:xfrm>
+            <a:off x="10012680" y="6400800"/>
             <a:ext cx="100584" cy="100584"/>
           </a:xfrm>
           <a:prstGeom prst="ellipse">
@@ -4924,13 +5627,13 @@
       </p:sp>
       <p:sp>
         <p:nvSpPr>
-          <p:cNvPr id="59" name="!!dot-1"/>
-          <p:cNvSpPr/>
-          <p:nvPr/>
-        </p:nvSpPr>
-        <p:spPr>
-          <a:xfrm>
-            <a:off x="10479024" y="6400800"/>
+          <p:cNvPr id="69" name="!!dot-1"/>
+          <p:cNvSpPr/>
+          <p:nvPr/>
+        </p:nvSpPr>
+        <p:spPr>
+          <a:xfrm>
+            <a:off x="10250424" y="6400800"/>
             <a:ext cx="100584" cy="100584"/>
           </a:xfrm>
           <a:prstGeom prst="ellipse">
@@ -4949,13 +5652,13 @@
       </p:sp>
       <p:sp>
         <p:nvSpPr>
-          <p:cNvPr id="60" name="!!dot-2"/>
-          <p:cNvSpPr/>
-          <p:nvPr/>
-        </p:nvSpPr>
-        <p:spPr>
-          <a:xfrm>
-            <a:off x="10716768" y="6400800"/>
+          <p:cNvPr id="70" name="!!dot-2"/>
+          <p:cNvSpPr/>
+          <p:nvPr/>
+        </p:nvSpPr>
+        <p:spPr>
+          <a:xfrm>
+            <a:off x="10488168" y="6400800"/>
             <a:ext cx="155448" cy="155448"/>
           </a:xfrm>
           <a:prstGeom prst="ellipse">
@@ -4974,13 +5677,13 @@
       </p:sp>
       <p:sp>
         <p:nvSpPr>
-          <p:cNvPr id="61" name="!!dot-3"/>
-          <p:cNvSpPr/>
-          <p:nvPr/>
-        </p:nvSpPr>
-        <p:spPr>
-          <a:xfrm>
-            <a:off x="10954512" y="6400800"/>
+          <p:cNvPr id="71" name="!!dot-3"/>
+          <p:cNvSpPr/>
+          <p:nvPr/>
+        </p:nvSpPr>
+        <p:spPr>
+          <a:xfrm>
+            <a:off x="10725912" y="6400800"/>
             <a:ext cx="100584" cy="100584"/>
           </a:xfrm>
           <a:prstGeom prst="ellipse">
@@ -4999,13 +5702,13 @@
       </p:sp>
       <p:sp>
         <p:nvSpPr>
-          <p:cNvPr id="62" name="!!dot-4"/>
-          <p:cNvSpPr/>
-          <p:nvPr/>
-        </p:nvSpPr>
-        <p:spPr>
-          <a:xfrm>
-            <a:off x="11192256" y="6400800"/>
+          <p:cNvPr id="72" name="!!dot-4"/>
+          <p:cNvSpPr/>
+          <p:nvPr/>
+        </p:nvSpPr>
+        <p:spPr>
+          <a:xfrm>
+            <a:off x="10963656" y="6400800"/>
             <a:ext cx="100584" cy="100584"/>
           </a:xfrm>
           <a:prstGeom prst="ellipse">
@@ -5024,13 +5727,13 @@
       </p:sp>
       <p:sp>
         <p:nvSpPr>
-          <p:cNvPr id="63" name="!!dot-5"/>
-          <p:cNvSpPr/>
-          <p:nvPr/>
-        </p:nvSpPr>
-        <p:spPr>
-          <a:xfrm>
-            <a:off x="11430000" y="6400800"/>
+          <p:cNvPr id="73" name="!!dot-5"/>
+          <p:cNvSpPr/>
+          <p:nvPr/>
+        </p:nvSpPr>
+        <p:spPr>
+          <a:xfrm>
+            <a:off x="11201400" y="6400800"/>
             <a:ext cx="100584" cy="100584"/>
           </a:xfrm>
           <a:prstGeom prst="ellipse">
@@ -5049,13 +5752,38 @@
       </p:sp>
       <p:sp>
         <p:nvSpPr>
-          <p:cNvPr id="64" name="!!dot-6"/>
-          <p:cNvSpPr/>
-          <p:nvPr/>
-        </p:nvSpPr>
-        <p:spPr>
-          <a:xfrm>
-            <a:off x="11667744" y="6400800"/>
+          <p:cNvPr id="74" name="!!dot-6"/>
+          <p:cNvSpPr/>
+          <p:nvPr/>
+        </p:nvSpPr>
+        <p:spPr>
+          <a:xfrm>
+            <a:off x="11439144" y="6400800"/>
+            <a:ext cx="100584" cy="100584"/>
+          </a:xfrm>
+          <a:prstGeom prst="ellipse">
+            <a:avLst/>
+          </a:prstGeom>
+          <a:solidFill>
+            <a:srgbClr val="C3CDDD"/>
+          </a:solidFill>
+          <a:ln w="12700">
+            <a:solidFill>
+              <a:srgbClr val="C3CDDD"/>
+            </a:solidFill>
+            <a:prstDash val="solid"/>
+          </a:ln>
+        </p:spPr>
+      </p:sp>
+      <p:sp>
+        <p:nvSpPr>
+          <p:cNvPr id="75" name="!!dot-7"/>
+          <p:cNvSpPr/>
+          <p:nvPr/>
+        </p:nvSpPr>
+        <p:spPr>
+          <a:xfrm>
+            <a:off x="11676888" y="6400800"/>
             <a:ext cx="100584" cy="100584"/>
           </a:xfrm>
           <a:prstGeom prst="ellipse">
@@ -5100,7 +5828,6 @@
         <a:solidFill>
           <a:srgbClr val="0D1B3E"/>
         </a:solidFill>
-        <a:effectLst/>
       </p:bgPr>
     </p:bg>
     <p:spTree>
@@ -5488,7 +6215,7 @@
         </p:nvSpPr>
         <p:spPr>
           <a:xfrm>
-            <a:off x="2377440" y="987552"/>
+            <a:off x="2606040" y="987552"/>
             <a:ext cx="4572000" cy="320040"/>
           </a:xfrm>
           <a:prstGeom prst="rect">
@@ -5501,11 +6228,11 @@
           <a:bodyPr wrap="square" lIns="0" tIns="0" rIns="0" bIns="0" rtlCol="0" anchor="ctr"/>
           <a:lstStyle/>
           <a:p>
-            <a:pPr marL="0" indent="0">
+            <a:pPr indent="0" marL="0">
               <a:buNone/>
             </a:pPr>
             <a:r>
-              <a:rPr lang="en-US" sz="1300" b="1" kern="0" spc="300" dirty="0">
+              <a:rPr lang="en-US" sz="1300" b="1" spc="300" kern="0" dirty="0">
                 <a:solidFill>
                   <a:srgbClr val="F2A40E"/>
                 </a:solidFill>
@@ -5513,7 +6240,7 @@
                 <a:ea typeface="Calibri" pitchFamily="34" charset="-122"/>
                 <a:cs typeface="Calibri" pitchFamily="34" charset="-120"/>
               </a:rPr>
-              <a:t>03 · LIVE DEMO · 2 MINUTES</a:t>
+              <a:t>03 · LIVE DEMO · 100 SECONDS</a:t>
             </a:r>
             <a:endParaRPr lang="en-US" sz="1300" dirty="0"/>
           </a:p>
@@ -5540,7 +6267,7 @@
           <a:bodyPr wrap="square" lIns="0" tIns="0" rIns="0" bIns="0" rtlCol="0" anchor="t"/>
           <a:lstStyle/>
           <a:p>
-            <a:pPr marL="0" indent="0">
+            <a:pPr indent="0" marL="0">
               <a:buNone/>
             </a:pPr>
             <a:r>
@@ -5604,7 +6331,7 @@
           <a:bodyPr wrap="square" lIns="0" tIns="0" rIns="0" bIns="0" rtlCol="0" anchor="ctr"/>
           <a:lstStyle/>
           <a:p>
-            <a:pPr marL="0" indent="0" algn="ctr">
+            <a:pPr algn="ctr" indent="0" marL="0">
               <a:buNone/>
             </a:pPr>
             <a:r>
@@ -5643,7 +6370,7 @@
           <a:bodyPr wrap="square" lIns="0" tIns="0" rIns="0" bIns="0" rtlCol="0" anchor="ctr"/>
           <a:lstStyle/>
           <a:p>
-            <a:pPr marL="0" indent="0">
+            <a:pPr indent="0" marL="0">
               <a:buNone/>
             </a:pPr>
             <a:r>
@@ -5655,7 +6382,7 @@
                 <a:ea typeface="Calibri" pitchFamily="34" charset="-122"/>
                 <a:cs typeface="Calibri" pitchFamily="34" charset="-120"/>
               </a:rPr>
-              <a:t>Photograph a printed page</a:t>
+              <a:t>Set up for you</a:t>
             </a:r>
             <a:endParaRPr lang="en-US" sz="1800" dirty="0"/>
           </a:p>
@@ -5670,7 +6397,7 @@
         <p:spPr>
           <a:xfrm>
             <a:off x="1325880" y="3730752"/>
-            <a:ext cx="4754880" cy="292608"/>
+            <a:ext cx="4846320" cy="292608"/>
           </a:xfrm>
           <a:prstGeom prst="rect">
             <a:avLst/>
@@ -5682,7 +6409,7 @@
           <a:bodyPr wrap="square" lIns="0" tIns="0" rIns="0" bIns="0" rtlCol="0" anchor="ctr"/>
           <a:lstStyle/>
           <a:p>
-            <a:pPr marL="0" indent="0">
+            <a:pPr indent="0" marL="0">
               <a:buNone/>
             </a:pPr>
             <a:r>
@@ -5694,7 +6421,7 @@
                 <a:ea typeface="Calibri" pitchFamily="34" charset="-122"/>
                 <a:cs typeface="Calibri" pitchFamily="34" charset="-120"/>
               </a:rPr>
-              <a:t>Gemini reads it in about 5 seconds</a:t>
+              <a:t>Two questions; the lesson opens your way and says why</a:t>
             </a:r>
             <a:endParaRPr lang="en-US" sz="1300" dirty="0"/>
           </a:p>
@@ -5746,7 +6473,7 @@
           <a:bodyPr wrap="square" lIns="0" tIns="0" rIns="0" bIns="0" rtlCol="0" anchor="ctr"/>
           <a:lstStyle/>
           <a:p>
-            <a:pPr marL="0" indent="0" algn="ctr">
+            <a:pPr algn="ctr" indent="0" marL="0">
               <a:buNone/>
             </a:pPr>
             <a:r>
@@ -5785,7 +6512,7 @@
           <a:bodyPr wrap="square" lIns="0" tIns="0" rIns="0" bIns="0" rtlCol="0" anchor="ctr"/>
           <a:lstStyle/>
           <a:p>
-            <a:pPr marL="0" indent="0">
+            <a:pPr indent="0" marL="0">
               <a:buNone/>
             </a:pPr>
             <a:r>
@@ -5812,7 +6539,7 @@
         <p:spPr>
           <a:xfrm>
             <a:off x="1325880" y="4443984"/>
-            <a:ext cx="4754880" cy="292608"/>
+            <a:ext cx="4846320" cy="292608"/>
           </a:xfrm>
           <a:prstGeom prst="rect">
             <a:avLst/>
@@ -5824,7 +6551,7 @@
           <a:bodyPr wrap="square" lIns="0" tIns="0" rIns="0" bIns="0" rtlCol="0" anchor="ctr"/>
           <a:lstStyle/>
           <a:p>
-            <a:pPr marL="0" indent="0">
+            <a:pPr indent="0" marL="0">
               <a:buNone/>
             </a:pPr>
             <a:r>
@@ -5836,7 +6563,7 @@
                 <a:ea typeface="Calibri" pitchFamily="34" charset="-122"/>
                 <a:cs typeface="Calibri" pitchFamily="34" charset="-120"/>
               </a:rPr>
-              <a:t>Read-aloud highlighting, Urdu help, Fact Guard badge</a:t>
+              <a:t>Read-aloud highlighting, Urdu/Pashto word help</a:t>
             </a:r>
             <a:endParaRPr lang="en-US" sz="1300" dirty="0"/>
           </a:p>
@@ -5888,7 +6615,7 @@
           <a:bodyPr wrap="square" lIns="0" tIns="0" rIns="0" bIns="0" rtlCol="0" anchor="ctr"/>
           <a:lstStyle/>
           <a:p>
-            <a:pPr marL="0" indent="0" algn="ctr">
+            <a:pPr algn="ctr" indent="0" marL="0">
               <a:buNone/>
             </a:pPr>
             <a:r>
@@ -5927,7 +6654,7 @@
           <a:bodyPr wrap="square" lIns="0" tIns="0" rIns="0" bIns="0" rtlCol="0" anchor="ctr"/>
           <a:lstStyle/>
           <a:p>
-            <a:pPr marL="0" indent="0">
+            <a:pPr indent="0" marL="0">
               <a:buNone/>
             </a:pPr>
             <a:r>
@@ -5954,7 +6681,7 @@
         <p:spPr>
           <a:xfrm>
             <a:off x="1325880" y="5157216"/>
-            <a:ext cx="4754880" cy="292608"/>
+            <a:ext cx="4846320" cy="292608"/>
           </a:xfrm>
           <a:prstGeom prst="rect">
             <a:avLst/>
@@ -5966,7 +6693,7 @@
           <a:bodyPr wrap="square" lIns="0" tIns="0" rIns="0" bIns="0" rtlCol="0" anchor="ctr"/>
           <a:lstStyle/>
           <a:p>
-            <a:pPr marL="0" indent="0">
+            <a:pPr indent="0" marL="0">
               <a:buNone/>
             </a:pPr>
             <a:r>
@@ -6030,7 +6757,7 @@
           <a:bodyPr wrap="square" lIns="0" tIns="0" rIns="0" bIns="0" rtlCol="0" anchor="ctr"/>
           <a:lstStyle/>
           <a:p>
-            <a:pPr marL="0" indent="0" algn="ctr">
+            <a:pPr algn="ctr" indent="0" marL="0">
               <a:buNone/>
             </a:pPr>
             <a:r>
@@ -6069,7 +6796,7 @@
           <a:bodyPr wrap="square" lIns="0" tIns="0" rIns="0" bIns="0" rtlCol="0" anchor="ctr"/>
           <a:lstStyle/>
           <a:p>
-            <a:pPr marL="0" indent="0">
+            <a:pPr indent="0" marL="0">
               <a:buNone/>
             </a:pPr>
             <a:r>
@@ -6081,7 +6808,7 @@
                 <a:ea typeface="Calibri" pitchFamily="34" charset="-122"/>
                 <a:cs typeface="Calibri" pitchFamily="34" charset="-120"/>
               </a:rPr>
-              <a:t>Listen and Captions</a:t>
+              <a:t>Voice quiz</a:t>
             </a:r>
             <a:endParaRPr lang="en-US" sz="1800" dirty="0"/>
           </a:p>
@@ -6096,7 +6823,7 @@
         <p:spPr>
           <a:xfrm>
             <a:off x="1325880" y="5870448"/>
-            <a:ext cx="4754880" cy="292608"/>
+            <a:ext cx="4846320" cy="292608"/>
           </a:xfrm>
           <a:prstGeom prst="rect">
             <a:avLst/>
@@ -6108,7 +6835,7 @@
           <a:bodyPr wrap="square" lIns="0" tIns="0" rIns="0" bIns="0" rtlCol="0" anchor="ctr"/>
           <a:lstStyle/>
           <a:p>
-            <a:pPr marL="0" indent="0">
+            <a:pPr indent="0" marL="0">
               <a:buNone/>
             </a:pPr>
             <a:r>
@@ -6120,7 +6847,7 @@
                 <a:ea typeface="Calibri" pitchFamily="34" charset="-122"/>
                 <a:cs typeface="Calibri" pitchFamily="34" charset="-120"/>
               </a:rPr>
-              <a:t>Figures described, lecture transcript synced</a:t>
+              <a:t>Say “B” → weak areas → a study plan to the exact spot</a:t>
             </a:r>
             <a:endParaRPr lang="en-US" sz="1300" dirty="0"/>
           </a:p>
@@ -6155,15 +6882,15 @@
       </p:sp>
       <p:pic>
         <p:nvPicPr>
-          <p:cNvPr id="36" name="shot" descr="C:\Users\rahee\AppData\Local\Temp\claude\C--Users-rahee-Desktop-AICon\b0d77b2b-594c-418c-bce0-e4f2d230c288\scratchpad\deck-read.png"/>
+          <p:cNvPr id="36" name="shot" descr="C:\Users\rahee\AppData\Local\Temp\claude\C--Users-rahee-Desktop-AICon\b0d77b2b-594c-418c-bce0-e4f2d230c288\scratchpad\deck-assets\deck-read.png">    </p:cNvPr>
           <p:cNvPicPr>
             <a:picLocks noChangeAspect="1"/>
           </p:cNvPicPr>
           <p:nvPr/>
         </p:nvPicPr>
         <p:blipFill>
-          <a:blip r:embed="rId3"/>
-          <a:srcRect/>
+          <a:blip r:embed="rId1"/>
+          <a:srcRect l="0" r="0" t="0" b="0"/>
           <a:stretch/>
         </p:blipFill>
         <p:spPr>
@@ -6197,7 +6924,7 @@
           <a:bodyPr wrap="square" lIns="0" tIns="0" rIns="0" bIns="0" rtlCol="0" anchor="ctr"/>
           <a:lstStyle/>
           <a:p>
-            <a:pPr marL="0" indent="0">
+            <a:pPr indent="0" marL="0">
               <a:buNone/>
             </a:pPr>
             <a:r>
@@ -6209,7 +6936,7 @@
                 <a:ea typeface="Calibri" pitchFamily="34" charset="-122"/>
                 <a:cs typeface="Calibri" pitchFamily="34" charset="-120"/>
               </a:rPr>
-              <a:t>Backup if the Wi-Fi fails: the same pipeline on cached sample lessons (demo mode).</a:t>
+              <a:t>Backup if the Wi-Fi fails: the same features on cached sample lessons (demo mode).</a:t>
             </a:r>
             <a:endParaRPr lang="en-US" sz="1300" dirty="0"/>
           </a:p>
@@ -6223,7 +6950,7 @@
         </p:nvSpPr>
         <p:spPr>
           <a:xfrm>
-            <a:off x="10241280" y="6400800"/>
+            <a:off x="10012680" y="6400800"/>
             <a:ext cx="100584" cy="100584"/>
           </a:xfrm>
           <a:prstGeom prst="ellipse">
@@ -6248,7 +6975,7 @@
         </p:nvSpPr>
         <p:spPr>
           <a:xfrm>
-            <a:off x="10479024" y="6400800"/>
+            <a:off x="10250424" y="6400800"/>
             <a:ext cx="100584" cy="100584"/>
           </a:xfrm>
           <a:prstGeom prst="ellipse">
@@ -6273,7 +7000,7 @@
         </p:nvSpPr>
         <p:spPr>
           <a:xfrm>
-            <a:off x="10716768" y="6400800"/>
+            <a:off x="10488168" y="6400800"/>
             <a:ext cx="100584" cy="100584"/>
           </a:xfrm>
           <a:prstGeom prst="ellipse">
@@ -6298,7 +7025,7 @@
         </p:nvSpPr>
         <p:spPr>
           <a:xfrm>
-            <a:off x="10954512" y="6400800"/>
+            <a:off x="10725912" y="6400800"/>
             <a:ext cx="155448" cy="155448"/>
           </a:xfrm>
           <a:prstGeom prst="ellipse">
@@ -6323,7 +7050,7 @@
         </p:nvSpPr>
         <p:spPr>
           <a:xfrm>
-            <a:off x="11192256" y="6400800"/>
+            <a:off x="10963656" y="6400800"/>
             <a:ext cx="100584" cy="100584"/>
           </a:xfrm>
           <a:prstGeom prst="ellipse">
@@ -6348,7 +7075,7 @@
         </p:nvSpPr>
         <p:spPr>
           <a:xfrm>
-            <a:off x="11430000" y="6400800"/>
+            <a:off x="11201400" y="6400800"/>
             <a:ext cx="100584" cy="100584"/>
           </a:xfrm>
           <a:prstGeom prst="ellipse">
@@ -6373,7 +7100,32 @@
         </p:nvSpPr>
         <p:spPr>
           <a:xfrm>
-            <a:off x="11667744" y="6400800"/>
+            <a:off x="11439144" y="6400800"/>
+            <a:ext cx="100584" cy="100584"/>
+          </a:xfrm>
+          <a:prstGeom prst="ellipse">
+            <a:avLst/>
+          </a:prstGeom>
+          <a:solidFill>
+            <a:srgbClr val="3A4A7A"/>
+          </a:solidFill>
+          <a:ln w="12700">
+            <a:solidFill>
+              <a:srgbClr val="3A4A7A"/>
+            </a:solidFill>
+            <a:prstDash val="solid"/>
+          </a:ln>
+        </p:spPr>
+      </p:sp>
+      <p:sp>
+        <p:nvSpPr>
+          <p:cNvPr id="45" name="!!dot-7"/>
+          <p:cNvSpPr/>
+          <p:nvPr/>
+        </p:nvSpPr>
+        <p:spPr>
+          <a:xfrm>
+            <a:off x="11676888" y="6400800"/>
             <a:ext cx="100584" cy="100584"/>
           </a:xfrm>
           <a:prstGeom prst="ellipse">
@@ -6418,7 +7170,6 @@
         <a:solidFill>
           <a:srgbClr val="F2F5F3"/>
         </a:solidFill>
-        <a:effectLst/>
       </p:bgPr>
     </p:bg>
     <p:spTree>
@@ -6821,11 +7572,11 @@
           <a:bodyPr wrap="square" lIns="0" tIns="0" rIns="0" bIns="0" rtlCol="0" anchor="ctr"/>
           <a:lstStyle/>
           <a:p>
-            <a:pPr marL="0" indent="0">
+            <a:pPr indent="0" marL="0">
               <a:buNone/>
             </a:pPr>
             <a:r>
-              <a:rPr lang="en-US" sz="1300" b="1" kern="0" spc="300" dirty="0">
+              <a:rPr lang="en-US" sz="1300" b="1" spc="300" kern="0" dirty="0">
                 <a:solidFill>
                   <a:srgbClr val="0B8F8F"/>
                 </a:solidFill>
@@ -6860,7 +7611,7 @@
           <a:bodyPr wrap="square" lIns="0" tIns="0" rIns="0" bIns="0" rtlCol="0" anchor="t"/>
           <a:lstStyle/>
           <a:p>
-            <a:pPr marL="0" indent="0">
+            <a:pPr indent="0" marL="0">
               <a:buNone/>
             </a:pPr>
             <a:r>
@@ -6905,14 +7656,14 @@
       </p:sp>
       <p:pic>
         <p:nvPicPr>
-          <p:cNvPr id="20" name="chk-icon-0" descr="preencoded.png"/>
+          <p:cNvPr id="20" name="chk-icon-0" descr="preencoded.png">    </p:cNvPr>
           <p:cNvPicPr>
             <a:picLocks noChangeAspect="1"/>
           </p:cNvPicPr>
           <p:nvPr/>
         </p:nvPicPr>
         <p:blipFill>
-          <a:blip r:embed="rId3"/>
+          <a:blip r:embed="rId1"/>
           <a:stretch>
             <a:fillRect/>
           </a:stretch>
@@ -6948,7 +7699,7 @@
           <a:bodyPr wrap="square" lIns="0" tIns="0" rIns="0" bIns="0" rtlCol="0" anchor="ctr"/>
           <a:lstStyle/>
           <a:p>
-            <a:pPr marL="0" indent="0">
+            <a:pPr indent="0" marL="0">
               <a:buNone/>
             </a:pPr>
             <a:r>
@@ -6987,7 +7738,7 @@
           <a:bodyPr wrap="square" lIns="0" tIns="0" rIns="0" bIns="0" rtlCol="0" anchor="t"/>
           <a:lstStyle/>
           <a:p>
-            <a:pPr marL="0" indent="0">
+            <a:pPr indent="0" marL="0">
               <a:buNone/>
             </a:pPr>
             <a:r>
@@ -7032,14 +7783,14 @@
       </p:sp>
       <p:pic>
         <p:nvPicPr>
-          <p:cNvPr id="24" name="chk-icon-1" descr="preencoded.png"/>
+          <p:cNvPr id="24" name="chk-icon-1" descr="preencoded.png">    </p:cNvPr>
           <p:cNvPicPr>
             <a:picLocks noChangeAspect="1"/>
           </p:cNvPicPr>
           <p:nvPr/>
         </p:nvPicPr>
         <p:blipFill>
-          <a:blip r:embed="rId4"/>
+          <a:blip r:embed="rId2"/>
           <a:stretch>
             <a:fillRect/>
           </a:stretch>
@@ -7075,7 +7826,7 @@
           <a:bodyPr wrap="square" lIns="0" tIns="0" rIns="0" bIns="0" rtlCol="0" anchor="ctr"/>
           <a:lstStyle/>
           <a:p>
-            <a:pPr marL="0" indent="0">
+            <a:pPr indent="0" marL="0">
               <a:buNone/>
             </a:pPr>
             <a:r>
@@ -7114,7 +7865,7 @@
           <a:bodyPr wrap="square" lIns="0" tIns="0" rIns="0" bIns="0" rtlCol="0" anchor="t"/>
           <a:lstStyle/>
           <a:p>
-            <a:pPr marL="0" indent="0">
+            <a:pPr indent="0" marL="0">
               <a:buNone/>
             </a:pPr>
             <a:r>
@@ -7159,14 +7910,14 @@
       </p:sp>
       <p:pic>
         <p:nvPicPr>
-          <p:cNvPr id="28" name="chk-icon-2" descr="preencoded.png"/>
+          <p:cNvPr id="28" name="chk-icon-2" descr="preencoded.png">    </p:cNvPr>
           <p:cNvPicPr>
             <a:picLocks noChangeAspect="1"/>
           </p:cNvPicPr>
           <p:nvPr/>
         </p:nvPicPr>
         <p:blipFill>
-          <a:blip r:embed="rId5"/>
+          <a:blip r:embed="rId3"/>
           <a:stretch>
             <a:fillRect/>
           </a:stretch>
@@ -7202,7 +7953,7 @@
           <a:bodyPr wrap="square" lIns="0" tIns="0" rIns="0" bIns="0" rtlCol="0" anchor="ctr"/>
           <a:lstStyle/>
           <a:p>
-            <a:pPr marL="0" indent="0">
+            <a:pPr indent="0" marL="0">
               <a:buNone/>
             </a:pPr>
             <a:r>
@@ -7241,7 +7992,7 @@
           <a:bodyPr wrap="square" lIns="0" tIns="0" rIns="0" bIns="0" rtlCol="0" anchor="t"/>
           <a:lstStyle/>
           <a:p>
-            <a:pPr marL="0" indent="0">
+            <a:pPr indent="0" marL="0">
               <a:buNone/>
             </a:pPr>
             <a:r>
@@ -7286,14 +8037,14 @@
       </p:sp>
       <p:pic>
         <p:nvPicPr>
-          <p:cNvPr id="32" name="chk-icon-3" descr="preencoded.png"/>
+          <p:cNvPr id="32" name="chk-icon-3" descr="preencoded.png">    </p:cNvPr>
           <p:cNvPicPr>
             <a:picLocks noChangeAspect="1"/>
           </p:cNvPicPr>
           <p:nvPr/>
         </p:nvPicPr>
         <p:blipFill>
-          <a:blip r:embed="rId6"/>
+          <a:blip r:embed="rId4"/>
           <a:stretch>
             <a:fillRect/>
           </a:stretch>
@@ -7329,7 +8080,7 @@
           <a:bodyPr wrap="square" lIns="0" tIns="0" rIns="0" bIns="0" rtlCol="0" anchor="ctr"/>
           <a:lstStyle/>
           <a:p>
-            <a:pPr marL="0" indent="0">
+            <a:pPr indent="0" marL="0">
               <a:buNone/>
             </a:pPr>
             <a:r>
@@ -7368,7 +8119,7 @@
           <a:bodyPr wrap="square" lIns="0" tIns="0" rIns="0" bIns="0" rtlCol="0" anchor="t"/>
           <a:lstStyle/>
           <a:p>
-            <a:pPr marL="0" indent="0">
+            <a:pPr indent="0" marL="0">
               <a:buNone/>
             </a:pPr>
             <a:r>
@@ -7380,7 +8131,7 @@
                 <a:ea typeface="Calibri" pitchFamily="34" charset="-122"/>
                 <a:cs typeface="Calibri" pitchFamily="34" charset="-120"/>
               </a:rPr>
-              <a:t>Only flagged sentences are rewritten. Anything left stays visibly amber.</a:t>
+              <a:t>Only flagged sentences are rewritten. Also used for lecture summaries and video notes.</a:t>
             </a:r>
             <a:endParaRPr lang="en-US" sz="1400" dirty="0"/>
           </a:p>
@@ -7407,11 +8158,11 @@
           <a:bodyPr wrap="square" lIns="0" tIns="0" rIns="0" bIns="0" rtlCol="0" anchor="ctr"/>
           <a:lstStyle/>
           <a:p>
-            <a:pPr marL="0" indent="0">
+            <a:pPr indent="0" marL="0">
               <a:buNone/>
             </a:pPr>
             <a:r>
-              <a:rPr lang="en-US" sz="1300" b="1" kern="0" spc="300" dirty="0">
+              <a:rPr lang="en-US" sz="1300" b="1" spc="300" kern="0" dirty="0">
                 <a:solidFill>
                   <a:srgbClr val="F2A40E"/>
                 </a:solidFill>
@@ -7446,7 +8197,7 @@
           <a:bodyPr wrap="square" lIns="0" tIns="0" rIns="0" bIns="0" rtlCol="0" anchor="ctr"/>
           <a:lstStyle/>
           <a:p>
-            <a:pPr marL="0" indent="0">
+            <a:pPr indent="0" marL="0">
               <a:buNone/>
             </a:pPr>
             <a:r>
@@ -7485,7 +8236,7 @@
           <a:bodyPr wrap="square" lIns="0" tIns="0" rIns="0" bIns="0" rtlCol="0" anchor="t"/>
           <a:lstStyle/>
           <a:p>
-            <a:pPr marL="0" indent="0">
+            <a:pPr indent="0" marL="0">
               <a:buNone/>
             </a:pPr>
             <a:r>
@@ -7524,7 +8275,7 @@
           <a:bodyPr wrap="square" lIns="0" tIns="0" rIns="0" bIns="0" rtlCol="0" anchor="ctr"/>
           <a:lstStyle/>
           <a:p>
-            <a:pPr marL="0" indent="0">
+            <a:pPr indent="0" marL="0">
               <a:buNone/>
             </a:pPr>
             <a:r>
@@ -7563,7 +8314,7 @@
           <a:bodyPr wrap="square" lIns="0" tIns="0" rIns="0" bIns="0" rtlCol="0" anchor="ctr"/>
           <a:lstStyle/>
           <a:p>
-            <a:pPr marL="0" indent="0">
+            <a:pPr indent="0" marL="0">
               <a:buNone/>
             </a:pPr>
             <a:r>
@@ -7589,7 +8340,7 @@
         </p:nvSpPr>
         <p:spPr>
           <a:xfrm>
-            <a:off x="10241280" y="6400800"/>
+            <a:off x="10012680" y="6400800"/>
             <a:ext cx="100584" cy="100584"/>
           </a:xfrm>
           <a:prstGeom prst="ellipse">
@@ -7614,7 +8365,7 @@
         </p:nvSpPr>
         <p:spPr>
           <a:xfrm>
-            <a:off x="10479024" y="6400800"/>
+            <a:off x="10250424" y="6400800"/>
             <a:ext cx="100584" cy="100584"/>
           </a:xfrm>
           <a:prstGeom prst="ellipse">
@@ -7639,7 +8390,7 @@
         </p:nvSpPr>
         <p:spPr>
           <a:xfrm>
-            <a:off x="10716768" y="6400800"/>
+            <a:off x="10488168" y="6400800"/>
             <a:ext cx="100584" cy="100584"/>
           </a:xfrm>
           <a:prstGeom prst="ellipse">
@@ -7664,7 +8415,7 @@
         </p:nvSpPr>
         <p:spPr>
           <a:xfrm>
-            <a:off x="10954512" y="6400800"/>
+            <a:off x="10725912" y="6400800"/>
             <a:ext cx="100584" cy="100584"/>
           </a:xfrm>
           <a:prstGeom prst="ellipse">
@@ -7689,7 +8440,7 @@
         </p:nvSpPr>
         <p:spPr>
           <a:xfrm>
-            <a:off x="11192256" y="6400800"/>
+            <a:off x="10963656" y="6400800"/>
             <a:ext cx="155448" cy="155448"/>
           </a:xfrm>
           <a:prstGeom prst="ellipse">
@@ -7714,7 +8465,7 @@
         </p:nvSpPr>
         <p:spPr>
           <a:xfrm>
-            <a:off x="11430000" y="6400800"/>
+            <a:off x="11201400" y="6400800"/>
             <a:ext cx="100584" cy="100584"/>
           </a:xfrm>
           <a:prstGeom prst="ellipse">
@@ -7739,7 +8490,32 @@
         </p:nvSpPr>
         <p:spPr>
           <a:xfrm>
-            <a:off x="11667744" y="6400800"/>
+            <a:off x="11439144" y="6400800"/>
+            <a:ext cx="100584" cy="100584"/>
+          </a:xfrm>
+          <a:prstGeom prst="ellipse">
+            <a:avLst/>
+          </a:prstGeom>
+          <a:solidFill>
+            <a:srgbClr val="C3CDDD"/>
+          </a:solidFill>
+          <a:ln w="12700">
+            <a:solidFill>
+              <a:srgbClr val="C3CDDD"/>
+            </a:solidFill>
+            <a:prstDash val="solid"/>
+          </a:ln>
+        </p:spPr>
+      </p:sp>
+      <p:sp>
+        <p:nvSpPr>
+          <p:cNvPr id="47" name="!!dot-7"/>
+          <p:cNvSpPr/>
+          <p:nvPr/>
+        </p:nvSpPr>
+        <p:spPr>
+          <a:xfrm>
+            <a:off x="11676888" y="6400800"/>
             <a:ext cx="100584" cy="100584"/>
           </a:xfrm>
           <a:prstGeom prst="ellipse">
@@ -7784,7 +8560,6 @@
         <a:solidFill>
           <a:srgbClr val="F2F5F3"/>
         </a:solidFill>
-        <a:effectLst/>
       </p:bgPr>
     </p:bg>
     <p:spTree>
@@ -7803,13 +8578,40 @@
       </p:grpSpPr>
       <p:sp>
         <p:nvSpPr>
-          <p:cNvPr id="2" name="!!ray-0"/>
-          <p:cNvSpPr/>
-          <p:nvPr/>
-        </p:nvSpPr>
-        <p:spPr>
-          <a:xfrm>
-            <a:off x="11663172" y="868680"/>
+          <p:cNvPr id="2" name="!!panel"/>
+          <p:cNvSpPr/>
+          <p:nvPr/>
+        </p:nvSpPr>
+        <p:spPr>
+          <a:xfrm>
+            <a:off x="6172200" y="411480"/>
+            <a:ext cx="5623560" cy="5760720"/>
+          </a:xfrm>
+          <a:prstGeom prst="roundRect">
+            <a:avLst>
+              <a:gd name="adj" fmla="val 4878"/>
+            </a:avLst>
+          </a:prstGeom>
+          <a:solidFill>
+            <a:srgbClr val="1C3EA6"/>
+          </a:solidFill>
+          <a:ln w="12700">
+            <a:solidFill>
+              <a:srgbClr val="1C3EA6"/>
+            </a:solidFill>
+            <a:prstDash val="solid"/>
+          </a:ln>
+        </p:spPr>
+      </p:sp>
+      <p:sp>
+        <p:nvSpPr>
+          <p:cNvPr id="3" name="!!ray-0"/>
+          <p:cNvSpPr/>
+          <p:nvPr/>
+        </p:nvSpPr>
+        <p:spPr>
+          <a:xfrm>
+            <a:off x="11526012" y="960120"/>
             <a:ext cx="192024" cy="914"/>
           </a:xfrm>
           <a:prstGeom prst="line">
@@ -7826,13 +8628,13 @@
       </p:sp>
       <p:sp>
         <p:nvSpPr>
-          <p:cNvPr id="3" name="!!ray-1"/>
-          <p:cNvSpPr/>
-          <p:nvPr/>
-        </p:nvSpPr>
-        <p:spPr>
-          <a:xfrm>
-            <a:off x="11613557" y="1053846"/>
+          <p:cNvPr id="4" name="!!ray-1"/>
+          <p:cNvSpPr/>
+          <p:nvPr/>
+        </p:nvSpPr>
+        <p:spPr>
+          <a:xfrm>
+            <a:off x="11476397" y="1145286"/>
             <a:ext cx="166298" cy="96012"/>
           </a:xfrm>
           <a:prstGeom prst="line">
@@ -7851,13 +8653,13 @@
       </p:sp>
       <p:sp>
         <p:nvSpPr>
-          <p:cNvPr id="4" name="!!ray-2"/>
-          <p:cNvSpPr/>
-          <p:nvPr/>
-        </p:nvSpPr>
-        <p:spPr>
-          <a:xfrm>
-            <a:off x="11478006" y="1189397"/>
+          <p:cNvPr id="5" name="!!ray-2"/>
+          <p:cNvSpPr/>
+          <p:nvPr/>
+        </p:nvSpPr>
+        <p:spPr>
+          <a:xfrm>
+            <a:off x="11340846" y="1280837"/>
             <a:ext cx="96012" cy="166298"/>
           </a:xfrm>
           <a:prstGeom prst="line">
@@ -7874,13 +8676,13 @@
       </p:sp>
       <p:sp>
         <p:nvSpPr>
-          <p:cNvPr id="5" name="!!ray-3"/>
-          <p:cNvSpPr/>
-          <p:nvPr/>
-        </p:nvSpPr>
-        <p:spPr>
-          <a:xfrm>
-            <a:off x="11292840" y="1239012"/>
+          <p:cNvPr id="6" name="!!ray-3"/>
+          <p:cNvSpPr/>
+          <p:nvPr/>
+        </p:nvSpPr>
+        <p:spPr>
+          <a:xfrm>
+            <a:off x="11155680" y="1330452"/>
             <a:ext cx="914" cy="192024"/>
           </a:xfrm>
           <a:prstGeom prst="line">
@@ -7899,13 +8701,13 @@
       </p:sp>
       <p:sp>
         <p:nvSpPr>
-          <p:cNvPr id="6" name="!!ray-4"/>
+          <p:cNvPr id="7" name="!!ray-4"/>
           <p:cNvSpPr/>
           <p:nvPr/>
         </p:nvSpPr>
         <p:spPr>
           <a:xfrm flipH="1">
-            <a:off x="11011662" y="1189397"/>
+            <a:off x="10874502" y="1280837"/>
             <a:ext cx="96012" cy="166298"/>
           </a:xfrm>
           <a:prstGeom prst="line">
@@ -7922,13 +8724,13 @@
       </p:sp>
       <p:sp>
         <p:nvSpPr>
-          <p:cNvPr id="7" name="!!ray-5"/>
+          <p:cNvPr id="8" name="!!ray-5"/>
           <p:cNvSpPr/>
           <p:nvPr/>
         </p:nvSpPr>
         <p:spPr>
           <a:xfrm flipH="1">
-            <a:off x="10805825" y="1053846"/>
+            <a:off x="10668665" y="1145286"/>
             <a:ext cx="166298" cy="96012"/>
           </a:xfrm>
           <a:prstGeom prst="line">
@@ -7947,13 +8749,13 @@
       </p:sp>
       <p:sp>
         <p:nvSpPr>
-          <p:cNvPr id="8" name="!!ray-6"/>
+          <p:cNvPr id="9" name="!!ray-6"/>
           <p:cNvSpPr/>
           <p:nvPr/>
         </p:nvSpPr>
         <p:spPr>
           <a:xfrm flipH="1">
-            <a:off x="10730484" y="868680"/>
+            <a:off x="10593324" y="960120"/>
             <a:ext cx="192024" cy="914"/>
           </a:xfrm>
           <a:prstGeom prst="line">
@@ -7970,13 +8772,13 @@
       </p:sp>
       <p:sp>
         <p:nvSpPr>
-          <p:cNvPr id="9" name="!!ray-7"/>
+          <p:cNvPr id="10" name="!!ray-7"/>
           <p:cNvSpPr/>
           <p:nvPr/>
         </p:nvSpPr>
         <p:spPr>
           <a:xfrm flipH="1" flipV="1">
-            <a:off x="10805825" y="587502"/>
+            <a:off x="10668665" y="678942"/>
             <a:ext cx="166298" cy="96012"/>
           </a:xfrm>
           <a:prstGeom prst="line">
@@ -7995,13 +8797,13 @@
       </p:sp>
       <p:sp>
         <p:nvSpPr>
-          <p:cNvPr id="10" name="!!ray-8"/>
+          <p:cNvPr id="11" name="!!ray-8"/>
           <p:cNvSpPr/>
           <p:nvPr/>
         </p:nvSpPr>
         <p:spPr>
           <a:xfrm flipH="1" flipV="1">
-            <a:off x="11011662" y="381665"/>
+            <a:off x="10874502" y="473105"/>
             <a:ext cx="96012" cy="166298"/>
           </a:xfrm>
           <a:prstGeom prst="line">
@@ -8018,13 +8820,13 @@
       </p:sp>
       <p:sp>
         <p:nvSpPr>
-          <p:cNvPr id="11" name="!!ray-9"/>
+          <p:cNvPr id="12" name="!!ray-9"/>
           <p:cNvSpPr/>
           <p:nvPr/>
         </p:nvSpPr>
         <p:spPr>
           <a:xfrm flipH="1" flipV="1">
-            <a:off x="11292840" y="306324"/>
+            <a:off x="11155680" y="397764"/>
             <a:ext cx="914" cy="192024"/>
           </a:xfrm>
           <a:prstGeom prst="line">
@@ -8043,13 +8845,13 @@
       </p:sp>
       <p:sp>
         <p:nvSpPr>
-          <p:cNvPr id="12" name="!!ray-10"/>
+          <p:cNvPr id="13" name="!!ray-10"/>
           <p:cNvSpPr/>
           <p:nvPr/>
         </p:nvSpPr>
         <p:spPr>
           <a:xfrm flipV="1">
-            <a:off x="11478006" y="381665"/>
+            <a:off x="11340846" y="473105"/>
             <a:ext cx="96012" cy="166298"/>
           </a:xfrm>
           <a:prstGeom prst="line">
@@ -8066,13 +8868,13 @@
       </p:sp>
       <p:sp>
         <p:nvSpPr>
-          <p:cNvPr id="13" name="!!ray-11"/>
+          <p:cNvPr id="14" name="!!ray-11"/>
           <p:cNvSpPr/>
           <p:nvPr/>
         </p:nvSpPr>
         <p:spPr>
           <a:xfrm flipV="1">
-            <a:off x="11613557" y="587502"/>
+            <a:off x="11476397" y="678942"/>
             <a:ext cx="166298" cy="96012"/>
           </a:xfrm>
           <a:prstGeom prst="line">
@@ -8091,13 +8893,13 @@
       </p:sp>
       <p:sp>
         <p:nvSpPr>
-          <p:cNvPr id="14" name="!!ring"/>
-          <p:cNvSpPr/>
-          <p:nvPr/>
-        </p:nvSpPr>
-        <p:spPr>
-          <a:xfrm>
-            <a:off x="11018520" y="594360"/>
+          <p:cNvPr id="15" name="!!ring"/>
+          <p:cNvSpPr/>
+          <p:nvPr/>
+        </p:nvSpPr>
+        <p:spPr>
+          <a:xfrm>
+            <a:off x="10881360" y="685800"/>
             <a:ext cx="548640" cy="548640"/>
           </a:xfrm>
           <a:prstGeom prst="ellipse">
@@ -8116,13 +8918,13 @@
       </p:sp>
       <p:sp>
         <p:nvSpPr>
-          <p:cNvPr id="15" name="!!flame"/>
-          <p:cNvSpPr/>
-          <p:nvPr/>
-        </p:nvSpPr>
-        <p:spPr>
-          <a:xfrm>
-            <a:off x="11177626" y="753466"/>
+          <p:cNvPr id="16" name="!!flame"/>
+          <p:cNvSpPr/>
+          <p:nvPr/>
+        </p:nvSpPr>
+        <p:spPr>
+          <a:xfrm>
+            <a:off x="11040466" y="844906"/>
             <a:ext cx="230429" cy="230429"/>
           </a:xfrm>
           <a:prstGeom prst="ellipse">
@@ -8141,14 +8943,14 @@
       </p:sp>
       <p:sp>
         <p:nvSpPr>
-          <p:cNvPr id="16" name="!!kicker"/>
+          <p:cNvPr id="17" name="!!kicker"/>
           <p:cNvSpPr txBox="1"/>
           <p:nvPr/>
         </p:nvSpPr>
         <p:spPr>
           <a:xfrm>
             <a:off x="731520" y="548640"/>
-            <a:ext cx="6400800" cy="320040"/>
+            <a:ext cx="5303520" cy="320040"/>
           </a:xfrm>
           <a:prstGeom prst="rect">
             <a:avLst/>
@@ -8160,11 +8962,11 @@
           <a:bodyPr wrap="square" lIns="0" tIns="0" rIns="0" bIns="0" rtlCol="0" anchor="ctr"/>
           <a:lstStyle/>
           <a:p>
-            <a:pPr marL="0" indent="0">
+            <a:pPr indent="0" marL="0">
               <a:buNone/>
             </a:pPr>
             <a:r>
-              <a:rPr lang="en-US" sz="1300" b="1" kern="0" spc="300" dirty="0">
+              <a:rPr lang="en-US" sz="1300" b="1" spc="300" kern="0" dirty="0">
                 <a:solidFill>
                   <a:srgbClr val="0B8F8F"/>
                 </a:solidFill>
@@ -8172,7 +8974,7 @@
                 <a:ea typeface="Calibri" pitchFamily="34" charset="-122"/>
                 <a:cs typeface="Calibri" pitchFamily="34" charset="-120"/>
               </a:rPr>
-              <a:t>05 · MEASURED, NOT CLAIMED</a:t>
+              <a:t>05 · PERSONALIZED LEARNING</a:t>
             </a:r>
             <a:endParaRPr lang="en-US" sz="1300" dirty="0"/>
           </a:p>
@@ -8180,14 +8982,14 @@
       </p:sp>
       <p:sp>
         <p:nvSpPr>
-          <p:cNvPr id="17" name="!!title"/>
+          <p:cNvPr id="18" name="!!title"/>
           <p:cNvSpPr txBox="1"/>
           <p:nvPr/>
         </p:nvSpPr>
         <p:spPr>
           <a:xfrm>
             <a:off x="731520" y="896112"/>
-            <a:ext cx="9144000" cy="822960"/>
+            <a:ext cx="5212080" cy="1097280"/>
           </a:xfrm>
           <a:prstGeom prst="rect">
             <a:avLst/>
@@ -8199,11 +9001,11 @@
           <a:bodyPr wrap="square" lIns="0" tIns="0" rIns="0" bIns="0" rtlCol="0" anchor="t"/>
           <a:lstStyle/>
           <a:p>
-            <a:pPr marL="0" indent="0">
+            <a:pPr indent="0" marL="0">
               <a:buNone/>
             </a:pPr>
             <a:r>
-              <a:rPr lang="en-US" sz="3000" b="1" dirty="0">
+              <a:rPr lang="en-US" sz="2800" b="1" dirty="0">
                 <a:solidFill>
                   <a:srgbClr val="0D1B3E"/>
                 </a:solidFill>
@@ -8211,49 +9013,71 @@
                 <a:ea typeface="Century Gothic" pitchFamily="34" charset="-122"/>
                 <a:cs typeface="Century Gothic" pitchFamily="34" charset="-120"/>
               </a:rPr>
-              <a:t>Real textbook pages, real numbers</a:t>
+              <a:t>Set up for each learner, and it says why</a:t>
             </a:r>
-            <a:endParaRPr lang="en-US" sz="3000" dirty="0"/>
-          </a:p>
-        </p:txBody>
-      </p:sp>
-      <p:sp>
-        <p:nvSpPr>
-          <p:cNvPr id="18" name="!!panel"/>
-          <p:cNvSpPr/>
-          <p:nvPr/>
-        </p:nvSpPr>
-        <p:spPr>
-          <a:xfrm>
-            <a:off x="731520" y="1965960"/>
-            <a:ext cx="3520440" cy="2011680"/>
-          </a:xfrm>
-          <a:prstGeom prst="roundRect">
-            <a:avLst>
-              <a:gd name="adj" fmla="val 9091"/>
-            </a:avLst>
-          </a:prstGeom>
-          <a:solidFill>
-            <a:srgbClr val="1C3EA6"/>
-          </a:solidFill>
-          <a:ln w="12700">
-            <a:solidFill>
-              <a:srgbClr val="1C3EA6"/>
-            </a:solidFill>
-            <a:prstDash val="solid"/>
-          </a:ln>
-        </p:spPr>
-      </p:sp>
-      <p:sp>
-        <p:nvSpPr>
-          <p:cNvPr id="19" name="!!stat-a"/>
+            <a:endParaRPr lang="en-US" sz="2800" dirty="0"/>
+          </a:p>
+        </p:txBody>
+      </p:sp>
+      <p:sp>
+        <p:nvSpPr>
+          <p:cNvPr id="19" name="pers-dot-0"/>
+          <p:cNvSpPr/>
+          <p:nvPr/>
+        </p:nvSpPr>
+        <p:spPr>
+          <a:xfrm>
+            <a:off x="731520" y="2240280"/>
+            <a:ext cx="640080" cy="640080"/>
+          </a:xfrm>
+          <a:prstGeom prst="ellipse">
+            <a:avLst/>
+          </a:prstGeom>
+          <a:solidFill>
+            <a:srgbClr val="E7EEF9"/>
+          </a:solidFill>
+          <a:ln w="12700">
+            <a:solidFill>
+              <a:srgbClr val="E7EEF9"/>
+            </a:solidFill>
+            <a:prstDash val="solid"/>
+          </a:ln>
+        </p:spPr>
+      </p:sp>
+      <p:pic>
+        <p:nvPicPr>
+          <p:cNvPr id="20" name="pers-icon-0" descr="preencoded.png">    </p:cNvPr>
+          <p:cNvPicPr>
+            <a:picLocks noChangeAspect="1"/>
+          </p:cNvPicPr>
+          <p:nvPr/>
+        </p:nvPicPr>
+        <p:blipFill>
+          <a:blip r:embed="rId1"/>
+          <a:stretch>
+            <a:fillRect/>
+          </a:stretch>
+        </p:blipFill>
+        <p:spPr>
+          <a:xfrm>
+            <a:off x="886968" y="2395728"/>
+            <a:ext cx="329184" cy="329184"/>
+          </a:xfrm>
+          <a:prstGeom prst="rect">
+            <a:avLst/>
+          </a:prstGeom>
+        </p:spPr>
+      </p:pic>
+      <p:sp>
+        <p:nvSpPr>
+          <p:cNvPr id="21" name="pers-t-0"/>
           <p:cNvSpPr txBox="1"/>
           <p:nvPr/>
         </p:nvSpPr>
         <p:spPr>
           <a:xfrm>
-            <a:off x="1005840" y="2167128"/>
-            <a:ext cx="3017520" cy="868680"/>
+            <a:off x="1554480" y="2221992"/>
+            <a:ext cx="4480560" cy="365760"/>
           </a:xfrm>
           <a:prstGeom prst="rect">
             <a:avLst/>
@@ -8265,34 +9089,34 @@
           <a:bodyPr wrap="square" lIns="0" tIns="0" rIns="0" bIns="0" rtlCol="0" anchor="ctr"/>
           <a:lstStyle/>
           <a:p>
-            <a:pPr marL="0" indent="0">
+            <a:pPr indent="0" marL="0">
               <a:buNone/>
             </a:pPr>
             <a:r>
-              <a:rPr lang="en-US" sz="4400" b="1" dirty="0">
+              <a:rPr lang="en-US" sz="1700" b="1" dirty="0">
                 <a:solidFill>
-                  <a:srgbClr val="FFFFFF"/>
+                  <a:srgbClr val="0D1B3E"/>
                 </a:solidFill>
                 <a:latin typeface="Century Gothic" pitchFamily="34" charset="0"/>
                 <a:ea typeface="Century Gothic" pitchFamily="34" charset="-122"/>
                 <a:cs typeface="Century Gothic" pitchFamily="34" charset="-120"/>
               </a:rPr>
-              <a:t>28/28</a:t>
+              <a:t>Two questions, no account</a:t>
             </a:r>
-            <a:endParaRPr lang="en-US" sz="4400" dirty="0"/>
-          </a:p>
-        </p:txBody>
-      </p:sp>
-      <p:sp>
-        <p:nvSpPr>
-          <p:cNvPr id="20" name="!!stat-a-label"/>
+            <a:endParaRPr lang="en-US" sz="1700" dirty="0"/>
+          </a:p>
+        </p:txBody>
+      </p:sp>
+      <p:sp>
+        <p:nvSpPr>
+          <p:cNvPr id="22" name="pers-d-0"/>
           <p:cNvSpPr txBox="1"/>
           <p:nvPr/>
         </p:nvSpPr>
         <p:spPr>
           <a:xfrm>
-            <a:off x="1005840" y="3108960"/>
-            <a:ext cx="3017520" cy="685800"/>
+            <a:off x="1554480" y="2587752"/>
+            <a:ext cx="4480560" cy="502920"/>
           </a:xfrm>
           <a:prstGeom prst="rect">
             <a:avLst/>
@@ -8304,11 +9128,520 @@
           <a:bodyPr wrap="square" lIns="0" tIns="0" rIns="0" bIns="0" rtlCol="0" anchor="t"/>
           <a:lstStyle/>
           <a:p>
-            <a:pPr marL="0" indent="0">
+            <a:pPr indent="0" marL="0">
               <a:buNone/>
             </a:pPr>
             <a:r>
-              <a:rPr lang="en-US" sz="1500" dirty="0">
+              <a:rPr lang="en-US" sz="1350" dirty="0">
+                <a:solidFill>
+                  <a:srgbClr val="4A5875"/>
+                </a:solidFill>
+                <a:latin typeface="Calibri" pitchFamily="34" charset="0"/>
+                <a:ea typeface="Calibri" pitchFamily="34" charset="-122"/>
+                <a:cs typeface="Calibri" pitchFamily="34" charset="-120"/>
+              </a:rPr>
+              <a:t>Which language helps, and what helps you learn. No name, no gender.</a:t>
+            </a:r>
+            <a:endParaRPr lang="en-US" sz="1350" dirty="0"/>
+          </a:p>
+        </p:txBody>
+      </p:sp>
+      <p:sp>
+        <p:nvSpPr>
+          <p:cNvPr id="23" name="pers-dot-1"/>
+          <p:cNvSpPr/>
+          <p:nvPr/>
+        </p:nvSpPr>
+        <p:spPr>
+          <a:xfrm>
+            <a:off x="731520" y="3246120"/>
+            <a:ext cx="640080" cy="640080"/>
+          </a:xfrm>
+          <a:prstGeom prst="ellipse">
+            <a:avLst/>
+          </a:prstGeom>
+          <a:solidFill>
+            <a:srgbClr val="E7EEF9"/>
+          </a:solidFill>
+          <a:ln w="12700">
+            <a:solidFill>
+              <a:srgbClr val="E7EEF9"/>
+            </a:solidFill>
+            <a:prstDash val="solid"/>
+          </a:ln>
+        </p:spPr>
+      </p:sp>
+      <p:pic>
+        <p:nvPicPr>
+          <p:cNvPr id="24" name="pers-icon-1" descr="preencoded.png">    </p:cNvPr>
+          <p:cNvPicPr>
+            <a:picLocks noChangeAspect="1"/>
+          </p:cNvPicPr>
+          <p:nvPr/>
+        </p:nvPicPr>
+        <p:blipFill>
+          <a:blip r:embed="rId2"/>
+          <a:stretch>
+            <a:fillRect/>
+          </a:stretch>
+        </p:blipFill>
+        <p:spPr>
+          <a:xfrm>
+            <a:off x="886968" y="3401568"/>
+            <a:ext cx="329184" cy="329184"/>
+          </a:xfrm>
+          <a:prstGeom prst="rect">
+            <a:avLst/>
+          </a:prstGeom>
+        </p:spPr>
+      </p:pic>
+      <p:sp>
+        <p:nvSpPr>
+          <p:cNvPr id="25" name="pers-t-1"/>
+          <p:cNvSpPr txBox="1"/>
+          <p:nvPr/>
+        </p:nvSpPr>
+        <p:spPr>
+          <a:xfrm>
+            <a:off x="1554480" y="3227832"/>
+            <a:ext cx="4480560" cy="365760"/>
+          </a:xfrm>
+          <a:prstGeom prst="rect">
+            <a:avLst/>
+          </a:prstGeom>
+          <a:noFill/>
+          <a:ln/>
+        </p:spPr>
+        <p:txBody>
+          <a:bodyPr wrap="square" lIns="0" tIns="0" rIns="0" bIns="0" rtlCol="0" anchor="ctr"/>
+          <a:lstStyle/>
+          <a:p>
+            <a:pPr indent="0" marL="0">
+              <a:buNone/>
+            </a:pPr>
+            <a:r>
+              <a:rPr lang="en-US" sz="1700" b="1" dirty="0">
+                <a:solidFill>
+                  <a:srgbClr val="0D1B3E"/>
+                </a:solidFill>
+                <a:latin typeface="Century Gothic" pitchFamily="34" charset="0"/>
+                <a:ea typeface="Century Gothic" pitchFamily="34" charset="-122"/>
+                <a:cs typeface="Century Gothic" pitchFamily="34" charset="-120"/>
+              </a:rPr>
+              <a:t>Opens your way, and says why</a:t>
+            </a:r>
+            <a:endParaRPr lang="en-US" sz="1700" dirty="0"/>
+          </a:p>
+        </p:txBody>
+      </p:sp>
+      <p:sp>
+        <p:nvSpPr>
+          <p:cNvPr id="26" name="pers-d-1"/>
+          <p:cNvSpPr txBox="1"/>
+          <p:nvPr/>
+        </p:nvSpPr>
+        <p:spPr>
+          <a:xfrm>
+            <a:off x="1554480" y="3593592"/>
+            <a:ext cx="4480560" cy="502920"/>
+          </a:xfrm>
+          <a:prstGeom prst="rect">
+            <a:avLst/>
+          </a:prstGeom>
+          <a:noFill/>
+          <a:ln/>
+        </p:spPr>
+        <p:txBody>
+          <a:bodyPr wrap="square" lIns="0" tIns="0" rIns="0" bIns="0" rtlCol="0" anchor="t"/>
+          <a:lstStyle/>
+          <a:p>
+            <a:pPr indent="0" marL="0">
+              <a:buNone/>
+            </a:pPr>
+            <a:r>
+              <a:rPr lang="en-US" sz="1350" dirty="0">
+                <a:solidFill>
+                  <a:srgbClr val="4A5875"/>
+                </a:solidFill>
+                <a:latin typeface="Calibri" pitchFamily="34" charset="0"/>
+                <a:ea typeface="Calibri" pitchFamily="34" charset="-122"/>
+                <a:cs typeface="Calibri" pitchFamily="34" charset="-120"/>
+              </a:rPr>
+              <a:t>“Opened at Simplest because your last quiz here was 4 of 10.”</a:t>
+            </a:r>
+            <a:endParaRPr lang="en-US" sz="1350" dirty="0"/>
+          </a:p>
+        </p:txBody>
+      </p:sp>
+      <p:sp>
+        <p:nvSpPr>
+          <p:cNvPr id="27" name="pers-dot-2"/>
+          <p:cNvSpPr/>
+          <p:nvPr/>
+        </p:nvSpPr>
+        <p:spPr>
+          <a:xfrm>
+            <a:off x="731520" y="4251960"/>
+            <a:ext cx="640080" cy="640080"/>
+          </a:xfrm>
+          <a:prstGeom prst="ellipse">
+            <a:avLst/>
+          </a:prstGeom>
+          <a:solidFill>
+            <a:srgbClr val="E7EEF9"/>
+          </a:solidFill>
+          <a:ln w="12700">
+            <a:solidFill>
+              <a:srgbClr val="E7EEF9"/>
+            </a:solidFill>
+            <a:prstDash val="solid"/>
+          </a:ln>
+        </p:spPr>
+      </p:sp>
+      <p:pic>
+        <p:nvPicPr>
+          <p:cNvPr id="28" name="pers-icon-2" descr="preencoded.png">    </p:cNvPr>
+          <p:cNvPicPr>
+            <a:picLocks noChangeAspect="1"/>
+          </p:cNvPicPr>
+          <p:nvPr/>
+        </p:nvPicPr>
+        <p:blipFill>
+          <a:blip r:embed="rId3"/>
+          <a:stretch>
+            <a:fillRect/>
+          </a:stretch>
+        </p:blipFill>
+        <p:spPr>
+          <a:xfrm>
+            <a:off x="886968" y="4407408"/>
+            <a:ext cx="329184" cy="329184"/>
+          </a:xfrm>
+          <a:prstGeom prst="rect">
+            <a:avLst/>
+          </a:prstGeom>
+        </p:spPr>
+      </p:pic>
+      <p:sp>
+        <p:nvSpPr>
+          <p:cNvPr id="29" name="pers-t-2"/>
+          <p:cNvSpPr txBox="1"/>
+          <p:nvPr/>
+        </p:nvSpPr>
+        <p:spPr>
+          <a:xfrm>
+            <a:off x="1554480" y="4233672"/>
+            <a:ext cx="4480560" cy="365760"/>
+          </a:xfrm>
+          <a:prstGeom prst="rect">
+            <a:avLst/>
+          </a:prstGeom>
+          <a:noFill/>
+          <a:ln/>
+        </p:spPr>
+        <p:txBody>
+          <a:bodyPr wrap="square" lIns="0" tIns="0" rIns="0" bIns="0" rtlCol="0" anchor="ctr"/>
+          <a:lstStyle/>
+          <a:p>
+            <a:pPr indent="0" marL="0">
+              <a:buNone/>
+            </a:pPr>
+            <a:r>
+              <a:rPr lang="en-US" sz="1700" b="1" dirty="0">
+                <a:solidFill>
+                  <a:srgbClr val="0D1B3E"/>
+                </a:solidFill>
+                <a:latin typeface="Century Gothic" pitchFamily="34" charset="0"/>
+                <a:ea typeface="Century Gothic" pitchFamily="34" charset="-122"/>
+                <a:cs typeface="Century Gothic" pitchFamily="34" charset="-120"/>
+              </a:rPr>
+              <a:t>Weak areas → a study plan</a:t>
+            </a:r>
+            <a:endParaRPr lang="en-US" sz="1700" dirty="0"/>
+          </a:p>
+        </p:txBody>
+      </p:sp>
+      <p:sp>
+        <p:nvSpPr>
+          <p:cNvPr id="30" name="pers-d-2"/>
+          <p:cNvSpPr txBox="1"/>
+          <p:nvPr/>
+        </p:nvSpPr>
+        <p:spPr>
+          <a:xfrm>
+            <a:off x="1554480" y="4599432"/>
+            <a:ext cx="4480560" cy="502920"/>
+          </a:xfrm>
+          <a:prstGeom prst="rect">
+            <a:avLst/>
+          </a:prstGeom>
+          <a:noFill/>
+          <a:ln/>
+        </p:spPr>
+        <p:txBody>
+          <a:bodyPr wrap="square" lIns="0" tIns="0" rIns="0" bIns="0" rtlCol="0" anchor="t"/>
+          <a:lstStyle/>
+          <a:p>
+            <a:pPr indent="0" marL="0">
+              <a:buNone/>
+            </a:pPr>
+            <a:r>
+              <a:rPr lang="en-US" sz="1350" dirty="0">
+                <a:solidFill>
+                  <a:srgbClr val="4A5875"/>
+                </a:solidFill>
+                <a:latin typeface="Calibri" pitchFamily="34" charset="0"/>
+                <a:ea typeface="Calibri" pitchFamily="34" charset="-122"/>
+                <a:cs typeface="Calibri" pitchFamily="34" charset="-120"/>
+              </a:rPr>
+              <a:t>Each step opens the exact section, hard word or video minute.</a:t>
+            </a:r>
+            <a:endParaRPr lang="en-US" sz="1350" dirty="0"/>
+          </a:p>
+        </p:txBody>
+      </p:sp>
+      <p:sp>
+        <p:nvSpPr>
+          <p:cNvPr id="31" name="pers-dot-3"/>
+          <p:cNvSpPr/>
+          <p:nvPr/>
+        </p:nvSpPr>
+        <p:spPr>
+          <a:xfrm>
+            <a:off x="731520" y="5257800"/>
+            <a:ext cx="640080" cy="640080"/>
+          </a:xfrm>
+          <a:prstGeom prst="ellipse">
+            <a:avLst/>
+          </a:prstGeom>
+          <a:solidFill>
+            <a:srgbClr val="E7EEF9"/>
+          </a:solidFill>
+          <a:ln w="12700">
+            <a:solidFill>
+              <a:srgbClr val="E7EEF9"/>
+            </a:solidFill>
+            <a:prstDash val="solid"/>
+          </a:ln>
+        </p:spPr>
+      </p:sp>
+      <p:pic>
+        <p:nvPicPr>
+          <p:cNvPr id="32" name="pers-icon-3" descr="preencoded.png">    </p:cNvPr>
+          <p:cNvPicPr>
+            <a:picLocks noChangeAspect="1"/>
+          </p:cNvPicPr>
+          <p:nvPr/>
+        </p:nvPicPr>
+        <p:blipFill>
+          <a:blip r:embed="rId4"/>
+          <a:stretch>
+            <a:fillRect/>
+          </a:stretch>
+        </p:blipFill>
+        <p:spPr>
+          <a:xfrm>
+            <a:off x="886968" y="5413248"/>
+            <a:ext cx="329184" cy="329184"/>
+          </a:xfrm>
+          <a:prstGeom prst="rect">
+            <a:avLst/>
+          </a:prstGeom>
+        </p:spPr>
+      </p:pic>
+      <p:sp>
+        <p:nvSpPr>
+          <p:cNvPr id="33" name="pers-t-3"/>
+          <p:cNvSpPr txBox="1"/>
+          <p:nvPr/>
+        </p:nvSpPr>
+        <p:spPr>
+          <a:xfrm>
+            <a:off x="1554480" y="5239512"/>
+            <a:ext cx="4480560" cy="365760"/>
+          </a:xfrm>
+          <a:prstGeom prst="rect">
+            <a:avLst/>
+          </a:prstGeom>
+          <a:noFill/>
+          <a:ln/>
+        </p:spPr>
+        <p:txBody>
+          <a:bodyPr wrap="square" lIns="0" tIns="0" rIns="0" bIns="0" rtlCol="0" anchor="ctr"/>
+          <a:lstStyle/>
+          <a:p>
+            <a:pPr indent="0" marL="0">
+              <a:buNone/>
+            </a:pPr>
+            <a:r>
+              <a:rPr lang="en-US" sz="1700" b="1" dirty="0">
+                <a:solidFill>
+                  <a:srgbClr val="0D1B3E"/>
+                </a:solidFill>
+                <a:latin typeface="Century Gothic" pitchFamily="34" charset="0"/>
+                <a:ea typeface="Century Gothic" pitchFamily="34" charset="-122"/>
+                <a:cs typeface="Century Gothic" pitchFamily="34" charset="-120"/>
+              </a:rPr>
+              <a:t>Private by design</a:t>
+            </a:r>
+            <a:endParaRPr lang="en-US" sz="1700" dirty="0"/>
+          </a:p>
+        </p:txBody>
+      </p:sp>
+      <p:sp>
+        <p:nvSpPr>
+          <p:cNvPr id="34" name="pers-d-3"/>
+          <p:cNvSpPr txBox="1"/>
+          <p:nvPr/>
+        </p:nvSpPr>
+        <p:spPr>
+          <a:xfrm>
+            <a:off x="1554480" y="5605272"/>
+            <a:ext cx="4480560" cy="502920"/>
+          </a:xfrm>
+          <a:prstGeom prst="rect">
+            <a:avLst/>
+          </a:prstGeom>
+          <a:noFill/>
+          <a:ln/>
+        </p:spPr>
+        <p:txBody>
+          <a:bodyPr wrap="square" lIns="0" tIns="0" rIns="0" bIns="0" rtlCol="0" anchor="t"/>
+          <a:lstStyle/>
+          <a:p>
+            <a:pPr indent="0" marL="0">
+              <a:buNone/>
+            </a:pPr>
+            <a:r>
+              <a:rPr lang="en-US" sz="1350" dirty="0">
+                <a:solidFill>
+                  <a:srgbClr val="4A5875"/>
+                </a:solidFill>
+                <a:latin typeface="Calibri" pitchFamily="34" charset="0"/>
+                <a:ea typeface="Calibri" pitchFamily="34" charset="-122"/>
+                <a:cs typeface="Calibri" pitchFamily="34" charset="-120"/>
+              </a:rPr>
+              <a:t>An anonymous code in Neon Postgres; “Clear my data” deletes it.</a:t>
+            </a:r>
+            <a:endParaRPr lang="en-US" sz="1350" dirty="0"/>
+          </a:p>
+        </p:txBody>
+      </p:sp>
+      <p:sp>
+        <p:nvSpPr>
+          <p:cNvPr id="35" name="pers-label"/>
+          <p:cNvSpPr txBox="1"/>
+          <p:nvPr/>
+        </p:nvSpPr>
+        <p:spPr>
+          <a:xfrm>
+            <a:off x="6537960" y="1463040"/>
+            <a:ext cx="4206240" cy="274320"/>
+          </a:xfrm>
+          <a:prstGeom prst="rect">
+            <a:avLst/>
+          </a:prstGeom>
+          <a:noFill/>
+          <a:ln/>
+        </p:spPr>
+        <p:txBody>
+          <a:bodyPr wrap="square" lIns="0" tIns="0" rIns="0" bIns="0" rtlCol="0" anchor="ctr"/>
+          <a:lstStyle/>
+          <a:p>
+            <a:pPr indent="0" marL="0">
+              <a:buNone/>
+            </a:pPr>
+            <a:r>
+              <a:rPr lang="en-US" sz="1200" b="1" spc="300" kern="0" dirty="0">
+                <a:solidFill>
+                  <a:srgbClr val="F2A40E"/>
+                </a:solidFill>
+                <a:latin typeface="Calibri" pitchFamily="34" charset="0"/>
+                <a:ea typeface="Calibri" pitchFamily="34" charset="-122"/>
+                <a:cs typeface="Calibri" pitchFamily="34" charset="-120"/>
+              </a:rPr>
+              <a:t>A REAL RESULT SCREEN</a:t>
+            </a:r>
+            <a:endParaRPr lang="en-US" sz="1200" dirty="0"/>
+          </a:p>
+        </p:txBody>
+      </p:sp>
+      <p:sp>
+        <p:nvSpPr>
+          <p:cNvPr id="36" name="pers-frame"/>
+          <p:cNvSpPr/>
+          <p:nvPr/>
+        </p:nvSpPr>
+        <p:spPr>
+          <a:xfrm>
+            <a:off x="6492240" y="1874520"/>
+            <a:ext cx="4983480" cy="3218688"/>
+          </a:xfrm>
+          <a:prstGeom prst="roundRect">
+            <a:avLst>
+              <a:gd name="adj" fmla="val 3409"/>
+            </a:avLst>
+          </a:prstGeom>
+          <a:solidFill>
+            <a:srgbClr val="FFFFFF"/>
+          </a:solidFill>
+          <a:ln w="12700">
+            <a:solidFill>
+              <a:srgbClr val="FFFFFF"/>
+            </a:solidFill>
+            <a:prstDash val="solid"/>
+          </a:ln>
+        </p:spPr>
+      </p:sp>
+      <p:pic>
+        <p:nvPicPr>
+          <p:cNvPr id="37" name="pers-shot" descr="C:\Users\rahee\AppData\Local\Temp\claude\C--Users-rahee-Desktop-AICon\b0d77b2b-594c-418c-bce0-e4f2d230c288\scratchpad\deck-assets\deck-practice-crop.png">    </p:cNvPr>
+          <p:cNvPicPr>
+            <a:picLocks noChangeAspect="1"/>
+          </p:cNvPicPr>
+          <p:nvPr/>
+        </p:nvPicPr>
+        <p:blipFill>
+          <a:blip r:embed="rId5"/>
+          <a:srcRect l="0" r="0" t="0" b="0"/>
+          <a:stretch/>
+        </p:blipFill>
+        <p:spPr>
+          <a:xfrm>
+            <a:off x="6547104" y="1929384"/>
+            <a:ext cx="4873752" cy="3108960"/>
+          </a:xfrm>
+          <a:prstGeom prst="rect">
+            <a:avLst/>
+          </a:prstGeom>
+        </p:spPr>
+      </p:pic>
+      <p:sp>
+        <p:nvSpPr>
+          <p:cNvPr id="38" name="pers-cap"/>
+          <p:cNvSpPr txBox="1"/>
+          <p:nvPr/>
+        </p:nvSpPr>
+        <p:spPr>
+          <a:xfrm>
+            <a:off x="6537960" y="5257800"/>
+            <a:ext cx="4937760" cy="548640"/>
+          </a:xfrm>
+          <a:prstGeom prst="rect">
+            <a:avLst/>
+          </a:prstGeom>
+          <a:noFill/>
+          <a:ln/>
+        </p:spPr>
+        <p:txBody>
+          <a:bodyPr wrap="square" lIns="0" tIns="0" rIns="0" bIns="0" rtlCol="0" anchor="t"/>
+          <a:lstStyle/>
+          <a:p>
+            <a:pPr indent="0" marL="0">
+              <a:buNone/>
+            </a:pPr>
+            <a:r>
+              <a:rPr lang="en-US" sz="1300" dirty="0">
                 <a:solidFill>
                   <a:srgbClr val="DCE4FA"/>
                 </a:solidFill>
@@ -8316,609 +9649,21 @@
                 <a:ea typeface="Calibri" pitchFamily="34" charset="-122"/>
                 <a:cs typeface="Calibri" pitchFamily="34" charset="-120"/>
               </a:rPr>
-              <a:t>planted errors caught by Fact Guard</a:t>
+              <a:t>Score, weak areas by section, and a study plan made from this lesson’s own materials.</a:t>
             </a:r>
-            <a:endParaRPr lang="en-US" sz="1500" dirty="0"/>
-          </a:p>
-        </p:txBody>
-      </p:sp>
-      <p:sp>
-        <p:nvSpPr>
-          <p:cNvPr id="21" name="tile-0"/>
-          <p:cNvSpPr/>
-          <p:nvPr/>
-        </p:nvSpPr>
-        <p:spPr>
-          <a:xfrm>
-            <a:off x="4480560" y="1965960"/>
-            <a:ext cx="3520440" cy="2011680"/>
-          </a:xfrm>
-          <a:prstGeom prst="roundRect">
-            <a:avLst>
-              <a:gd name="adj" fmla="val 9091"/>
-            </a:avLst>
-          </a:prstGeom>
-          <a:solidFill>
-            <a:srgbClr val="FFFFFF"/>
-          </a:solidFill>
-          <a:ln w="12700">
-            <a:solidFill>
-              <a:srgbClr val="D3DEDC"/>
-            </a:solidFill>
-            <a:prstDash val="solid"/>
-          </a:ln>
-        </p:spPr>
-      </p:sp>
-      <p:sp>
-        <p:nvSpPr>
-          <p:cNvPr id="22" name="!!stat-b"/>
-          <p:cNvSpPr txBox="1"/>
-          <p:nvPr/>
-        </p:nvSpPr>
-        <p:spPr>
-          <a:xfrm>
-            <a:off x="4754880" y="2167128"/>
-            <a:ext cx="3017520" cy="868680"/>
-          </a:xfrm>
-          <a:prstGeom prst="rect">
-            <a:avLst/>
-          </a:prstGeom>
-          <a:noFill/>
-          <a:ln/>
-        </p:spPr>
-        <p:txBody>
-          <a:bodyPr wrap="square" lIns="0" tIns="0" rIns="0" bIns="0" rtlCol="0" anchor="ctr"/>
-          <a:lstStyle/>
-          <a:p>
-            <a:pPr marL="0" indent="0">
-              <a:buNone/>
-            </a:pPr>
-            <a:r>
-              <a:rPr lang="en-US" sz="4000" b="1" dirty="0">
-                <a:solidFill>
-                  <a:srgbClr val="0B8F8F"/>
-                </a:solidFill>
-                <a:latin typeface="Century Gothic" pitchFamily="34" charset="0"/>
-                <a:ea typeface="Century Gothic" pitchFamily="34" charset="-122"/>
-                <a:cs typeface="Century Gothic" pitchFamily="34" charset="-120"/>
-              </a:rPr>
-              <a:t>0/142</a:t>
-            </a:r>
-            <a:endParaRPr lang="en-US" sz="4000" dirty="0"/>
-          </a:p>
-        </p:txBody>
-      </p:sp>
-      <p:sp>
-        <p:nvSpPr>
-          <p:cNvPr id="23" name="!!stat-b-label"/>
-          <p:cNvSpPr txBox="1"/>
-          <p:nvPr/>
-        </p:nvSpPr>
-        <p:spPr>
-          <a:xfrm>
-            <a:off x="4754880" y="3108960"/>
-            <a:ext cx="3017520" cy="685800"/>
-          </a:xfrm>
-          <a:prstGeom prst="rect">
-            <a:avLst/>
-          </a:prstGeom>
-          <a:noFill/>
-          <a:ln/>
-        </p:spPr>
-        <p:txBody>
-          <a:bodyPr wrap="square" lIns="0" tIns="0" rIns="0" bIns="0" rtlCol="0" anchor="t"/>
-          <a:lstStyle/>
-          <a:p>
-            <a:pPr marL="0" indent="0">
-              <a:buNone/>
-            </a:pPr>
-            <a:r>
-              <a:rPr lang="en-US" sz="1500" dirty="0">
-                <a:solidFill>
-                  <a:srgbClr val="4A5875"/>
-                </a:solidFill>
-                <a:latin typeface="Calibri" pitchFamily="34" charset="0"/>
-                <a:ea typeface="Calibri" pitchFamily="34" charset="-122"/>
-                <a:cs typeface="Calibri" pitchFamily="34" charset="-120"/>
-              </a:rPr>
-              <a:t>false alarms on unchanged facts</a:t>
-            </a:r>
-            <a:endParaRPr lang="en-US" sz="1500" dirty="0"/>
-          </a:p>
-        </p:txBody>
-      </p:sp>
-      <p:sp>
-        <p:nvSpPr>
-          <p:cNvPr id="24" name="tile-1"/>
-          <p:cNvSpPr/>
-          <p:nvPr/>
-        </p:nvSpPr>
-        <p:spPr>
-          <a:xfrm>
-            <a:off x="8229600" y="1965960"/>
-            <a:ext cx="3520440" cy="2011680"/>
-          </a:xfrm>
-          <a:prstGeom prst="roundRect">
-            <a:avLst>
-              <a:gd name="adj" fmla="val 9091"/>
-            </a:avLst>
-          </a:prstGeom>
-          <a:solidFill>
-            <a:srgbClr val="FFFFFF"/>
-          </a:solidFill>
-          <a:ln w="12700">
-            <a:solidFill>
-              <a:srgbClr val="D3DEDC"/>
-            </a:solidFill>
-            <a:prstDash val="solid"/>
-          </a:ln>
-        </p:spPr>
-      </p:sp>
-      <p:sp>
-        <p:nvSpPr>
-          <p:cNvPr id="25" name="tile-v-1"/>
-          <p:cNvSpPr txBox="1"/>
-          <p:nvPr/>
-        </p:nvSpPr>
-        <p:spPr>
-          <a:xfrm>
-            <a:off x="8503920" y="2167128"/>
-            <a:ext cx="3017520" cy="868680"/>
-          </a:xfrm>
-          <a:prstGeom prst="rect">
-            <a:avLst/>
-          </a:prstGeom>
-          <a:noFill/>
-          <a:ln/>
-        </p:spPr>
-        <p:txBody>
-          <a:bodyPr wrap="square" lIns="0" tIns="0" rIns="0" bIns="0" rtlCol="0" anchor="ctr"/>
-          <a:lstStyle/>
-          <a:p>
-            <a:pPr marL="0" indent="0">
-              <a:buNone/>
-            </a:pPr>
-            <a:r>
-              <a:rPr lang="en-US" sz="4000" b="1" dirty="0">
-                <a:solidFill>
-                  <a:srgbClr val="0C8259"/>
-                </a:solidFill>
-                <a:latin typeface="Century Gothic" pitchFamily="34" charset="0"/>
-                <a:ea typeface="Century Gothic" pitchFamily="34" charset="-122"/>
-                <a:cs typeface="Century Gothic" pitchFamily="34" charset="-120"/>
-              </a:rPr>
-              <a:t>99%</a:t>
-            </a:r>
-            <a:endParaRPr lang="en-US" sz="4000" dirty="0"/>
-          </a:p>
-        </p:txBody>
-      </p:sp>
-      <p:sp>
-        <p:nvSpPr>
-          <p:cNvPr id="26" name="tile-l-1"/>
-          <p:cNvSpPr txBox="1"/>
-          <p:nvPr/>
-        </p:nvSpPr>
-        <p:spPr>
-          <a:xfrm>
-            <a:off x="8503920" y="3108960"/>
-            <a:ext cx="3017520" cy="685800"/>
-          </a:xfrm>
-          <a:prstGeom prst="rect">
-            <a:avLst/>
-          </a:prstGeom>
-          <a:noFill/>
-          <a:ln/>
-        </p:spPr>
-        <p:txBody>
-          <a:bodyPr wrap="square" lIns="0" tIns="0" rIns="0" bIns="0" rtlCol="0" anchor="t"/>
-          <a:lstStyle/>
-          <a:p>
-            <a:pPr marL="0" indent="0">
-              <a:buNone/>
-            </a:pPr>
-            <a:r>
-              <a:rPr lang="en-US" sz="1500" dirty="0">
-                <a:solidFill>
-                  <a:srgbClr val="4A5875"/>
-                </a:solidFill>
-                <a:latin typeface="Calibri" pitchFamily="34" charset="0"/>
-                <a:ea typeface="Calibri" pitchFamily="34" charset="-122"/>
-                <a:cs typeface="Calibri" pitchFamily="34" charset="-120"/>
-              </a:rPr>
-              <a:t>facts verifiably kept in the rewrite</a:t>
-            </a:r>
-            <a:endParaRPr lang="en-US" sz="1500" dirty="0"/>
-          </a:p>
-        </p:txBody>
-      </p:sp>
-      <p:sp>
-        <p:nvSpPr>
-          <p:cNvPr id="27" name="tile-2"/>
-          <p:cNvSpPr/>
-          <p:nvPr/>
-        </p:nvSpPr>
-        <p:spPr>
-          <a:xfrm>
-            <a:off x="731520" y="4206240"/>
-            <a:ext cx="3520440" cy="2011680"/>
-          </a:xfrm>
-          <a:prstGeom prst="roundRect">
-            <a:avLst>
-              <a:gd name="adj" fmla="val 9091"/>
-            </a:avLst>
-          </a:prstGeom>
-          <a:solidFill>
-            <a:srgbClr val="FFFFFF"/>
-          </a:solidFill>
-          <a:ln w="12700">
-            <a:solidFill>
-              <a:srgbClr val="D3DEDC"/>
-            </a:solidFill>
-            <a:prstDash val="solid"/>
-          </a:ln>
-        </p:spPr>
-      </p:sp>
-      <p:sp>
-        <p:nvSpPr>
-          <p:cNvPr id="28" name="tile-v-2"/>
-          <p:cNvSpPr txBox="1"/>
-          <p:nvPr/>
-        </p:nvSpPr>
-        <p:spPr>
-          <a:xfrm>
-            <a:off x="1005840" y="4407408"/>
-            <a:ext cx="3017520" cy="868680"/>
-          </a:xfrm>
-          <a:prstGeom prst="rect">
-            <a:avLst/>
-          </a:prstGeom>
-          <a:noFill/>
-          <a:ln/>
-        </p:spPr>
-        <p:txBody>
-          <a:bodyPr wrap="square" lIns="0" tIns="0" rIns="0" bIns="0" rtlCol="0" anchor="ctr"/>
-          <a:lstStyle/>
-          <a:p>
-            <a:pPr marL="0" indent="0">
-              <a:buNone/>
-            </a:pPr>
-            <a:r>
-              <a:rPr lang="en-US" sz="4000" b="1" dirty="0">
-                <a:solidFill>
-                  <a:srgbClr val="1C3EA6"/>
-                </a:solidFill>
-                <a:latin typeface="Century Gothic" pitchFamily="34" charset="0"/>
-                <a:ea typeface="Century Gothic" pitchFamily="34" charset="-122"/>
-                <a:cs typeface="Century Gothic" pitchFamily="34" charset="-120"/>
-              </a:rPr>
-              <a:t>11.0 → 6.3</a:t>
-            </a:r>
-            <a:endParaRPr lang="en-US" sz="4000" dirty="0"/>
-          </a:p>
-        </p:txBody>
-      </p:sp>
-      <p:sp>
-        <p:nvSpPr>
-          <p:cNvPr id="29" name="tile-l-2"/>
-          <p:cNvSpPr txBox="1"/>
-          <p:nvPr/>
-        </p:nvSpPr>
-        <p:spPr>
-          <a:xfrm>
-            <a:off x="1005840" y="5349240"/>
-            <a:ext cx="3017520" cy="685800"/>
-          </a:xfrm>
-          <a:prstGeom prst="rect">
-            <a:avLst/>
-          </a:prstGeom>
-          <a:noFill/>
-          <a:ln/>
-        </p:spPr>
-        <p:txBody>
-          <a:bodyPr wrap="square" lIns="0" tIns="0" rIns="0" bIns="0" rtlCol="0" anchor="t"/>
-          <a:lstStyle/>
-          <a:p>
-            <a:pPr marL="0" indent="0">
-              <a:buNone/>
-            </a:pPr>
-            <a:r>
-              <a:rPr lang="en-US" sz="1500" dirty="0">
-                <a:solidFill>
-                  <a:srgbClr val="4A5875"/>
-                </a:solidFill>
-                <a:latin typeface="Calibri" pitchFamily="34" charset="0"/>
-                <a:ea typeface="Calibri" pitchFamily="34" charset="-122"/>
-                <a:cs typeface="Calibri" pitchFamily="34" charset="-120"/>
-              </a:rPr>
-              <a:t>reading grade, original → Easier</a:t>
-            </a:r>
-            <a:endParaRPr lang="en-US" sz="1500" dirty="0"/>
-          </a:p>
-        </p:txBody>
-      </p:sp>
-      <p:sp>
-        <p:nvSpPr>
-          <p:cNvPr id="30" name="tile-3"/>
-          <p:cNvSpPr/>
-          <p:nvPr/>
-        </p:nvSpPr>
-        <p:spPr>
-          <a:xfrm>
-            <a:off x="4480560" y="4206240"/>
-            <a:ext cx="3520440" cy="2011680"/>
-          </a:xfrm>
-          <a:prstGeom prst="roundRect">
-            <a:avLst>
-              <a:gd name="adj" fmla="val 9091"/>
-            </a:avLst>
-          </a:prstGeom>
-          <a:solidFill>
-            <a:srgbClr val="FFFFFF"/>
-          </a:solidFill>
-          <a:ln w="12700">
-            <a:solidFill>
-              <a:srgbClr val="D3DEDC"/>
-            </a:solidFill>
-            <a:prstDash val="solid"/>
-          </a:ln>
-        </p:spPr>
-      </p:sp>
-      <p:sp>
-        <p:nvSpPr>
-          <p:cNvPr id="31" name="tile-v-3"/>
-          <p:cNvSpPr txBox="1"/>
-          <p:nvPr/>
-        </p:nvSpPr>
-        <p:spPr>
-          <a:xfrm>
-            <a:off x="4754880" y="4407408"/>
-            <a:ext cx="2103120" cy="868680"/>
-          </a:xfrm>
-          <a:prstGeom prst="rect">
-            <a:avLst/>
-          </a:prstGeom>
-          <a:noFill/>
-          <a:ln/>
-        </p:spPr>
-        <p:txBody>
-          <a:bodyPr wrap="square" lIns="0" tIns="0" rIns="0" bIns="0" rtlCol="0" anchor="ctr"/>
-          <a:lstStyle/>
-          <a:p>
-            <a:pPr marL="0" indent="0">
-              <a:buNone/>
-            </a:pPr>
-            <a:r>
-              <a:rPr lang="en-US" sz="3200" b="1" dirty="0">
-                <a:solidFill>
-                  <a:srgbClr val="0B8F8F"/>
-                </a:solidFill>
-                <a:latin typeface="Century Gothic" pitchFamily="34" charset="0"/>
-                <a:ea typeface="Century Gothic" pitchFamily="34" charset="-122"/>
-                <a:cs typeface="Century Gothic" pitchFamily="34" charset="-120"/>
-              </a:rPr>
-              <a:t>99.98%</a:t>
-            </a:r>
-            <a:endParaRPr lang="en-US" sz="3200" dirty="0"/>
-          </a:p>
-        </p:txBody>
-      </p:sp>
-      <p:sp>
-        <p:nvSpPr>
-          <p:cNvPr id="32" name="tile-l-3"/>
-          <p:cNvSpPr txBox="1"/>
-          <p:nvPr/>
-        </p:nvSpPr>
-        <p:spPr>
-          <a:xfrm>
-            <a:off x="4754880" y="5349240"/>
-            <a:ext cx="2103120" cy="685800"/>
-          </a:xfrm>
-          <a:prstGeom prst="rect">
-            <a:avLst/>
-          </a:prstGeom>
-          <a:noFill/>
-          <a:ln/>
-        </p:spPr>
-        <p:txBody>
-          <a:bodyPr wrap="square" lIns="0" tIns="0" rIns="0" bIns="0" rtlCol="0" anchor="t"/>
-          <a:lstStyle/>
-          <a:p>
-            <a:pPr marL="0" indent="0">
-              <a:buNone/>
-            </a:pPr>
-            <a:r>
-              <a:rPr lang="en-US" sz="1500" dirty="0">
-                <a:solidFill>
-                  <a:srgbClr val="4A5875"/>
-                </a:solidFill>
-                <a:latin typeface="Calibri" pitchFamily="34" charset="0"/>
-                <a:ea typeface="Calibri" pitchFamily="34" charset="-122"/>
-                <a:cs typeface="Calibri" pitchFamily="34" charset="-120"/>
-              </a:rPr>
-              <a:t>page reading, even on this hard photo</a:t>
-            </a:r>
-            <a:endParaRPr lang="en-US" sz="1500" dirty="0"/>
-          </a:p>
-        </p:txBody>
-      </p:sp>
-      <p:pic>
-        <p:nvPicPr>
-          <p:cNvPr id="33" name="hard-photo" descr="C:\Users\rahee\AppData\Local\Temp\claude\C--Users-rahee-Desktop-AICon\b0d77b2b-594c-418c-bce0-e4f2d230c288\scratchpad\hard.jpg"/>
-          <p:cNvPicPr>
-            <a:picLocks noChangeAspect="1"/>
-          </p:cNvPicPr>
-          <p:nvPr/>
-        </p:nvPicPr>
-        <p:blipFill>
-          <a:blip r:embed="rId3"/>
-          <a:stretch>
-            <a:fillRect/>
-          </a:stretch>
-        </p:blipFill>
-        <p:spPr>
-          <a:xfrm>
-            <a:off x="6967728" y="4462272"/>
-            <a:ext cx="822960" cy="1078992"/>
-          </a:xfrm>
-          <a:prstGeom prst="rect">
-            <a:avLst/>
-          </a:prstGeom>
-        </p:spPr>
-      </p:pic>
-      <p:sp>
-        <p:nvSpPr>
-          <p:cNvPr id="34" name="tile-4"/>
-          <p:cNvSpPr/>
-          <p:nvPr/>
-        </p:nvSpPr>
-        <p:spPr>
-          <a:xfrm>
-            <a:off x="8229600" y="4206240"/>
-            <a:ext cx="3520440" cy="2011680"/>
-          </a:xfrm>
-          <a:prstGeom prst="roundRect">
-            <a:avLst>
-              <a:gd name="adj" fmla="val 9091"/>
-            </a:avLst>
-          </a:prstGeom>
-          <a:solidFill>
-            <a:srgbClr val="FFFFFF"/>
-          </a:solidFill>
-          <a:ln w="12700">
-            <a:solidFill>
-              <a:srgbClr val="D3DEDC"/>
-            </a:solidFill>
-            <a:prstDash val="solid"/>
-          </a:ln>
-        </p:spPr>
-      </p:sp>
-      <p:sp>
-        <p:nvSpPr>
-          <p:cNvPr id="35" name="tile-v-4"/>
-          <p:cNvSpPr txBox="1"/>
-          <p:nvPr/>
-        </p:nvSpPr>
-        <p:spPr>
-          <a:xfrm>
-            <a:off x="8503920" y="4407408"/>
-            <a:ext cx="3017520" cy="868680"/>
-          </a:xfrm>
-          <a:prstGeom prst="rect">
-            <a:avLst/>
-          </a:prstGeom>
-          <a:noFill/>
-          <a:ln/>
-        </p:spPr>
-        <p:txBody>
-          <a:bodyPr wrap="square" lIns="0" tIns="0" rIns="0" bIns="0" rtlCol="0" anchor="ctr"/>
-          <a:lstStyle/>
-          <a:p>
-            <a:pPr marL="0" indent="0">
-              <a:buNone/>
-            </a:pPr>
-            <a:r>
-              <a:rPr lang="en-US" sz="4000" b="1" dirty="0">
-                <a:solidFill>
-                  <a:srgbClr val="0D1B3E"/>
-                </a:solidFill>
-                <a:latin typeface="Century Gothic" pitchFamily="34" charset="0"/>
-                <a:ea typeface="Century Gothic" pitchFamily="34" charset="-122"/>
-                <a:cs typeface="Century Gothic" pitchFamily="34" charset="-120"/>
-              </a:rPr>
-              <a:t>26 s</a:t>
-            </a:r>
-            <a:endParaRPr lang="en-US" sz="4000" dirty="0"/>
-          </a:p>
-        </p:txBody>
-      </p:sp>
-      <p:sp>
-        <p:nvSpPr>
-          <p:cNvPr id="36" name="tile-l-4"/>
-          <p:cNvSpPr txBox="1"/>
-          <p:nvPr/>
-        </p:nvSpPr>
-        <p:spPr>
-          <a:xfrm>
-            <a:off x="8503920" y="5349240"/>
-            <a:ext cx="3017520" cy="685800"/>
-          </a:xfrm>
-          <a:prstGeom prst="rect">
-            <a:avLst/>
-          </a:prstGeom>
-          <a:noFill/>
-          <a:ln/>
-        </p:spPr>
-        <p:txBody>
-          <a:bodyPr wrap="square" lIns="0" tIns="0" rIns="0" bIns="0" rtlCol="0" anchor="t"/>
-          <a:lstStyle/>
-          <a:p>
-            <a:pPr marL="0" indent="0">
-              <a:buNone/>
-            </a:pPr>
-            <a:r>
-              <a:rPr lang="en-US" sz="1500" dirty="0">
-                <a:solidFill>
-                  <a:srgbClr val="4A5875"/>
-                </a:solidFill>
-                <a:latin typeface="Calibri" pitchFamily="34" charset="0"/>
-                <a:ea typeface="Calibri" pitchFamily="34" charset="-122"/>
-                <a:cs typeface="Calibri" pitchFamily="34" charset="-120"/>
-              </a:rPr>
-              <a:t>to make a lesson, on free tiers</a:t>
-            </a:r>
-            <a:endParaRPr lang="en-US" sz="1500" dirty="0"/>
-          </a:p>
-        </p:txBody>
-      </p:sp>
-      <p:sp>
-        <p:nvSpPr>
-          <p:cNvPr id="37" name="source"/>
-          <p:cNvSpPr txBox="1"/>
-          <p:nvPr/>
-        </p:nvSpPr>
-        <p:spPr>
-          <a:xfrm>
-            <a:off x="731520" y="6355080"/>
-            <a:ext cx="9144000" cy="274320"/>
-          </a:xfrm>
-          <a:prstGeom prst="rect">
-            <a:avLst/>
-          </a:prstGeom>
-          <a:noFill/>
-          <a:ln/>
-        </p:spPr>
-        <p:txBody>
-          <a:bodyPr wrap="square" lIns="0" tIns="0" rIns="0" bIns="0" rtlCol="0" anchor="ctr"/>
-          <a:lstStyle/>
-          <a:p>
-            <a:pPr marL="0" indent="0">
-              <a:buNone/>
-            </a:pPr>
-            <a:r>
-              <a:rPr lang="en-US" sz="1100" i="1" dirty="0">
-                <a:solidFill>
-                  <a:srgbClr val="4A5875"/>
-                </a:solidFill>
-                <a:latin typeface="Calibri" pitchFamily="34" charset="0"/>
-                <a:ea typeface="Calibri" pitchFamily="34" charset="-122"/>
-                <a:cs typeface="Calibri" pitchFamily="34" charset="-120"/>
-              </a:rPr>
-              <a:t>OpenStax textbook pages (CC BY 4.0) · every number comes from a script in our repo’s eval/ folder · synthetic test data is labelled</a:t>
-            </a:r>
-            <a:endParaRPr lang="en-US" sz="1100" dirty="0"/>
-          </a:p>
-        </p:txBody>
-      </p:sp>
-      <p:sp>
-        <p:nvSpPr>
-          <p:cNvPr id="38" name="!!dot-0"/>
-          <p:cNvSpPr/>
-          <p:nvPr/>
-        </p:nvSpPr>
-        <p:spPr>
-          <a:xfrm>
-            <a:off x="10241280" y="6400800"/>
+            <a:endParaRPr lang="en-US" sz="1300" dirty="0"/>
+          </a:p>
+        </p:txBody>
+      </p:sp>
+      <p:sp>
+        <p:nvSpPr>
+          <p:cNvPr id="39" name="!!dot-0"/>
+          <p:cNvSpPr/>
+          <p:nvPr/>
+        </p:nvSpPr>
+        <p:spPr>
+          <a:xfrm>
+            <a:off x="10012680" y="6400800"/>
             <a:ext cx="100584" cy="100584"/>
           </a:xfrm>
           <a:prstGeom prst="ellipse">
@@ -8937,13 +9682,13 @@
       </p:sp>
       <p:sp>
         <p:nvSpPr>
-          <p:cNvPr id="39" name="!!dot-1"/>
-          <p:cNvSpPr/>
-          <p:nvPr/>
-        </p:nvSpPr>
-        <p:spPr>
-          <a:xfrm>
-            <a:off x="10479024" y="6400800"/>
+          <p:cNvPr id="40" name="!!dot-1"/>
+          <p:cNvSpPr/>
+          <p:nvPr/>
+        </p:nvSpPr>
+        <p:spPr>
+          <a:xfrm>
+            <a:off x="10250424" y="6400800"/>
             <a:ext cx="100584" cy="100584"/>
           </a:xfrm>
           <a:prstGeom prst="ellipse">
@@ -8962,13 +9707,13 @@
       </p:sp>
       <p:sp>
         <p:nvSpPr>
-          <p:cNvPr id="40" name="!!dot-2"/>
-          <p:cNvSpPr/>
-          <p:nvPr/>
-        </p:nvSpPr>
-        <p:spPr>
-          <a:xfrm>
-            <a:off x="10716768" y="6400800"/>
+          <p:cNvPr id="41" name="!!dot-2"/>
+          <p:cNvSpPr/>
+          <p:nvPr/>
+        </p:nvSpPr>
+        <p:spPr>
+          <a:xfrm>
+            <a:off x="10488168" y="6400800"/>
             <a:ext cx="100584" cy="100584"/>
           </a:xfrm>
           <a:prstGeom prst="ellipse">
@@ -8987,13 +9732,13 @@
       </p:sp>
       <p:sp>
         <p:nvSpPr>
-          <p:cNvPr id="41" name="!!dot-3"/>
-          <p:cNvSpPr/>
-          <p:nvPr/>
-        </p:nvSpPr>
-        <p:spPr>
-          <a:xfrm>
-            <a:off x="10954512" y="6400800"/>
+          <p:cNvPr id="42" name="!!dot-3"/>
+          <p:cNvSpPr/>
+          <p:nvPr/>
+        </p:nvSpPr>
+        <p:spPr>
+          <a:xfrm>
+            <a:off x="10725912" y="6400800"/>
             <a:ext cx="100584" cy="100584"/>
           </a:xfrm>
           <a:prstGeom prst="ellipse">
@@ -9012,13 +9757,13 @@
       </p:sp>
       <p:sp>
         <p:nvSpPr>
-          <p:cNvPr id="42" name="!!dot-4"/>
-          <p:cNvSpPr/>
-          <p:nvPr/>
-        </p:nvSpPr>
-        <p:spPr>
-          <a:xfrm>
-            <a:off x="11192256" y="6400800"/>
+          <p:cNvPr id="43" name="!!dot-4"/>
+          <p:cNvSpPr/>
+          <p:nvPr/>
+        </p:nvSpPr>
+        <p:spPr>
+          <a:xfrm>
+            <a:off x="10963656" y="6400800"/>
             <a:ext cx="100584" cy="100584"/>
           </a:xfrm>
           <a:prstGeom prst="ellipse">
@@ -9037,13 +9782,13 @@
       </p:sp>
       <p:sp>
         <p:nvSpPr>
-          <p:cNvPr id="43" name="!!dot-5"/>
-          <p:cNvSpPr/>
-          <p:nvPr/>
-        </p:nvSpPr>
-        <p:spPr>
-          <a:xfrm>
-            <a:off x="11430000" y="6400800"/>
+          <p:cNvPr id="44" name="!!dot-5"/>
+          <p:cNvSpPr/>
+          <p:nvPr/>
+        </p:nvSpPr>
+        <p:spPr>
+          <a:xfrm>
+            <a:off x="11201400" y="6400800"/>
             <a:ext cx="155448" cy="155448"/>
           </a:xfrm>
           <a:prstGeom prst="ellipse">
@@ -9062,13 +9807,38 @@
       </p:sp>
       <p:sp>
         <p:nvSpPr>
-          <p:cNvPr id="44" name="!!dot-6"/>
-          <p:cNvSpPr/>
-          <p:nvPr/>
-        </p:nvSpPr>
-        <p:spPr>
-          <a:xfrm>
-            <a:off x="11667744" y="6400800"/>
+          <p:cNvPr id="45" name="!!dot-6"/>
+          <p:cNvSpPr/>
+          <p:nvPr/>
+        </p:nvSpPr>
+        <p:spPr>
+          <a:xfrm>
+            <a:off x="11439144" y="6400800"/>
+            <a:ext cx="100584" cy="100584"/>
+          </a:xfrm>
+          <a:prstGeom prst="ellipse">
+            <a:avLst/>
+          </a:prstGeom>
+          <a:solidFill>
+            <a:srgbClr val="C3CDDD"/>
+          </a:solidFill>
+          <a:ln w="12700">
+            <a:solidFill>
+              <a:srgbClr val="C3CDDD"/>
+            </a:solidFill>
+            <a:prstDash val="solid"/>
+          </a:ln>
+        </p:spPr>
+      </p:sp>
+      <p:sp>
+        <p:nvSpPr>
+          <p:cNvPr id="46" name="!!dot-7"/>
+          <p:cNvSpPr/>
+          <p:nvPr/>
+        </p:nvSpPr>
+        <p:spPr>
+          <a:xfrm>
+            <a:off x="11676888" y="6400800"/>
             <a:ext cx="100584" cy="100584"/>
           </a:xfrm>
           <a:prstGeom prst="ellipse">
@@ -9111,9 +9881,8 @@
     <p:bg>
       <p:bgPr>
         <a:solidFill>
-          <a:srgbClr val="0D1B3E"/>
+          <a:srgbClr val="F2F5F3"/>
         </a:solidFill>
-        <a:effectLst/>
       </p:bgPr>
     </p:bg>
     <p:spTree>
@@ -9132,45 +9901,20 @@
       </p:grpSpPr>
       <p:sp>
         <p:nvSpPr>
-          <p:cNvPr id="2" name="!!panel"/>
-          <p:cNvSpPr/>
-          <p:nvPr/>
-        </p:nvSpPr>
-        <p:spPr>
-          <a:xfrm>
-            <a:off x="0" y="0"/>
-            <a:ext cx="12191695" cy="6858000"/>
-          </a:xfrm>
-          <a:prstGeom prst="roundRect">
-            <a:avLst/>
-          </a:prstGeom>
-          <a:solidFill>
-            <a:srgbClr val="0D1B3E"/>
-          </a:solidFill>
-          <a:ln w="12700">
-            <a:solidFill>
-              <a:srgbClr val="0D1B3E"/>
-            </a:solidFill>
-            <a:prstDash val="solid"/>
-          </a:ln>
-        </p:spPr>
-      </p:sp>
-      <p:sp>
-        <p:nvSpPr>
-          <p:cNvPr id="3" name="!!ray-0"/>
-          <p:cNvSpPr/>
-          <p:nvPr/>
-        </p:nvSpPr>
-        <p:spPr>
-          <a:xfrm>
-            <a:off x="10730484" y="3154680"/>
-            <a:ext cx="704088" cy="914"/>
+          <p:cNvPr id="2" name="!!ray-0"/>
+          <p:cNvSpPr/>
+          <p:nvPr/>
+        </p:nvSpPr>
+        <p:spPr>
+          <a:xfrm>
+            <a:off x="11663172" y="868680"/>
+            <a:ext cx="192024" cy="914"/>
           </a:xfrm>
           <a:prstGeom prst="line">
             <a:avLst/>
           </a:prstGeom>
           <a:noFill/>
-          <a:ln w="36322">
+          <a:ln w="19050">
             <a:solidFill>
               <a:srgbClr val="F2A40E"/>
             </a:solidFill>
@@ -9180,20 +9924,20 @@
       </p:sp>
       <p:sp>
         <p:nvSpPr>
-          <p:cNvPr id="4" name="!!ray-1"/>
-          <p:cNvSpPr/>
-          <p:nvPr/>
-        </p:nvSpPr>
-        <p:spPr>
-          <a:xfrm>
-            <a:off x="10548562" y="3833622"/>
-            <a:ext cx="609758" cy="352044"/>
+          <p:cNvPr id="3" name="!!ray-1"/>
+          <p:cNvSpPr/>
+          <p:nvPr/>
+        </p:nvSpPr>
+        <p:spPr>
+          <a:xfrm>
+            <a:off x="11613557" y="1053846"/>
+            <a:ext cx="166298" cy="96012"/>
           </a:xfrm>
           <a:prstGeom prst="line">
             <a:avLst/>
           </a:prstGeom>
           <a:noFill/>
-          <a:ln w="36322">
+          <a:ln w="19050">
             <a:solidFill>
               <a:srgbClr val="F2A40E">
                 <a:alpha val="55000"/>
@@ -9205,20 +9949,20 @@
       </p:sp>
       <p:sp>
         <p:nvSpPr>
-          <p:cNvPr id="5" name="!!ray-2"/>
-          <p:cNvSpPr/>
-          <p:nvPr/>
-        </p:nvSpPr>
-        <p:spPr>
-          <a:xfrm>
-            <a:off x="10051542" y="4330642"/>
-            <a:ext cx="352044" cy="609758"/>
+          <p:cNvPr id="4" name="!!ray-2"/>
+          <p:cNvSpPr/>
+          <p:nvPr/>
+        </p:nvSpPr>
+        <p:spPr>
+          <a:xfrm>
+            <a:off x="11478006" y="1189397"/>
+            <a:ext cx="96012" cy="166298"/>
           </a:xfrm>
           <a:prstGeom prst="line">
             <a:avLst/>
           </a:prstGeom>
           <a:noFill/>
-          <a:ln w="36322">
+          <a:ln w="19050">
             <a:solidFill>
               <a:srgbClr val="F2A40E"/>
             </a:solidFill>
@@ -9228,20 +9972,20 @@
       </p:sp>
       <p:sp>
         <p:nvSpPr>
-          <p:cNvPr id="6" name="!!ray-3"/>
-          <p:cNvSpPr/>
-          <p:nvPr/>
-        </p:nvSpPr>
-        <p:spPr>
-          <a:xfrm>
-            <a:off x="9372600" y="4512564"/>
-            <a:ext cx="914" cy="704088"/>
+          <p:cNvPr id="5" name="!!ray-3"/>
+          <p:cNvSpPr/>
+          <p:nvPr/>
+        </p:nvSpPr>
+        <p:spPr>
+          <a:xfrm>
+            <a:off x="11292840" y="1239012"/>
+            <a:ext cx="914" cy="192024"/>
           </a:xfrm>
           <a:prstGeom prst="line">
             <a:avLst/>
           </a:prstGeom>
           <a:noFill/>
-          <a:ln w="36322">
+          <a:ln w="19050">
             <a:solidFill>
               <a:srgbClr val="F2A40E">
                 <a:alpha val="55000"/>
@@ -9253,6 +9997,1384 @@
       </p:sp>
       <p:sp>
         <p:nvSpPr>
+          <p:cNvPr id="6" name="!!ray-4"/>
+          <p:cNvSpPr/>
+          <p:nvPr/>
+        </p:nvSpPr>
+        <p:spPr>
+          <a:xfrm flipH="1">
+            <a:off x="11011662" y="1189397"/>
+            <a:ext cx="96012" cy="166298"/>
+          </a:xfrm>
+          <a:prstGeom prst="line">
+            <a:avLst/>
+          </a:prstGeom>
+          <a:noFill/>
+          <a:ln w="19050">
+            <a:solidFill>
+              <a:srgbClr val="F2A40E"/>
+            </a:solidFill>
+            <a:prstDash val="solid"/>
+          </a:ln>
+        </p:spPr>
+      </p:sp>
+      <p:sp>
+        <p:nvSpPr>
+          <p:cNvPr id="7" name="!!ray-5"/>
+          <p:cNvSpPr/>
+          <p:nvPr/>
+        </p:nvSpPr>
+        <p:spPr>
+          <a:xfrm flipH="1">
+            <a:off x="10805825" y="1053846"/>
+            <a:ext cx="166298" cy="96012"/>
+          </a:xfrm>
+          <a:prstGeom prst="line">
+            <a:avLst/>
+          </a:prstGeom>
+          <a:noFill/>
+          <a:ln w="19050">
+            <a:solidFill>
+              <a:srgbClr val="F2A40E">
+                <a:alpha val="55000"/>
+              </a:srgbClr>
+            </a:solidFill>
+            <a:prstDash val="solid"/>
+          </a:ln>
+        </p:spPr>
+      </p:sp>
+      <p:sp>
+        <p:nvSpPr>
+          <p:cNvPr id="8" name="!!ray-6"/>
+          <p:cNvSpPr/>
+          <p:nvPr/>
+        </p:nvSpPr>
+        <p:spPr>
+          <a:xfrm flipH="1">
+            <a:off x="10730484" y="868680"/>
+            <a:ext cx="192024" cy="914"/>
+          </a:xfrm>
+          <a:prstGeom prst="line">
+            <a:avLst/>
+          </a:prstGeom>
+          <a:noFill/>
+          <a:ln w="19050">
+            <a:solidFill>
+              <a:srgbClr val="F2A40E"/>
+            </a:solidFill>
+            <a:prstDash val="solid"/>
+          </a:ln>
+        </p:spPr>
+      </p:sp>
+      <p:sp>
+        <p:nvSpPr>
+          <p:cNvPr id="9" name="!!ray-7"/>
+          <p:cNvSpPr/>
+          <p:nvPr/>
+        </p:nvSpPr>
+        <p:spPr>
+          <a:xfrm flipH="1" flipV="1">
+            <a:off x="10805825" y="587502"/>
+            <a:ext cx="166298" cy="96012"/>
+          </a:xfrm>
+          <a:prstGeom prst="line">
+            <a:avLst/>
+          </a:prstGeom>
+          <a:noFill/>
+          <a:ln w="19050">
+            <a:solidFill>
+              <a:srgbClr val="F2A40E">
+                <a:alpha val="55000"/>
+              </a:srgbClr>
+            </a:solidFill>
+            <a:prstDash val="solid"/>
+          </a:ln>
+        </p:spPr>
+      </p:sp>
+      <p:sp>
+        <p:nvSpPr>
+          <p:cNvPr id="10" name="!!ray-8"/>
+          <p:cNvSpPr/>
+          <p:nvPr/>
+        </p:nvSpPr>
+        <p:spPr>
+          <a:xfrm flipH="1" flipV="1">
+            <a:off x="11011662" y="381665"/>
+            <a:ext cx="96012" cy="166298"/>
+          </a:xfrm>
+          <a:prstGeom prst="line">
+            <a:avLst/>
+          </a:prstGeom>
+          <a:noFill/>
+          <a:ln w="19050">
+            <a:solidFill>
+              <a:srgbClr val="F2A40E"/>
+            </a:solidFill>
+            <a:prstDash val="solid"/>
+          </a:ln>
+        </p:spPr>
+      </p:sp>
+      <p:sp>
+        <p:nvSpPr>
+          <p:cNvPr id="11" name="!!ray-9"/>
+          <p:cNvSpPr/>
+          <p:nvPr/>
+        </p:nvSpPr>
+        <p:spPr>
+          <a:xfrm flipH="1" flipV="1">
+            <a:off x="11292840" y="306324"/>
+            <a:ext cx="914" cy="192024"/>
+          </a:xfrm>
+          <a:prstGeom prst="line">
+            <a:avLst/>
+          </a:prstGeom>
+          <a:noFill/>
+          <a:ln w="19050">
+            <a:solidFill>
+              <a:srgbClr val="F2A40E">
+                <a:alpha val="55000"/>
+              </a:srgbClr>
+            </a:solidFill>
+            <a:prstDash val="solid"/>
+          </a:ln>
+        </p:spPr>
+      </p:sp>
+      <p:sp>
+        <p:nvSpPr>
+          <p:cNvPr id="12" name="!!ray-10"/>
+          <p:cNvSpPr/>
+          <p:nvPr/>
+        </p:nvSpPr>
+        <p:spPr>
+          <a:xfrm flipV="1">
+            <a:off x="11478006" y="381665"/>
+            <a:ext cx="96012" cy="166298"/>
+          </a:xfrm>
+          <a:prstGeom prst="line">
+            <a:avLst/>
+          </a:prstGeom>
+          <a:noFill/>
+          <a:ln w="19050">
+            <a:solidFill>
+              <a:srgbClr val="F2A40E"/>
+            </a:solidFill>
+            <a:prstDash val="solid"/>
+          </a:ln>
+        </p:spPr>
+      </p:sp>
+      <p:sp>
+        <p:nvSpPr>
+          <p:cNvPr id="13" name="!!ray-11"/>
+          <p:cNvSpPr/>
+          <p:nvPr/>
+        </p:nvSpPr>
+        <p:spPr>
+          <a:xfrm flipV="1">
+            <a:off x="11613557" y="587502"/>
+            <a:ext cx="166298" cy="96012"/>
+          </a:xfrm>
+          <a:prstGeom prst="line">
+            <a:avLst/>
+          </a:prstGeom>
+          <a:noFill/>
+          <a:ln w="19050">
+            <a:solidFill>
+              <a:srgbClr val="F2A40E">
+                <a:alpha val="55000"/>
+              </a:srgbClr>
+            </a:solidFill>
+            <a:prstDash val="solid"/>
+          </a:ln>
+        </p:spPr>
+      </p:sp>
+      <p:sp>
+        <p:nvSpPr>
+          <p:cNvPr id="14" name="!!ring"/>
+          <p:cNvSpPr/>
+          <p:nvPr/>
+        </p:nvSpPr>
+        <p:spPr>
+          <a:xfrm>
+            <a:off x="11018520" y="594360"/>
+            <a:ext cx="548640" cy="548640"/>
+          </a:xfrm>
+          <a:prstGeom prst="ellipse">
+            <a:avLst/>
+          </a:prstGeom>
+          <a:solidFill>
+            <a:srgbClr val="1C3EA6"/>
+          </a:solidFill>
+          <a:ln w="12700">
+            <a:solidFill>
+              <a:srgbClr val="FFFFFF"/>
+            </a:solidFill>
+            <a:prstDash val="solid"/>
+          </a:ln>
+        </p:spPr>
+      </p:sp>
+      <p:sp>
+        <p:nvSpPr>
+          <p:cNvPr id="15" name="!!flame"/>
+          <p:cNvSpPr/>
+          <p:nvPr/>
+        </p:nvSpPr>
+        <p:spPr>
+          <a:xfrm>
+            <a:off x="11177626" y="753466"/>
+            <a:ext cx="230429" cy="230429"/>
+          </a:xfrm>
+          <a:prstGeom prst="ellipse">
+            <a:avLst/>
+          </a:prstGeom>
+          <a:solidFill>
+            <a:srgbClr val="F2A40E"/>
+          </a:solidFill>
+          <a:ln w="12700">
+            <a:solidFill>
+              <a:srgbClr val="F2A40E"/>
+            </a:solidFill>
+            <a:prstDash val="solid"/>
+          </a:ln>
+        </p:spPr>
+      </p:sp>
+      <p:sp>
+        <p:nvSpPr>
+          <p:cNvPr id="16" name="!!kicker"/>
+          <p:cNvSpPr txBox="1"/>
+          <p:nvPr/>
+        </p:nvSpPr>
+        <p:spPr>
+          <a:xfrm>
+            <a:off x="731520" y="548640"/>
+            <a:ext cx="6400800" cy="320040"/>
+          </a:xfrm>
+          <a:prstGeom prst="rect">
+            <a:avLst/>
+          </a:prstGeom>
+          <a:noFill/>
+          <a:ln/>
+        </p:spPr>
+        <p:txBody>
+          <a:bodyPr wrap="square" lIns="0" tIns="0" rIns="0" bIns="0" rtlCol="0" anchor="ctr"/>
+          <a:lstStyle/>
+          <a:p>
+            <a:pPr indent="0" marL="0">
+              <a:buNone/>
+            </a:pPr>
+            <a:r>
+              <a:rPr lang="en-US" sz="1300" b="1" spc="300" kern="0" dirty="0">
+                <a:solidFill>
+                  <a:srgbClr val="0B8F8F"/>
+                </a:solidFill>
+                <a:latin typeface="Calibri" pitchFamily="34" charset="0"/>
+                <a:ea typeface="Calibri" pitchFamily="34" charset="-122"/>
+                <a:cs typeface="Calibri" pitchFamily="34" charset="-120"/>
+              </a:rPr>
+              <a:t>06 · MEASURED, NOT CLAIMED</a:t>
+            </a:r>
+            <a:endParaRPr lang="en-US" sz="1300" dirty="0"/>
+          </a:p>
+        </p:txBody>
+      </p:sp>
+      <p:sp>
+        <p:nvSpPr>
+          <p:cNvPr id="17" name="!!title"/>
+          <p:cNvSpPr txBox="1"/>
+          <p:nvPr/>
+        </p:nvSpPr>
+        <p:spPr>
+          <a:xfrm>
+            <a:off x="731520" y="896112"/>
+            <a:ext cx="9144000" cy="822960"/>
+          </a:xfrm>
+          <a:prstGeom prst="rect">
+            <a:avLst/>
+          </a:prstGeom>
+          <a:noFill/>
+          <a:ln/>
+        </p:spPr>
+        <p:txBody>
+          <a:bodyPr wrap="square" lIns="0" tIns="0" rIns="0" bIns="0" rtlCol="0" anchor="t"/>
+          <a:lstStyle/>
+          <a:p>
+            <a:pPr indent="0" marL="0">
+              <a:buNone/>
+            </a:pPr>
+            <a:r>
+              <a:rPr lang="en-US" sz="3000" b="1" dirty="0">
+                <a:solidFill>
+                  <a:srgbClr val="0D1B3E"/>
+                </a:solidFill>
+                <a:latin typeface="Century Gothic" pitchFamily="34" charset="0"/>
+                <a:ea typeface="Century Gothic" pitchFamily="34" charset="-122"/>
+                <a:cs typeface="Century Gothic" pitchFamily="34" charset="-120"/>
+              </a:rPr>
+              <a:t>Real textbook pages, real numbers</a:t>
+            </a:r>
+            <a:endParaRPr lang="en-US" sz="3000" dirty="0"/>
+          </a:p>
+        </p:txBody>
+      </p:sp>
+      <p:sp>
+        <p:nvSpPr>
+          <p:cNvPr id="18" name="!!panel"/>
+          <p:cNvSpPr/>
+          <p:nvPr/>
+        </p:nvSpPr>
+        <p:spPr>
+          <a:xfrm>
+            <a:off x="731520" y="1965960"/>
+            <a:ext cx="3520440" cy="2011680"/>
+          </a:xfrm>
+          <a:prstGeom prst="roundRect">
+            <a:avLst>
+              <a:gd name="adj" fmla="val 9091"/>
+            </a:avLst>
+          </a:prstGeom>
+          <a:solidFill>
+            <a:srgbClr val="1C3EA6"/>
+          </a:solidFill>
+          <a:ln w="12700">
+            <a:solidFill>
+              <a:srgbClr val="1C3EA6"/>
+            </a:solidFill>
+            <a:prstDash val="solid"/>
+          </a:ln>
+        </p:spPr>
+      </p:sp>
+      <p:sp>
+        <p:nvSpPr>
+          <p:cNvPr id="19" name="!!stat-a"/>
+          <p:cNvSpPr txBox="1"/>
+          <p:nvPr/>
+        </p:nvSpPr>
+        <p:spPr>
+          <a:xfrm>
+            <a:off x="1005840" y="2167128"/>
+            <a:ext cx="3017520" cy="868680"/>
+          </a:xfrm>
+          <a:prstGeom prst="rect">
+            <a:avLst/>
+          </a:prstGeom>
+          <a:noFill/>
+          <a:ln/>
+        </p:spPr>
+        <p:txBody>
+          <a:bodyPr wrap="square" lIns="0" tIns="0" rIns="0" bIns="0" rtlCol="0" anchor="ctr"/>
+          <a:lstStyle/>
+          <a:p>
+            <a:pPr indent="0" marL="0">
+              <a:buNone/>
+            </a:pPr>
+            <a:r>
+              <a:rPr lang="en-US" sz="4400" b="1" dirty="0">
+                <a:solidFill>
+                  <a:srgbClr val="FFFFFF"/>
+                </a:solidFill>
+                <a:latin typeface="Century Gothic" pitchFamily="34" charset="0"/>
+                <a:ea typeface="Century Gothic" pitchFamily="34" charset="-122"/>
+                <a:cs typeface="Century Gothic" pitchFamily="34" charset="-120"/>
+              </a:rPr>
+              <a:t>28/28</a:t>
+            </a:r>
+            <a:endParaRPr lang="en-US" sz="4400" dirty="0"/>
+          </a:p>
+        </p:txBody>
+      </p:sp>
+      <p:sp>
+        <p:nvSpPr>
+          <p:cNvPr id="20" name="!!stat-a-label"/>
+          <p:cNvSpPr txBox="1"/>
+          <p:nvPr/>
+        </p:nvSpPr>
+        <p:spPr>
+          <a:xfrm>
+            <a:off x="1005840" y="3108960"/>
+            <a:ext cx="3017520" cy="685800"/>
+          </a:xfrm>
+          <a:prstGeom prst="rect">
+            <a:avLst/>
+          </a:prstGeom>
+          <a:noFill/>
+          <a:ln/>
+        </p:spPr>
+        <p:txBody>
+          <a:bodyPr wrap="square" lIns="0" tIns="0" rIns="0" bIns="0" rtlCol="0" anchor="t"/>
+          <a:lstStyle/>
+          <a:p>
+            <a:pPr indent="0" marL="0">
+              <a:buNone/>
+            </a:pPr>
+            <a:r>
+              <a:rPr lang="en-US" sz="1500" dirty="0">
+                <a:solidFill>
+                  <a:srgbClr val="DCE4FA"/>
+                </a:solidFill>
+                <a:latin typeface="Calibri" pitchFamily="34" charset="0"/>
+                <a:ea typeface="Calibri" pitchFamily="34" charset="-122"/>
+                <a:cs typeface="Calibri" pitchFamily="34" charset="-120"/>
+              </a:rPr>
+              <a:t>planted errors caught by Fact Guard</a:t>
+            </a:r>
+            <a:endParaRPr lang="en-US" sz="1500" dirty="0"/>
+          </a:p>
+        </p:txBody>
+      </p:sp>
+      <p:sp>
+        <p:nvSpPr>
+          <p:cNvPr id="21" name="tile-0"/>
+          <p:cNvSpPr/>
+          <p:nvPr/>
+        </p:nvSpPr>
+        <p:spPr>
+          <a:xfrm>
+            <a:off x="4480560" y="1965960"/>
+            <a:ext cx="3520440" cy="2011680"/>
+          </a:xfrm>
+          <a:prstGeom prst="roundRect">
+            <a:avLst>
+              <a:gd name="adj" fmla="val 9091"/>
+            </a:avLst>
+          </a:prstGeom>
+          <a:solidFill>
+            <a:srgbClr val="FFFFFF"/>
+          </a:solidFill>
+          <a:ln w="12700">
+            <a:solidFill>
+              <a:srgbClr val="D3DEDC"/>
+            </a:solidFill>
+            <a:prstDash val="solid"/>
+          </a:ln>
+        </p:spPr>
+      </p:sp>
+      <p:sp>
+        <p:nvSpPr>
+          <p:cNvPr id="22" name="!!stat-b"/>
+          <p:cNvSpPr txBox="1"/>
+          <p:nvPr/>
+        </p:nvSpPr>
+        <p:spPr>
+          <a:xfrm>
+            <a:off x="4754880" y="2167128"/>
+            <a:ext cx="3017520" cy="868680"/>
+          </a:xfrm>
+          <a:prstGeom prst="rect">
+            <a:avLst/>
+          </a:prstGeom>
+          <a:noFill/>
+          <a:ln/>
+        </p:spPr>
+        <p:txBody>
+          <a:bodyPr wrap="square" lIns="0" tIns="0" rIns="0" bIns="0" rtlCol="0" anchor="ctr"/>
+          <a:lstStyle/>
+          <a:p>
+            <a:pPr indent="0" marL="0">
+              <a:buNone/>
+            </a:pPr>
+            <a:r>
+              <a:rPr lang="en-US" sz="4000" b="1" dirty="0">
+                <a:solidFill>
+                  <a:srgbClr val="0B8F8F"/>
+                </a:solidFill>
+                <a:latin typeface="Century Gothic" pitchFamily="34" charset="0"/>
+                <a:ea typeface="Century Gothic" pitchFamily="34" charset="-122"/>
+                <a:cs typeface="Century Gothic" pitchFamily="34" charset="-120"/>
+              </a:rPr>
+              <a:t>0/142</a:t>
+            </a:r>
+            <a:endParaRPr lang="en-US" sz="4000" dirty="0"/>
+          </a:p>
+        </p:txBody>
+      </p:sp>
+      <p:sp>
+        <p:nvSpPr>
+          <p:cNvPr id="23" name="!!stat-b-label"/>
+          <p:cNvSpPr txBox="1"/>
+          <p:nvPr/>
+        </p:nvSpPr>
+        <p:spPr>
+          <a:xfrm>
+            <a:off x="4754880" y="3108960"/>
+            <a:ext cx="3017520" cy="685800"/>
+          </a:xfrm>
+          <a:prstGeom prst="rect">
+            <a:avLst/>
+          </a:prstGeom>
+          <a:noFill/>
+          <a:ln/>
+        </p:spPr>
+        <p:txBody>
+          <a:bodyPr wrap="square" lIns="0" tIns="0" rIns="0" bIns="0" rtlCol="0" anchor="t"/>
+          <a:lstStyle/>
+          <a:p>
+            <a:pPr indent="0" marL="0">
+              <a:buNone/>
+            </a:pPr>
+            <a:r>
+              <a:rPr lang="en-US" sz="1500" dirty="0">
+                <a:solidFill>
+                  <a:srgbClr val="4A5875"/>
+                </a:solidFill>
+                <a:latin typeface="Calibri" pitchFamily="34" charset="0"/>
+                <a:ea typeface="Calibri" pitchFamily="34" charset="-122"/>
+                <a:cs typeface="Calibri" pitchFamily="34" charset="-120"/>
+              </a:rPr>
+              <a:t>false alarms on unchanged facts</a:t>
+            </a:r>
+            <a:endParaRPr lang="en-US" sz="1500" dirty="0"/>
+          </a:p>
+        </p:txBody>
+      </p:sp>
+      <p:sp>
+        <p:nvSpPr>
+          <p:cNvPr id="24" name="tile-1"/>
+          <p:cNvSpPr/>
+          <p:nvPr/>
+        </p:nvSpPr>
+        <p:spPr>
+          <a:xfrm>
+            <a:off x="8229600" y="1965960"/>
+            <a:ext cx="3520440" cy="2011680"/>
+          </a:xfrm>
+          <a:prstGeom prst="roundRect">
+            <a:avLst>
+              <a:gd name="adj" fmla="val 9091"/>
+            </a:avLst>
+          </a:prstGeom>
+          <a:solidFill>
+            <a:srgbClr val="FFFFFF"/>
+          </a:solidFill>
+          <a:ln w="12700">
+            <a:solidFill>
+              <a:srgbClr val="D3DEDC"/>
+            </a:solidFill>
+            <a:prstDash val="solid"/>
+          </a:ln>
+        </p:spPr>
+      </p:sp>
+      <p:sp>
+        <p:nvSpPr>
+          <p:cNvPr id="25" name="tile-v-1"/>
+          <p:cNvSpPr txBox="1"/>
+          <p:nvPr/>
+        </p:nvSpPr>
+        <p:spPr>
+          <a:xfrm>
+            <a:off x="8503920" y="2167128"/>
+            <a:ext cx="3017520" cy="868680"/>
+          </a:xfrm>
+          <a:prstGeom prst="rect">
+            <a:avLst/>
+          </a:prstGeom>
+          <a:noFill/>
+          <a:ln/>
+        </p:spPr>
+        <p:txBody>
+          <a:bodyPr wrap="square" lIns="0" tIns="0" rIns="0" bIns="0" rtlCol="0" anchor="ctr"/>
+          <a:lstStyle/>
+          <a:p>
+            <a:pPr indent="0" marL="0">
+              <a:buNone/>
+            </a:pPr>
+            <a:r>
+              <a:rPr lang="en-US" sz="4000" b="1" dirty="0">
+                <a:solidFill>
+                  <a:srgbClr val="0C8259"/>
+                </a:solidFill>
+                <a:latin typeface="Century Gothic" pitchFamily="34" charset="0"/>
+                <a:ea typeface="Century Gothic" pitchFamily="34" charset="-122"/>
+                <a:cs typeface="Century Gothic" pitchFamily="34" charset="-120"/>
+              </a:rPr>
+              <a:t>99%</a:t>
+            </a:r>
+            <a:endParaRPr lang="en-US" sz="4000" dirty="0"/>
+          </a:p>
+        </p:txBody>
+      </p:sp>
+      <p:sp>
+        <p:nvSpPr>
+          <p:cNvPr id="26" name="tile-l-1"/>
+          <p:cNvSpPr txBox="1"/>
+          <p:nvPr/>
+        </p:nvSpPr>
+        <p:spPr>
+          <a:xfrm>
+            <a:off x="8503920" y="3108960"/>
+            <a:ext cx="3017520" cy="685800"/>
+          </a:xfrm>
+          <a:prstGeom prst="rect">
+            <a:avLst/>
+          </a:prstGeom>
+          <a:noFill/>
+          <a:ln/>
+        </p:spPr>
+        <p:txBody>
+          <a:bodyPr wrap="square" lIns="0" tIns="0" rIns="0" bIns="0" rtlCol="0" anchor="t"/>
+          <a:lstStyle/>
+          <a:p>
+            <a:pPr indent="0" marL="0">
+              <a:buNone/>
+            </a:pPr>
+            <a:r>
+              <a:rPr lang="en-US" sz="1500" dirty="0">
+                <a:solidFill>
+                  <a:srgbClr val="4A5875"/>
+                </a:solidFill>
+                <a:latin typeface="Calibri" pitchFamily="34" charset="0"/>
+                <a:ea typeface="Calibri" pitchFamily="34" charset="-122"/>
+                <a:cs typeface="Calibri" pitchFamily="34" charset="-120"/>
+              </a:rPr>
+              <a:t>facts verifiably kept in the rewrite</a:t>
+            </a:r>
+            <a:endParaRPr lang="en-US" sz="1500" dirty="0"/>
+          </a:p>
+        </p:txBody>
+      </p:sp>
+      <p:sp>
+        <p:nvSpPr>
+          <p:cNvPr id="27" name="tile-2"/>
+          <p:cNvSpPr/>
+          <p:nvPr/>
+        </p:nvSpPr>
+        <p:spPr>
+          <a:xfrm>
+            <a:off x="731520" y="4206240"/>
+            <a:ext cx="3520440" cy="2011680"/>
+          </a:xfrm>
+          <a:prstGeom prst="roundRect">
+            <a:avLst>
+              <a:gd name="adj" fmla="val 9091"/>
+            </a:avLst>
+          </a:prstGeom>
+          <a:solidFill>
+            <a:srgbClr val="FFFFFF"/>
+          </a:solidFill>
+          <a:ln w="12700">
+            <a:solidFill>
+              <a:srgbClr val="D3DEDC"/>
+            </a:solidFill>
+            <a:prstDash val="solid"/>
+          </a:ln>
+        </p:spPr>
+      </p:sp>
+      <p:sp>
+        <p:nvSpPr>
+          <p:cNvPr id="28" name="tile-v-2"/>
+          <p:cNvSpPr txBox="1"/>
+          <p:nvPr/>
+        </p:nvSpPr>
+        <p:spPr>
+          <a:xfrm>
+            <a:off x="1005840" y="4407408"/>
+            <a:ext cx="3017520" cy="868680"/>
+          </a:xfrm>
+          <a:prstGeom prst="rect">
+            <a:avLst/>
+          </a:prstGeom>
+          <a:noFill/>
+          <a:ln/>
+        </p:spPr>
+        <p:txBody>
+          <a:bodyPr wrap="square" lIns="0" tIns="0" rIns="0" bIns="0" rtlCol="0" anchor="ctr"/>
+          <a:lstStyle/>
+          <a:p>
+            <a:pPr indent="0" marL="0">
+              <a:buNone/>
+            </a:pPr>
+            <a:r>
+              <a:rPr lang="en-US" sz="4000" b="1" dirty="0">
+                <a:solidFill>
+                  <a:srgbClr val="1C3EA6"/>
+                </a:solidFill>
+                <a:latin typeface="Century Gothic" pitchFamily="34" charset="0"/>
+                <a:ea typeface="Century Gothic" pitchFamily="34" charset="-122"/>
+                <a:cs typeface="Century Gothic" pitchFamily="34" charset="-120"/>
+              </a:rPr>
+              <a:t>11.0 → 6.3</a:t>
+            </a:r>
+            <a:endParaRPr lang="en-US" sz="4000" dirty="0"/>
+          </a:p>
+        </p:txBody>
+      </p:sp>
+      <p:sp>
+        <p:nvSpPr>
+          <p:cNvPr id="29" name="tile-l-2"/>
+          <p:cNvSpPr txBox="1"/>
+          <p:nvPr/>
+        </p:nvSpPr>
+        <p:spPr>
+          <a:xfrm>
+            <a:off x="1005840" y="5349240"/>
+            <a:ext cx="3017520" cy="685800"/>
+          </a:xfrm>
+          <a:prstGeom prst="rect">
+            <a:avLst/>
+          </a:prstGeom>
+          <a:noFill/>
+          <a:ln/>
+        </p:spPr>
+        <p:txBody>
+          <a:bodyPr wrap="square" lIns="0" tIns="0" rIns="0" bIns="0" rtlCol="0" anchor="t"/>
+          <a:lstStyle/>
+          <a:p>
+            <a:pPr indent="0" marL="0">
+              <a:buNone/>
+            </a:pPr>
+            <a:r>
+              <a:rPr lang="en-US" sz="1500" dirty="0">
+                <a:solidFill>
+                  <a:srgbClr val="4A5875"/>
+                </a:solidFill>
+                <a:latin typeface="Calibri" pitchFamily="34" charset="0"/>
+                <a:ea typeface="Calibri" pitchFamily="34" charset="-122"/>
+                <a:cs typeface="Calibri" pitchFamily="34" charset="-120"/>
+              </a:rPr>
+              <a:t>reading grade, original → Easier</a:t>
+            </a:r>
+            <a:endParaRPr lang="en-US" sz="1500" dirty="0"/>
+          </a:p>
+        </p:txBody>
+      </p:sp>
+      <p:sp>
+        <p:nvSpPr>
+          <p:cNvPr id="30" name="tile-3"/>
+          <p:cNvSpPr/>
+          <p:nvPr/>
+        </p:nvSpPr>
+        <p:spPr>
+          <a:xfrm>
+            <a:off x="4480560" y="4206240"/>
+            <a:ext cx="3520440" cy="2011680"/>
+          </a:xfrm>
+          <a:prstGeom prst="roundRect">
+            <a:avLst>
+              <a:gd name="adj" fmla="val 9091"/>
+            </a:avLst>
+          </a:prstGeom>
+          <a:solidFill>
+            <a:srgbClr val="FFFFFF"/>
+          </a:solidFill>
+          <a:ln w="12700">
+            <a:solidFill>
+              <a:srgbClr val="D3DEDC"/>
+            </a:solidFill>
+            <a:prstDash val="solid"/>
+          </a:ln>
+        </p:spPr>
+      </p:sp>
+      <p:sp>
+        <p:nvSpPr>
+          <p:cNvPr id="31" name="tile-v-3"/>
+          <p:cNvSpPr txBox="1"/>
+          <p:nvPr/>
+        </p:nvSpPr>
+        <p:spPr>
+          <a:xfrm>
+            <a:off x="4754880" y="4407408"/>
+            <a:ext cx="2103120" cy="868680"/>
+          </a:xfrm>
+          <a:prstGeom prst="rect">
+            <a:avLst/>
+          </a:prstGeom>
+          <a:noFill/>
+          <a:ln/>
+        </p:spPr>
+        <p:txBody>
+          <a:bodyPr wrap="square" lIns="0" tIns="0" rIns="0" bIns="0" rtlCol="0" anchor="ctr"/>
+          <a:lstStyle/>
+          <a:p>
+            <a:pPr indent="0" marL="0">
+              <a:buNone/>
+            </a:pPr>
+            <a:r>
+              <a:rPr lang="en-US" sz="3200" b="1" dirty="0">
+                <a:solidFill>
+                  <a:srgbClr val="0B8F8F"/>
+                </a:solidFill>
+                <a:latin typeface="Century Gothic" pitchFamily="34" charset="0"/>
+                <a:ea typeface="Century Gothic" pitchFamily="34" charset="-122"/>
+                <a:cs typeface="Century Gothic" pitchFamily="34" charset="-120"/>
+              </a:rPr>
+              <a:t>99.98%</a:t>
+            </a:r>
+            <a:endParaRPr lang="en-US" sz="3200" dirty="0"/>
+          </a:p>
+        </p:txBody>
+      </p:sp>
+      <p:sp>
+        <p:nvSpPr>
+          <p:cNvPr id="32" name="tile-l-3"/>
+          <p:cNvSpPr txBox="1"/>
+          <p:nvPr/>
+        </p:nvSpPr>
+        <p:spPr>
+          <a:xfrm>
+            <a:off x="4754880" y="5349240"/>
+            <a:ext cx="2103120" cy="685800"/>
+          </a:xfrm>
+          <a:prstGeom prst="rect">
+            <a:avLst/>
+          </a:prstGeom>
+          <a:noFill/>
+          <a:ln/>
+        </p:spPr>
+        <p:txBody>
+          <a:bodyPr wrap="square" lIns="0" tIns="0" rIns="0" bIns="0" rtlCol="0" anchor="t"/>
+          <a:lstStyle/>
+          <a:p>
+            <a:pPr indent="0" marL="0">
+              <a:buNone/>
+            </a:pPr>
+            <a:r>
+              <a:rPr lang="en-US" sz="1500" dirty="0">
+                <a:solidFill>
+                  <a:srgbClr val="4A5875"/>
+                </a:solidFill>
+                <a:latin typeface="Calibri" pitchFamily="34" charset="0"/>
+                <a:ea typeface="Calibri" pitchFamily="34" charset="-122"/>
+                <a:cs typeface="Calibri" pitchFamily="34" charset="-120"/>
+              </a:rPr>
+              <a:t>page reading, even on this hard photo</a:t>
+            </a:r>
+            <a:endParaRPr lang="en-US" sz="1500" dirty="0"/>
+          </a:p>
+        </p:txBody>
+      </p:sp>
+      <p:pic>
+        <p:nvPicPr>
+          <p:cNvPr id="33" name="hard-photo" descr="C:\Users\rahee\AppData\Local\Temp\claude\C--Users-rahee-Desktop-AICon\b0d77b2b-594c-418c-bce0-e4f2d230c288\scratchpad\deck-assets\hard.jpg">    </p:cNvPr>
+          <p:cNvPicPr>
+            <a:picLocks noChangeAspect="1"/>
+          </p:cNvPicPr>
+          <p:nvPr/>
+        </p:nvPicPr>
+        <p:blipFill>
+          <a:blip r:embed="rId1"/>
+          <a:stretch>
+            <a:fillRect/>
+          </a:stretch>
+        </p:blipFill>
+        <p:spPr>
+          <a:xfrm>
+            <a:off x="6967728" y="4462272"/>
+            <a:ext cx="822960" cy="1078992"/>
+          </a:xfrm>
+          <a:prstGeom prst="rect">
+            <a:avLst/>
+          </a:prstGeom>
+        </p:spPr>
+      </p:pic>
+      <p:sp>
+        <p:nvSpPr>
+          <p:cNvPr id="34" name="tile-4"/>
+          <p:cNvSpPr/>
+          <p:nvPr/>
+        </p:nvSpPr>
+        <p:spPr>
+          <a:xfrm>
+            <a:off x="8229600" y="4206240"/>
+            <a:ext cx="3520440" cy="2011680"/>
+          </a:xfrm>
+          <a:prstGeom prst="roundRect">
+            <a:avLst>
+              <a:gd name="adj" fmla="val 9091"/>
+            </a:avLst>
+          </a:prstGeom>
+          <a:solidFill>
+            <a:srgbClr val="FFFFFF"/>
+          </a:solidFill>
+          <a:ln w="12700">
+            <a:solidFill>
+              <a:srgbClr val="D3DEDC"/>
+            </a:solidFill>
+            <a:prstDash val="solid"/>
+          </a:ln>
+        </p:spPr>
+      </p:sp>
+      <p:sp>
+        <p:nvSpPr>
+          <p:cNvPr id="35" name="tile-v-4"/>
+          <p:cNvSpPr txBox="1"/>
+          <p:nvPr/>
+        </p:nvSpPr>
+        <p:spPr>
+          <a:xfrm>
+            <a:off x="8503920" y="4407408"/>
+            <a:ext cx="3017520" cy="868680"/>
+          </a:xfrm>
+          <a:prstGeom prst="rect">
+            <a:avLst/>
+          </a:prstGeom>
+          <a:noFill/>
+          <a:ln/>
+        </p:spPr>
+        <p:txBody>
+          <a:bodyPr wrap="square" lIns="0" tIns="0" rIns="0" bIns="0" rtlCol="0" anchor="ctr"/>
+          <a:lstStyle/>
+          <a:p>
+            <a:pPr indent="0" marL="0">
+              <a:buNone/>
+            </a:pPr>
+            <a:r>
+              <a:rPr lang="en-US" sz="4000" b="1" dirty="0">
+                <a:solidFill>
+                  <a:srgbClr val="0D1B3E"/>
+                </a:solidFill>
+                <a:latin typeface="Century Gothic" pitchFamily="34" charset="0"/>
+                <a:ea typeface="Century Gothic" pitchFamily="34" charset="-122"/>
+                <a:cs typeface="Century Gothic" pitchFamily="34" charset="-120"/>
+              </a:rPr>
+              <a:t>26 s</a:t>
+            </a:r>
+            <a:endParaRPr lang="en-US" sz="4000" dirty="0"/>
+          </a:p>
+        </p:txBody>
+      </p:sp>
+      <p:sp>
+        <p:nvSpPr>
+          <p:cNvPr id="36" name="tile-l-4"/>
+          <p:cNvSpPr txBox="1"/>
+          <p:nvPr/>
+        </p:nvSpPr>
+        <p:spPr>
+          <a:xfrm>
+            <a:off x="8503920" y="5349240"/>
+            <a:ext cx="3017520" cy="685800"/>
+          </a:xfrm>
+          <a:prstGeom prst="rect">
+            <a:avLst/>
+          </a:prstGeom>
+          <a:noFill/>
+          <a:ln/>
+        </p:spPr>
+        <p:txBody>
+          <a:bodyPr wrap="square" lIns="0" tIns="0" rIns="0" bIns="0" rtlCol="0" anchor="t"/>
+          <a:lstStyle/>
+          <a:p>
+            <a:pPr indent="0" marL="0">
+              <a:buNone/>
+            </a:pPr>
+            <a:r>
+              <a:rPr lang="en-US" sz="1500" dirty="0">
+                <a:solidFill>
+                  <a:srgbClr val="4A5875"/>
+                </a:solidFill>
+                <a:latin typeface="Calibri" pitchFamily="34" charset="0"/>
+                <a:ea typeface="Calibri" pitchFamily="34" charset="-122"/>
+                <a:cs typeface="Calibri" pitchFamily="34" charset="-120"/>
+              </a:rPr>
+              <a:t>to make a lesson, on free tiers</a:t>
+            </a:r>
+            <a:endParaRPr lang="en-US" sz="1500" dirty="0"/>
+          </a:p>
+        </p:txBody>
+      </p:sp>
+      <p:sp>
+        <p:nvSpPr>
+          <p:cNvPr id="37" name="source"/>
+          <p:cNvSpPr txBox="1"/>
+          <p:nvPr/>
+        </p:nvSpPr>
+        <p:spPr>
+          <a:xfrm>
+            <a:off x="731520" y="6355080"/>
+            <a:ext cx="9052560" cy="274320"/>
+          </a:xfrm>
+          <a:prstGeom prst="rect">
+            <a:avLst/>
+          </a:prstGeom>
+          <a:noFill/>
+          <a:ln/>
+        </p:spPr>
+        <p:txBody>
+          <a:bodyPr wrap="square" lIns="0" tIns="0" rIns="0" bIns="0" rtlCol="0" anchor="ctr"/>
+          <a:lstStyle/>
+          <a:p>
+            <a:pPr indent="0" marL="0">
+              <a:buNone/>
+            </a:pPr>
+            <a:r>
+              <a:rPr lang="en-US" sz="1100" i="1" dirty="0">
+                <a:solidFill>
+                  <a:srgbClr val="4A5875"/>
+                </a:solidFill>
+                <a:latin typeface="Calibri" pitchFamily="34" charset="0"/>
+                <a:ea typeface="Calibri" pitchFamily="34" charset="-122"/>
+                <a:cs typeface="Calibri" pitchFamily="34" charset="-120"/>
+              </a:rPr>
+              <a:t>OpenStax textbook pages (CC BY 4.0) · every number comes from a script in our repo’s eval/ folder · synthetic test data is labelled</a:t>
+            </a:r>
+            <a:endParaRPr lang="en-US" sz="1100" dirty="0"/>
+          </a:p>
+        </p:txBody>
+      </p:sp>
+      <p:sp>
+        <p:nvSpPr>
+          <p:cNvPr id="38" name="!!dot-0"/>
+          <p:cNvSpPr/>
+          <p:nvPr/>
+        </p:nvSpPr>
+        <p:spPr>
+          <a:xfrm>
+            <a:off x="10012680" y="6400800"/>
+            <a:ext cx="100584" cy="100584"/>
+          </a:xfrm>
+          <a:prstGeom prst="ellipse">
+            <a:avLst/>
+          </a:prstGeom>
+          <a:solidFill>
+            <a:srgbClr val="C3CDDD"/>
+          </a:solidFill>
+          <a:ln w="12700">
+            <a:solidFill>
+              <a:srgbClr val="C3CDDD"/>
+            </a:solidFill>
+            <a:prstDash val="solid"/>
+          </a:ln>
+        </p:spPr>
+      </p:sp>
+      <p:sp>
+        <p:nvSpPr>
+          <p:cNvPr id="39" name="!!dot-1"/>
+          <p:cNvSpPr/>
+          <p:nvPr/>
+        </p:nvSpPr>
+        <p:spPr>
+          <a:xfrm>
+            <a:off x="10250424" y="6400800"/>
+            <a:ext cx="100584" cy="100584"/>
+          </a:xfrm>
+          <a:prstGeom prst="ellipse">
+            <a:avLst/>
+          </a:prstGeom>
+          <a:solidFill>
+            <a:srgbClr val="C3CDDD"/>
+          </a:solidFill>
+          <a:ln w="12700">
+            <a:solidFill>
+              <a:srgbClr val="C3CDDD"/>
+            </a:solidFill>
+            <a:prstDash val="solid"/>
+          </a:ln>
+        </p:spPr>
+      </p:sp>
+      <p:sp>
+        <p:nvSpPr>
+          <p:cNvPr id="40" name="!!dot-2"/>
+          <p:cNvSpPr/>
+          <p:nvPr/>
+        </p:nvSpPr>
+        <p:spPr>
+          <a:xfrm>
+            <a:off x="10488168" y="6400800"/>
+            <a:ext cx="100584" cy="100584"/>
+          </a:xfrm>
+          <a:prstGeom prst="ellipse">
+            <a:avLst/>
+          </a:prstGeom>
+          <a:solidFill>
+            <a:srgbClr val="C3CDDD"/>
+          </a:solidFill>
+          <a:ln w="12700">
+            <a:solidFill>
+              <a:srgbClr val="C3CDDD"/>
+            </a:solidFill>
+            <a:prstDash val="solid"/>
+          </a:ln>
+        </p:spPr>
+      </p:sp>
+      <p:sp>
+        <p:nvSpPr>
+          <p:cNvPr id="41" name="!!dot-3"/>
+          <p:cNvSpPr/>
+          <p:nvPr/>
+        </p:nvSpPr>
+        <p:spPr>
+          <a:xfrm>
+            <a:off x="10725912" y="6400800"/>
+            <a:ext cx="100584" cy="100584"/>
+          </a:xfrm>
+          <a:prstGeom prst="ellipse">
+            <a:avLst/>
+          </a:prstGeom>
+          <a:solidFill>
+            <a:srgbClr val="C3CDDD"/>
+          </a:solidFill>
+          <a:ln w="12700">
+            <a:solidFill>
+              <a:srgbClr val="C3CDDD"/>
+            </a:solidFill>
+            <a:prstDash val="solid"/>
+          </a:ln>
+        </p:spPr>
+      </p:sp>
+      <p:sp>
+        <p:nvSpPr>
+          <p:cNvPr id="42" name="!!dot-4"/>
+          <p:cNvSpPr/>
+          <p:nvPr/>
+        </p:nvSpPr>
+        <p:spPr>
+          <a:xfrm>
+            <a:off x="10963656" y="6400800"/>
+            <a:ext cx="100584" cy="100584"/>
+          </a:xfrm>
+          <a:prstGeom prst="ellipse">
+            <a:avLst/>
+          </a:prstGeom>
+          <a:solidFill>
+            <a:srgbClr val="C3CDDD"/>
+          </a:solidFill>
+          <a:ln w="12700">
+            <a:solidFill>
+              <a:srgbClr val="C3CDDD"/>
+            </a:solidFill>
+            <a:prstDash val="solid"/>
+          </a:ln>
+        </p:spPr>
+      </p:sp>
+      <p:sp>
+        <p:nvSpPr>
+          <p:cNvPr id="43" name="!!dot-5"/>
+          <p:cNvSpPr/>
+          <p:nvPr/>
+        </p:nvSpPr>
+        <p:spPr>
+          <a:xfrm>
+            <a:off x="11201400" y="6400800"/>
+            <a:ext cx="100584" cy="100584"/>
+          </a:xfrm>
+          <a:prstGeom prst="ellipse">
+            <a:avLst/>
+          </a:prstGeom>
+          <a:solidFill>
+            <a:srgbClr val="C3CDDD"/>
+          </a:solidFill>
+          <a:ln w="12700">
+            <a:solidFill>
+              <a:srgbClr val="C3CDDD"/>
+            </a:solidFill>
+            <a:prstDash val="solid"/>
+          </a:ln>
+        </p:spPr>
+      </p:sp>
+      <p:sp>
+        <p:nvSpPr>
+          <p:cNvPr id="44" name="!!dot-6"/>
+          <p:cNvSpPr/>
+          <p:nvPr/>
+        </p:nvSpPr>
+        <p:spPr>
+          <a:xfrm>
+            <a:off x="11439144" y="6400800"/>
+            <a:ext cx="155448" cy="155448"/>
+          </a:xfrm>
+          <a:prstGeom prst="ellipse">
+            <a:avLst/>
+          </a:prstGeom>
+          <a:solidFill>
+            <a:srgbClr val="F2A40E"/>
+          </a:solidFill>
+          <a:ln w="12700">
+            <a:solidFill>
+              <a:srgbClr val="F2A40E"/>
+            </a:solidFill>
+            <a:prstDash val="solid"/>
+          </a:ln>
+        </p:spPr>
+      </p:sp>
+      <p:sp>
+        <p:nvSpPr>
+          <p:cNvPr id="45" name="!!dot-7"/>
+          <p:cNvSpPr/>
+          <p:nvPr/>
+        </p:nvSpPr>
+        <p:spPr>
+          <a:xfrm>
+            <a:off x="11676888" y="6400800"/>
+            <a:ext cx="100584" cy="100584"/>
+          </a:xfrm>
+          <a:prstGeom prst="ellipse">
+            <a:avLst/>
+          </a:prstGeom>
+          <a:solidFill>
+            <a:srgbClr val="C3CDDD"/>
+          </a:solidFill>
+          <a:ln w="12700">
+            <a:solidFill>
+              <a:srgbClr val="C3CDDD"/>
+            </a:solidFill>
+            <a:prstDash val="solid"/>
+          </a:ln>
+        </p:spPr>
+      </p:sp>
+    </p:spTree>
+  </p:cSld>
+  <p:clrMapOvr>
+    <a:masterClrMapping/>
+  </p:clrMapOvr>
+  <mc:AlternateContent xmlns:mc="http://schemas.openxmlformats.org/markup-compatibility/2006">
+    <mc:Choice xmlns:p159="http://schemas.microsoft.com/office/powerpoint/2015/09/main" Requires="p159">
+      <p:transition xmlns:p14="http://schemas.microsoft.com/office/powerpoint/2010/main" spd="slow" p14:dur="1100">
+        <p159:morph option="byObject"/>
+      </p:transition>
+    </mc:Choice>
+    <mc:Fallback>
+      <p:transition spd="slow">
+        <p:fade/>
+      </p:transition>
+    </mc:Fallback>
+  </mc:AlternateContent>
+</p:sld>
+</file>
+
+<file path=ppt/slides/slide8.xml><?xml version="1.0" encoding="utf-8"?>
+<p:sld xmlns:a="http://schemas.openxmlformats.org/drawingml/2006/main" xmlns:r="http://schemas.openxmlformats.org/officeDocument/2006/relationships" xmlns:p="http://schemas.openxmlformats.org/presentationml/2006/main">
+  <p:cSld name="Slide 8">
+    <p:bg>
+      <p:bgPr>
+        <a:solidFill>
+          <a:srgbClr val="0D1B3E"/>
+        </a:solidFill>
+      </p:bgPr>
+    </p:bg>
+    <p:spTree>
+      <p:nvGrpSpPr>
+        <p:cNvPr id="1" name=""/>
+        <p:cNvGrpSpPr/>
+        <p:nvPr/>
+      </p:nvGrpSpPr>
+      <p:grpSpPr>
+        <a:xfrm>
+          <a:off x="0" y="0"/>
+          <a:ext cx="0" cy="0"/>
+          <a:chOff x="0" y="0"/>
+          <a:chExt cx="0" cy="0"/>
+        </a:xfrm>
+      </p:grpSpPr>
+      <p:sp>
+        <p:nvSpPr>
+          <p:cNvPr id="2" name="!!panel"/>
+          <p:cNvSpPr/>
+          <p:nvPr/>
+        </p:nvSpPr>
+        <p:spPr>
+          <a:xfrm>
+            <a:off x="0" y="0"/>
+            <a:ext cx="12191695" cy="6858000"/>
+          </a:xfrm>
+          <a:prstGeom prst="roundRect">
+            <a:avLst/>
+          </a:prstGeom>
+          <a:solidFill>
+            <a:srgbClr val="0D1B3E"/>
+          </a:solidFill>
+          <a:ln w="12700">
+            <a:solidFill>
+              <a:srgbClr val="0D1B3E"/>
+            </a:solidFill>
+            <a:prstDash val="solid"/>
+          </a:ln>
+        </p:spPr>
+      </p:sp>
+      <p:sp>
+        <p:nvSpPr>
+          <p:cNvPr id="3" name="!!ray-0"/>
+          <p:cNvSpPr/>
+          <p:nvPr/>
+        </p:nvSpPr>
+        <p:spPr>
+          <a:xfrm>
+            <a:off x="10730484" y="3154680"/>
+            <a:ext cx="704088" cy="914"/>
+          </a:xfrm>
+          <a:prstGeom prst="line">
+            <a:avLst/>
+          </a:prstGeom>
+          <a:noFill/>
+          <a:ln w="36322">
+            <a:solidFill>
+              <a:srgbClr val="F2A40E"/>
+            </a:solidFill>
+            <a:prstDash val="solid"/>
+          </a:ln>
+        </p:spPr>
+      </p:sp>
+      <p:sp>
+        <p:nvSpPr>
+          <p:cNvPr id="4" name="!!ray-1"/>
+          <p:cNvSpPr/>
+          <p:nvPr/>
+        </p:nvSpPr>
+        <p:spPr>
+          <a:xfrm>
+            <a:off x="10548562" y="3833622"/>
+            <a:ext cx="609758" cy="352044"/>
+          </a:xfrm>
+          <a:prstGeom prst="line">
+            <a:avLst/>
+          </a:prstGeom>
+          <a:noFill/>
+          <a:ln w="36322">
+            <a:solidFill>
+              <a:srgbClr val="F2A40E">
+                <a:alpha val="55000"/>
+              </a:srgbClr>
+            </a:solidFill>
+            <a:prstDash val="solid"/>
+          </a:ln>
+        </p:spPr>
+      </p:sp>
+      <p:sp>
+        <p:nvSpPr>
+          <p:cNvPr id="5" name="!!ray-2"/>
+          <p:cNvSpPr/>
+          <p:nvPr/>
+        </p:nvSpPr>
+        <p:spPr>
+          <a:xfrm>
+            <a:off x="10051542" y="4330642"/>
+            <a:ext cx="352044" cy="609758"/>
+          </a:xfrm>
+          <a:prstGeom prst="line">
+            <a:avLst/>
+          </a:prstGeom>
+          <a:noFill/>
+          <a:ln w="36322">
+            <a:solidFill>
+              <a:srgbClr val="F2A40E"/>
+            </a:solidFill>
+            <a:prstDash val="solid"/>
+          </a:ln>
+        </p:spPr>
+      </p:sp>
+      <p:sp>
+        <p:nvSpPr>
+          <p:cNvPr id="6" name="!!ray-3"/>
+          <p:cNvSpPr/>
+          <p:nvPr/>
+        </p:nvSpPr>
+        <p:spPr>
+          <a:xfrm>
+            <a:off x="9372600" y="4512564"/>
+            <a:ext cx="914" cy="704088"/>
+          </a:xfrm>
+          <a:prstGeom prst="line">
+            <a:avLst/>
+          </a:prstGeom>
+          <a:noFill/>
+          <a:ln w="36322">
+            <a:solidFill>
+              <a:srgbClr val="F2A40E">
+                <a:alpha val="55000"/>
+              </a:srgbClr>
+            </a:solidFill>
+            <a:prstDash val="solid"/>
+          </a:ln>
+        </p:spPr>
+      </p:sp>
+      <p:sp>
+        <p:nvSpPr>
           <p:cNvPr id="7" name="!!ray-4"/>
           <p:cNvSpPr/>
           <p:nvPr/>
@@ -9514,11 +11636,11 @@
           <a:bodyPr wrap="square" lIns="0" tIns="0" rIns="0" bIns="0" rtlCol="0" anchor="ctr"/>
           <a:lstStyle/>
           <a:p>
-            <a:pPr marL="0" indent="0">
+            <a:pPr indent="0" marL="0">
               <a:buNone/>
             </a:pPr>
             <a:r>
-              <a:rPr lang="en-US" sz="1300" b="1" kern="0" spc="300" dirty="0">
+              <a:rPr lang="en-US" sz="1300" b="1" spc="300" kern="0" dirty="0">
                 <a:solidFill>
                   <a:srgbClr val="F2A40E"/>
                 </a:solidFill>
@@ -9526,7 +11648,7 @@
                 <a:ea typeface="Calibri" pitchFamily="34" charset="-122"/>
                 <a:cs typeface="Calibri" pitchFamily="34" charset="-120"/>
               </a:rPr>
-              <a:t>06 · WHO ADOPTS IT, AND WHAT WE BUILT</a:t>
+              <a:t>07 · WHO ADOPTS IT, AND WHAT WE BUILT</a:t>
             </a:r>
             <a:endParaRPr lang="en-US" sz="1300" dirty="0"/>
           </a:p>
@@ -9553,7 +11675,7 @@
           <a:bodyPr wrap="square" lIns="0" tIns="0" rIns="0" bIns="0" rtlCol="0" anchor="t"/>
           <a:lstStyle/>
           <a:p>
-            <a:pPr marL="0" indent="0">
+            <a:pPr indent="0" marL="0">
               <a:buNone/>
             </a:pPr>
             <a:r>
@@ -9617,7 +11739,7 @@
           <a:bodyPr wrap="square" lIns="0" tIns="0" rIns="0" bIns="0" rtlCol="0" anchor="ctr"/>
           <a:lstStyle/>
           <a:p>
-            <a:pPr marL="0" indent="0">
+            <a:pPr indent="0" marL="0">
               <a:buNone/>
             </a:pPr>
             <a:r>
@@ -9681,7 +11803,7 @@
           <a:bodyPr wrap="square" lIns="0" tIns="0" rIns="0" bIns="0" rtlCol="0" anchor="ctr"/>
           <a:lstStyle/>
           <a:p>
-            <a:pPr marL="0" indent="0">
+            <a:pPr indent="0" marL="0">
               <a:buNone/>
             </a:pPr>
             <a:r>
@@ -9745,7 +11867,7 @@
           <a:bodyPr wrap="square" lIns="0" tIns="0" rIns="0" bIns="0" rtlCol="0" anchor="ctr"/>
           <a:lstStyle/>
           <a:p>
-            <a:pPr marL="0" indent="0">
+            <a:pPr indent="0" marL="0">
               <a:buNone/>
             </a:pPr>
             <a:r>
@@ -9757,7 +11879,7 @@
                 <a:ea typeface="Calibri" pitchFamily="34" charset="-122"/>
                 <a:cs typeface="Calibri" pitchFamily="34" charset="-120"/>
               </a:rPr>
-              <a:t>School chains with Urdu-medium students in English classes</a:t>
+              <a:t>School chains with Urdu- and Pashto-medium students</a:t>
             </a:r>
             <a:endParaRPr lang="en-US" sz="1800" dirty="0"/>
           </a:p>
@@ -9809,7 +11931,7 @@
           <a:bodyPr wrap="square" lIns="0" tIns="0" rIns="0" bIns="0" rtlCol="0" anchor="ctr"/>
           <a:lstStyle/>
           <a:p>
-            <a:pPr marL="0" indent="0">
+            <a:pPr indent="0" marL="0">
               <a:buNone/>
             </a:pPr>
             <a:r>
@@ -9835,7 +11957,7 @@
         </p:nvSpPr>
         <p:spPr>
           <a:xfrm>
-            <a:off x="731520" y="4526280"/>
+            <a:off x="731520" y="4434840"/>
             <a:ext cx="2057400" cy="1005840"/>
           </a:xfrm>
           <a:prstGeom prst="roundRect">
@@ -9862,7 +11984,7 @@
         </p:nvSpPr>
         <p:spPr>
           <a:xfrm>
-            <a:off x="914400" y="4617720"/>
+            <a:off x="914400" y="4526280"/>
             <a:ext cx="1737360" cy="411480"/>
           </a:xfrm>
           <a:prstGeom prst="rect">
@@ -9875,7 +11997,7 @@
           <a:bodyPr wrap="square" lIns="0" tIns="0" rIns="0" bIns="0" rtlCol="0" anchor="ctr"/>
           <a:lstStyle/>
           <a:p>
-            <a:pPr marL="0" indent="0">
+            <a:pPr indent="0" marL="0">
               <a:buNone/>
             </a:pPr>
             <a:r>
@@ -9901,7 +12023,7 @@
         </p:nvSpPr>
         <p:spPr>
           <a:xfrm>
-            <a:off x="914400" y="5029200"/>
+            <a:off x="914400" y="4937760"/>
             <a:ext cx="1737360" cy="411480"/>
           </a:xfrm>
           <a:prstGeom prst="rect">
@@ -9914,7 +12036,7 @@
           <a:bodyPr wrap="square" lIns="0" tIns="0" rIns="0" bIns="0" rtlCol="0" anchor="ctr"/>
           <a:lstStyle/>
           <a:p>
-            <a:pPr marL="0" indent="0">
+            <a:pPr indent="0" marL="0">
               <a:buNone/>
             </a:pPr>
             <a:r>
@@ -9940,7 +12062,7 @@
         </p:nvSpPr>
         <p:spPr>
           <a:xfrm>
-            <a:off x="2971800" y="4526280"/>
+            <a:off x="2971800" y="4434840"/>
             <a:ext cx="2057400" cy="1005840"/>
           </a:xfrm>
           <a:prstGeom prst="roundRect">
@@ -9967,7 +12089,7 @@
         </p:nvSpPr>
         <p:spPr>
           <a:xfrm>
-            <a:off x="3154680" y="4617720"/>
+            <a:off x="3154680" y="4526280"/>
             <a:ext cx="1737360" cy="411480"/>
           </a:xfrm>
           <a:prstGeom prst="rect">
@@ -9980,7 +12102,7 @@
           <a:bodyPr wrap="square" lIns="0" tIns="0" rIns="0" bIns="0" rtlCol="0" anchor="ctr"/>
           <a:lstStyle/>
           <a:p>
-            <a:pPr marL="0" indent="0">
+            <a:pPr indent="0" marL="0">
               <a:buNone/>
             </a:pPr>
             <a:r>
@@ -10006,7 +12128,7 @@
         </p:nvSpPr>
         <p:spPr>
           <a:xfrm>
-            <a:off x="3154680" y="5029200"/>
+            <a:off x="3154680" y="4937760"/>
             <a:ext cx="1737360" cy="411480"/>
           </a:xfrm>
           <a:prstGeom prst="rect">
@@ -10019,7 +12141,7 @@
           <a:bodyPr wrap="square" lIns="0" tIns="0" rIns="0" bIns="0" rtlCol="0" anchor="ctr"/>
           <a:lstStyle/>
           <a:p>
-            <a:pPr marL="0" indent="0">
+            <a:pPr indent="0" marL="0">
               <a:buNone/>
             </a:pPr>
             <a:r>
@@ -10045,7 +12167,7 @@
         </p:nvSpPr>
         <p:spPr>
           <a:xfrm>
-            <a:off x="5212080" y="4526280"/>
+            <a:off x="5212080" y="4434840"/>
             <a:ext cx="2057400" cy="1005840"/>
           </a:xfrm>
           <a:prstGeom prst="roundRect">
@@ -10072,7 +12194,7 @@
         </p:nvSpPr>
         <p:spPr>
           <a:xfrm>
-            <a:off x="5394960" y="4617720"/>
+            <a:off x="5394960" y="4526280"/>
             <a:ext cx="1737360" cy="411480"/>
           </a:xfrm>
           <a:prstGeom prst="rect">
@@ -10085,7 +12207,7 @@
           <a:bodyPr wrap="square" lIns="0" tIns="0" rIns="0" bIns="0" rtlCol="0" anchor="ctr"/>
           <a:lstStyle/>
           <a:p>
-            <a:pPr marL="0" indent="0">
+            <a:pPr indent="0" marL="0">
               <a:buNone/>
             </a:pPr>
             <a:r>
@@ -10111,7 +12233,7 @@
         </p:nvSpPr>
         <p:spPr>
           <a:xfrm>
-            <a:off x="5394960" y="5029200"/>
+            <a:off x="5394960" y="4937760"/>
             <a:ext cx="1737360" cy="411480"/>
           </a:xfrm>
           <a:prstGeom prst="rect">
@@ -10124,7 +12246,7 @@
           <a:bodyPr wrap="square" lIns="0" tIns="0" rIns="0" bIns="0" rtlCol="0" anchor="ctr"/>
           <a:lstStyle/>
           <a:p>
-            <a:pPr marL="0" indent="0">
+            <a:pPr indent="0" marL="0">
               <a:buNone/>
             </a:pPr>
             <a:r>
@@ -10150,7 +12272,7 @@
         </p:nvSpPr>
         <p:spPr>
           <a:xfrm>
-            <a:off x="731520" y="5806440"/>
+            <a:off x="731520" y="5669280"/>
             <a:ext cx="8686800" cy="411480"/>
           </a:xfrm>
           <a:prstGeom prst="rect">
@@ -10163,7 +12285,7 @@
           <a:bodyPr wrap="square" lIns="0" tIns="0" rIns="0" bIns="0" rtlCol="0" anchor="ctr"/>
           <a:lstStyle/>
           <a:p>
-            <a:pPr marL="0" indent="0">
+            <a:pPr indent="0" marL="0">
               <a:buNone/>
             </a:pPr>
             <a:r>
@@ -10183,13 +12305,52 @@
       </p:sp>
       <p:sp>
         <p:nvSpPr>
-          <p:cNvPr id="37" name="!!dot-0"/>
-          <p:cNvSpPr/>
-          <p:nvPr/>
-        </p:nvSpPr>
-        <p:spPr>
-          <a:xfrm>
-            <a:off x="10241280" y="6400800"/>
+          <p:cNvPr id="37" name="repo"/>
+          <p:cNvSpPr txBox="1"/>
+          <p:nvPr/>
+        </p:nvSpPr>
+        <p:spPr>
+          <a:xfrm>
+            <a:off x="731520" y="6172200"/>
+            <a:ext cx="5486400" cy="320040"/>
+          </a:xfrm>
+          <a:prstGeom prst="rect">
+            <a:avLst/>
+          </a:prstGeom>
+          <a:noFill/>
+          <a:ln/>
+        </p:spPr>
+        <p:txBody>
+          <a:bodyPr wrap="square" lIns="0" tIns="0" rIns="0" bIns="0" rtlCol="0" anchor="ctr"/>
+          <a:lstStyle/>
+          <a:p>
+            <a:pPr indent="0" marL="0">
+              <a:buNone/>
+            </a:pPr>
+            <a:r>
+              <a:rPr lang="en-US" sz="1300" dirty="0">
+                <a:solidFill>
+                  <a:srgbClr val="C9D4F2"/>
+                </a:solidFill>
+                <a:latin typeface="Calibri" pitchFamily="34" charset="0"/>
+                <a:ea typeface="Calibri" pitchFamily="34" charset="-122"/>
+                <a:cs typeface="Calibri" pitchFamily="34" charset="-120"/>
+              </a:rPr>
+              <a:t>github.com/raheemxghumman/roshni</a:t>
+            </a:r>
+            <a:endParaRPr lang="en-US" sz="1300" dirty="0"/>
+          </a:p>
+        </p:txBody>
+      </p:sp>
+      <p:sp>
+        <p:nvSpPr>
+          <p:cNvPr id="38" name="!!dot-0"/>
+          <p:cNvSpPr/>
+          <p:nvPr/>
+        </p:nvSpPr>
+        <p:spPr>
+          <a:xfrm>
+            <a:off x="10012680" y="6400800"/>
             <a:ext cx="100584" cy="100584"/>
           </a:xfrm>
           <a:prstGeom prst="ellipse">
@@ -10208,13 +12369,13 @@
       </p:sp>
       <p:sp>
         <p:nvSpPr>
-          <p:cNvPr id="38" name="!!dot-1"/>
-          <p:cNvSpPr/>
-          <p:nvPr/>
-        </p:nvSpPr>
-        <p:spPr>
-          <a:xfrm>
-            <a:off x="10479024" y="6400800"/>
+          <p:cNvPr id="39" name="!!dot-1"/>
+          <p:cNvSpPr/>
+          <p:nvPr/>
+        </p:nvSpPr>
+        <p:spPr>
+          <a:xfrm>
+            <a:off x="10250424" y="6400800"/>
             <a:ext cx="100584" cy="100584"/>
           </a:xfrm>
           <a:prstGeom prst="ellipse">
@@ -10233,13 +12394,13 @@
       </p:sp>
       <p:sp>
         <p:nvSpPr>
-          <p:cNvPr id="39" name="!!dot-2"/>
-          <p:cNvSpPr/>
-          <p:nvPr/>
-        </p:nvSpPr>
-        <p:spPr>
-          <a:xfrm>
-            <a:off x="10716768" y="6400800"/>
+          <p:cNvPr id="40" name="!!dot-2"/>
+          <p:cNvSpPr/>
+          <p:nvPr/>
+        </p:nvSpPr>
+        <p:spPr>
+          <a:xfrm>
+            <a:off x="10488168" y="6400800"/>
             <a:ext cx="100584" cy="100584"/>
           </a:xfrm>
           <a:prstGeom prst="ellipse">
@@ -10258,13 +12419,13 @@
       </p:sp>
       <p:sp>
         <p:nvSpPr>
-          <p:cNvPr id="40" name="!!dot-3"/>
-          <p:cNvSpPr/>
-          <p:nvPr/>
-        </p:nvSpPr>
-        <p:spPr>
-          <a:xfrm>
-            <a:off x="10954512" y="6400800"/>
+          <p:cNvPr id="41" name="!!dot-3"/>
+          <p:cNvSpPr/>
+          <p:nvPr/>
+        </p:nvSpPr>
+        <p:spPr>
+          <a:xfrm>
+            <a:off x="10725912" y="6400800"/>
             <a:ext cx="100584" cy="100584"/>
           </a:xfrm>
           <a:prstGeom prst="ellipse">
@@ -10283,13 +12444,13 @@
       </p:sp>
       <p:sp>
         <p:nvSpPr>
-          <p:cNvPr id="41" name="!!dot-4"/>
-          <p:cNvSpPr/>
-          <p:nvPr/>
-        </p:nvSpPr>
-        <p:spPr>
-          <a:xfrm>
-            <a:off x="11192256" y="6400800"/>
+          <p:cNvPr id="42" name="!!dot-4"/>
+          <p:cNvSpPr/>
+          <p:nvPr/>
+        </p:nvSpPr>
+        <p:spPr>
+          <a:xfrm>
+            <a:off x="10963656" y="6400800"/>
             <a:ext cx="100584" cy="100584"/>
           </a:xfrm>
           <a:prstGeom prst="ellipse">
@@ -10308,13 +12469,13 @@
       </p:sp>
       <p:sp>
         <p:nvSpPr>
-          <p:cNvPr id="42" name="!!dot-5"/>
-          <p:cNvSpPr/>
-          <p:nvPr/>
-        </p:nvSpPr>
-        <p:spPr>
-          <a:xfrm>
-            <a:off x="11430000" y="6400800"/>
+          <p:cNvPr id="43" name="!!dot-5"/>
+          <p:cNvSpPr/>
+          <p:nvPr/>
+        </p:nvSpPr>
+        <p:spPr>
+          <a:xfrm>
+            <a:off x="11201400" y="6400800"/>
             <a:ext cx="100584" cy="100584"/>
           </a:xfrm>
           <a:prstGeom prst="ellipse">
@@ -10333,13 +12494,38 @@
       </p:sp>
       <p:sp>
         <p:nvSpPr>
-          <p:cNvPr id="43" name="!!dot-6"/>
-          <p:cNvSpPr/>
-          <p:nvPr/>
-        </p:nvSpPr>
-        <p:spPr>
-          <a:xfrm>
-            <a:off x="11667744" y="6400800"/>
+          <p:cNvPr id="44" name="!!dot-6"/>
+          <p:cNvSpPr/>
+          <p:nvPr/>
+        </p:nvSpPr>
+        <p:spPr>
+          <a:xfrm>
+            <a:off x="11439144" y="6400800"/>
+            <a:ext cx="100584" cy="100584"/>
+          </a:xfrm>
+          <a:prstGeom prst="ellipse">
+            <a:avLst/>
+          </a:prstGeom>
+          <a:solidFill>
+            <a:srgbClr val="3A4A7A"/>
+          </a:solidFill>
+          <a:ln w="12700">
+            <a:solidFill>
+              <a:srgbClr val="3A4A7A"/>
+            </a:solidFill>
+            <a:prstDash val="solid"/>
+          </a:ln>
+        </p:spPr>
+      </p:sp>
+      <p:sp>
+        <p:nvSpPr>
+          <p:cNvPr id="45" name="!!dot-7"/>
+          <p:cNvSpPr/>
+          <p:nvPr/>
+        </p:nvSpPr>
+        <p:spPr>
+          <a:xfrm>
+            <a:off x="11676888" y="6400800"/>
             <a:ext cx="155448" cy="155448"/>
           </a:xfrm>
           <a:prstGeom prst="ellipse">
@@ -10381,10 +12567,10 @@
   <a:themeElements>
     <a:clrScheme name="Office">
       <a:dk1>
-        <a:sysClr val="windowText" lastClr="F0F0F0"/>
+        <a:sysClr val="windowText" lastClr="000000"/>
       </a:dk1>
       <a:lt1>
-        <a:sysClr val="window" lastClr="000000"/>
+        <a:sysClr val="window" lastClr="FFFFFF"/>
       </a:lt1>
       <a:dk2>
         <a:srgbClr val="44546A"/>
@@ -10669,299 +12855,4 @@
     </a:ext>
   </a:extLst>
 </a:theme>
-</file>
-
-<file path=ppt/theme/theme2.xml><?xml version="1.0" encoding="utf-8"?>
-<a:theme xmlns:a="http://schemas.openxmlformats.org/drawingml/2006/main" name="Office Theme">
-  <a:themeElements>
-    <a:clrScheme name="Office">
-      <a:dk1>
-        <a:sysClr val="windowText" lastClr="F0F0F0"/>
-      </a:dk1>
-      <a:lt1>
-        <a:sysClr val="window" lastClr="000000"/>
-      </a:lt1>
-      <a:dk2>
-        <a:srgbClr val="44546A"/>
-      </a:dk2>
-      <a:lt2>
-        <a:srgbClr val="E7E6E6"/>
-      </a:lt2>
-      <a:accent1>
-        <a:srgbClr val="4472C4"/>
-      </a:accent1>
-      <a:accent2>
-        <a:srgbClr val="ED7D31"/>
-      </a:accent2>
-      <a:accent3>
-        <a:srgbClr val="A5A5A5"/>
-      </a:accent3>
-      <a:accent4>
-        <a:srgbClr val="FFC000"/>
-      </a:accent4>
-      <a:accent5>
-        <a:srgbClr val="5B9BD5"/>
-      </a:accent5>
-      <a:accent6>
-        <a:srgbClr val="70AD47"/>
-      </a:accent6>
-      <a:hlink>
-        <a:srgbClr val="0563C1"/>
-      </a:hlink>
-      <a:folHlink>
-        <a:srgbClr val="954F72"/>
-      </a:folHlink>
-    </a:clrScheme>
-    <a:fontScheme name="Office">
-      <a:majorFont>
-        <a:latin typeface="Calibri Light" panose="020F0302020204030204"/>
-        <a:ea typeface=""/>
-        <a:cs typeface=""/>
-        <a:font script="Jpan" typeface="游ゴシック Light"/>
-        <a:font script="Hang" typeface="맑은 고딕"/>
-        <a:font script="Hans" typeface="等线 Light"/>
-        <a:font script="Hant" typeface="新細明體"/>
-        <a:font script="Arab" typeface="Times New Roman"/>
-        <a:font script="Hebr" typeface="Times New Roman"/>
-        <a:font script="Thai" typeface="Angsana New"/>
-        <a:font script="Ethi" typeface="Nyala"/>
-        <a:font script="Beng" typeface="Vrinda"/>
-        <a:font script="Gujr" typeface="Shruti"/>
-        <a:font script="Khmr" typeface="MoolBoran"/>
-        <a:font script="Knda" typeface="Tunga"/>
-        <a:font script="Guru" typeface="Raavi"/>
-        <a:font script="Cans" typeface="Euphemia"/>
-        <a:font script="Cher" typeface="Plantagenet Cherokee"/>
-        <a:font script="Yiii" typeface="Microsoft Yi Baiti"/>
-        <a:font script="Tibt" typeface="Microsoft Himalaya"/>
-        <a:font script="Thaa" typeface="MV Boli"/>
-        <a:font script="Deva" typeface="Mangal"/>
-        <a:font script="Telu" typeface="Gautami"/>
-        <a:font script="Taml" typeface="Latha"/>
-        <a:font script="Syrc" typeface="Estrangelo Edessa"/>
-        <a:font script="Orya" typeface="Kalinga"/>
-        <a:font script="Mlym" typeface="Kartika"/>
-        <a:font script="Laoo" typeface="DokChampa"/>
-        <a:font script="Sinh" typeface="Iskoola Pota"/>
-        <a:font script="Mong" typeface="Mongolian Baiti"/>
-        <a:font script="Viet" typeface="Times New Roman"/>
-        <a:font script="Uigh" typeface="Microsoft Uighur"/>
-        <a:font script="Geor" typeface="Sylfaen"/>
-        <a:font script="Armn" typeface="Arial"/>
-        <a:font script="Bugi" typeface="Leelawadee UI"/>
-        <a:font script="Bopo" typeface="Microsoft JhengHei"/>
-        <a:font script="Java" typeface="Javanese Text"/>
-        <a:font script="Lisu" typeface="Segoe UI"/>
-        <a:font script="Mymr" typeface="Myanmar Text"/>
-        <a:font script="Nkoo" typeface="Ebrima"/>
-        <a:font script="Olck" typeface="Nirmala UI"/>
-        <a:font script="Osma" typeface="Ebrima"/>
-        <a:font script="Phag" typeface="Phagspa"/>
-        <a:font script="Syrn" typeface="Estrangelo Edessa"/>
-        <a:font script="Syrj" typeface="Estrangelo Edessa"/>
-        <a:font script="Syre" typeface="Estrangelo Edessa"/>
-        <a:font script="Sora" typeface="Nirmala UI"/>
-        <a:font script="Tale" typeface="Microsoft Tai Le"/>
-        <a:font script="Talu" typeface="Microsoft New Tai Lue"/>
-        <a:font script="Tfng" typeface="Ebrima"/>
-      </a:majorFont>
-      <a:minorFont>
-        <a:latin typeface="Calibri" panose="020F0502020204030204"/>
-        <a:ea typeface=""/>
-        <a:cs typeface=""/>
-        <a:font script="Jpan" typeface="游ゴシック"/>
-        <a:font script="Hang" typeface="맑은 고딕"/>
-        <a:font script="Hans" typeface="等线"/>
-        <a:font script="Hant" typeface="新細明體"/>
-        <a:font script="Arab" typeface="Arial"/>
-        <a:font script="Hebr" typeface="Arial"/>
-        <a:font script="Thai" typeface="Cordia New"/>
-        <a:font script="Ethi" typeface="Nyala"/>
-        <a:font script="Beng" typeface="Vrinda"/>
-        <a:font script="Gujr" typeface="Shruti"/>
-        <a:font script="Khmr" typeface="DaunPenh"/>
-        <a:font script="Knda" typeface="Tunga"/>
-        <a:font script="Guru" typeface="Raavi"/>
-        <a:font script="Cans" typeface="Euphemia"/>
-        <a:font script="Cher" typeface="Plantagenet Cherokee"/>
-        <a:font script="Yiii" typeface="Microsoft Yi Baiti"/>
-        <a:font script="Tibt" typeface="Microsoft Himalaya"/>
-        <a:font script="Thaa" typeface="MV Boli"/>
-        <a:font script="Deva" typeface="Mangal"/>
-        <a:font script="Telu" typeface="Gautami"/>
-        <a:font script="Taml" typeface="Latha"/>
-        <a:font script="Syrc" typeface="Estrangelo Edessa"/>
-        <a:font script="Orya" typeface="Kalinga"/>
-        <a:font script="Mlym" typeface="Kartika"/>
-        <a:font script="Laoo" typeface="DokChampa"/>
-        <a:font script="Sinh" typeface="Iskoola Pota"/>
-        <a:font script="Mong" typeface="Mongolian Baiti"/>
-        <a:font script="Viet" typeface="Arial"/>
-        <a:font script="Uigh" typeface="Microsoft Uighur"/>
-        <a:font script="Geor" typeface="Sylfaen"/>
-        <a:font script="Armn" typeface="Arial"/>
-        <a:font script="Bugi" typeface="Leelawadee UI"/>
-        <a:font script="Bopo" typeface="Microsoft JhengHei"/>
-        <a:font script="Java" typeface="Javanese Text"/>
-        <a:font script="Lisu" typeface="Segoe UI"/>
-        <a:font script="Mymr" typeface="Myanmar Text"/>
-        <a:font script="Nkoo" typeface="Ebrima"/>
-        <a:font script="Olck" typeface="Nirmala UI"/>
-        <a:font script="Osma" typeface="Ebrima"/>
-        <a:font script="Phag" typeface="Phagspa"/>
-        <a:font script="Syrn" typeface="Estrangelo Edessa"/>
-        <a:font script="Syrj" typeface="Estrangelo Edessa"/>
-        <a:font script="Syre" typeface="Estrangelo Edessa"/>
-        <a:font script="Sora" typeface="Nirmala UI"/>
-        <a:font script="Tale" typeface="Microsoft Tai Le"/>
-        <a:font script="Talu" typeface="Microsoft New Tai Lue"/>
-        <a:font script="Tfng" typeface="Ebrima"/>
-      </a:minorFont>
-    </a:fontScheme>
-    <a:fmtScheme name="Office">
-      <a:fillStyleLst>
-        <a:solidFill>
-          <a:schemeClr val="phClr"/>
-        </a:solidFill>
-        <a:gradFill rotWithShape="1">
-          <a:gsLst>
-            <a:gs pos="0">
-              <a:schemeClr val="phClr">
-                <a:lumMod val="110000"/>
-                <a:satMod val="105000"/>
-                <a:tint val="67000"/>
-              </a:schemeClr>
-            </a:gs>
-            <a:gs pos="50000">
-              <a:schemeClr val="phClr">
-                <a:lumMod val="105000"/>
-                <a:satMod val="103000"/>
-                <a:tint val="73000"/>
-              </a:schemeClr>
-            </a:gs>
-            <a:gs pos="100000">
-              <a:schemeClr val="phClr">
-                <a:lumMod val="105000"/>
-                <a:satMod val="109000"/>
-                <a:tint val="81000"/>
-              </a:schemeClr>
-            </a:gs>
-          </a:gsLst>
-          <a:lin ang="5400000" scaled="0"/>
-        </a:gradFill>
-        <a:gradFill rotWithShape="1">
-          <a:gsLst>
-            <a:gs pos="0">
-              <a:schemeClr val="phClr">
-                <a:satMod val="103000"/>
-                <a:lumMod val="102000"/>
-                <a:tint val="94000"/>
-              </a:schemeClr>
-            </a:gs>
-            <a:gs pos="50000">
-              <a:schemeClr val="phClr">
-                <a:satMod val="110000"/>
-                <a:lumMod val="100000"/>
-                <a:shade val="100000"/>
-              </a:schemeClr>
-            </a:gs>
-            <a:gs pos="100000">
-              <a:schemeClr val="phClr">
-                <a:lumMod val="99000"/>
-                <a:satMod val="120000"/>
-                <a:shade val="78000"/>
-              </a:schemeClr>
-            </a:gs>
-          </a:gsLst>
-          <a:lin ang="5400000" scaled="0"/>
-        </a:gradFill>
-      </a:fillStyleLst>
-      <a:lnStyleLst>
-        <a:ln w="6350" cap="flat" cmpd="sng" algn="ctr">
-          <a:solidFill>
-            <a:schemeClr val="phClr"/>
-          </a:solidFill>
-          <a:prstDash val="solid"/>
-          <a:miter lim="800000"/>
-        </a:ln>
-        <a:ln w="12700" cap="flat" cmpd="sng" algn="ctr">
-          <a:solidFill>
-            <a:schemeClr val="phClr"/>
-          </a:solidFill>
-          <a:prstDash val="solid"/>
-          <a:miter lim="800000"/>
-        </a:ln>
-        <a:ln w="19050" cap="flat" cmpd="sng" algn="ctr">
-          <a:solidFill>
-            <a:schemeClr val="phClr"/>
-          </a:solidFill>
-          <a:prstDash val="solid"/>
-          <a:miter lim="800000"/>
-        </a:ln>
-      </a:lnStyleLst>
-      <a:effectStyleLst>
-        <a:effectStyle>
-          <a:effectLst/>
-        </a:effectStyle>
-        <a:effectStyle>
-          <a:effectLst/>
-        </a:effectStyle>
-        <a:effectStyle>
-          <a:effectLst>
-            <a:outerShdw blurRad="57150" dist="19050" dir="5400000" algn="ctr" rotWithShape="0">
-              <a:srgbClr val="000000">
-                <a:alpha val="63000"/>
-              </a:srgbClr>
-            </a:outerShdw>
-          </a:effectLst>
-        </a:effectStyle>
-      </a:effectStyleLst>
-      <a:bgFillStyleLst>
-        <a:solidFill>
-          <a:schemeClr val="phClr"/>
-        </a:solidFill>
-        <a:solidFill>
-          <a:schemeClr val="phClr">
-            <a:tint val="95000"/>
-            <a:satMod val="170000"/>
-          </a:schemeClr>
-        </a:solidFill>
-        <a:gradFill rotWithShape="1">
-          <a:gsLst>
-            <a:gs pos="0">
-              <a:schemeClr val="phClr">
-                <a:tint val="93000"/>
-                <a:satMod val="150000"/>
-                <a:shade val="98000"/>
-                <a:lumMod val="102000"/>
-              </a:schemeClr>
-            </a:gs>
-            <a:gs pos="50000">
-              <a:schemeClr val="phClr">
-                <a:tint val="98000"/>
-                <a:satMod val="130000"/>
-                <a:shade val="90000"/>
-                <a:lumMod val="103000"/>
-              </a:schemeClr>
-            </a:gs>
-            <a:gs pos="100000">
-              <a:schemeClr val="phClr">
-                <a:shade val="63000"/>
-                <a:satMod val="120000"/>
-              </a:schemeClr>
-            </a:gs>
-          </a:gsLst>
-          <a:lin ang="5400000" scaled="0"/>
-        </a:gradFill>
-      </a:bgFillStyleLst>
-    </a:fmtScheme>
-  </a:themeElements>
-  <a:objectDefaults/>
-  <a:extraClrSchemeLst/>
-  <a:extLst>
-    <a:ext uri="{05A4C25C-085E-4340-85A3-A5531E510DB2}">
-      <thm15:themeFamily xmlns:thm15="http://schemas.microsoft.com/office/thememl/2012/main" name="Office Theme" id="{62F939B6-93AF-4DB8-9C6B-D6C7DFDC589F}" vid="{4A3C46E8-61CC-4603-A589-7422A47A8E4A}"/>
-    </a:ext>
-  </a:extLst>
-</a:theme>
 </file>